--- a/manuscript/RustyClean_Status.pptx
+++ b/manuscript/RustyClean_Status.pptx
@@ -4,26 +4,23 @@
   <p:sldMasterIdLst>
     <p:sldMasterId id="2147483648" r:id="rId1"/>
   </p:sldMasterIdLst>
-  <p:notesMasterIdLst>
-    <p:notesMasterId r:id="rId16"/>
-  </p:notesMasterIdLst>
   <p:sldIdLst>
-    <p:sldId id="256" r:id="rId2"/>
-    <p:sldId id="257" r:id="rId3"/>
-    <p:sldId id="258" r:id="rId4"/>
-    <p:sldId id="259" r:id="rId5"/>
-    <p:sldId id="260" r:id="rId6"/>
-    <p:sldId id="261" r:id="rId7"/>
-    <p:sldId id="262" r:id="rId8"/>
-    <p:sldId id="263" r:id="rId9"/>
-    <p:sldId id="264" r:id="rId10"/>
-    <p:sldId id="265" r:id="rId11"/>
-    <p:sldId id="266" r:id="rId12"/>
-    <p:sldId id="267" r:id="rId13"/>
-    <p:sldId id="268" r:id="rId14"/>
-    <p:sldId id="269" r:id="rId15"/>
+    <p:sldId id="256" r:id="rId7"/>
+    <p:sldId id="257" r:id="rId9"/>
+    <p:sldId id="258" r:id="rId10"/>
+    <p:sldId id="259" r:id="rId11"/>
+    <p:sldId id="260" r:id="rId12"/>
+    <p:sldId id="261" r:id="rId13"/>
+    <p:sldId id="262" r:id="rId14"/>
+    <p:sldId id="263" r:id="rId15"/>
+    <p:sldId id="264" r:id="rId16"/>
+    <p:sldId id="265" r:id="rId17"/>
+    <p:sldId id="266" r:id="rId18"/>
+    <p:sldId id="267" r:id="rId19"/>
+    <p:sldId id="268" r:id="rId20"/>
+    <p:sldId id="269" r:id="rId21"/>
   </p:sldIdLst>
-  <p:sldSz cx="12192000" cy="6858000"/>
+  <p:sldSz cx="12191695" cy="6858000" type="screen4x3"/>
   <p:notesSz cx="6858000" cy="9144000"/>
   <p:defaultTextStyle>
     <a:defPPr>
@@ -120,27 +117,11 @@
       </a:defRPr>
     </a:lvl9pPr>
   </p:defaultTextStyle>
-  <p:extLst>
-    <p:ext uri="{EFAFB233-063F-42B5-8137-9DF3F51BA10A}">
-      <p15:sldGuideLst xmlns:p15="http://schemas.microsoft.com/office/powerpoint/2012/main">
-        <p15:guide id="1" orient="horz" pos="2183" userDrawn="1">
-          <p15:clr>
-            <a:srgbClr val="A4A3A4"/>
-          </p15:clr>
-        </p15:guide>
-        <p15:guide id="2" pos="2880">
-          <p15:clr>
-            <a:srgbClr val="A4A3A4"/>
-          </p15:clr>
-        </p15:guide>
-      </p15:sldGuideLst>
-    </p:ext>
-  </p:extLst>
 </p:presentation>
 </file>
 
 <file path=ppt/notesMasters/notesMaster1.xml><?xml version="1.0" encoding="utf-8"?>
-<p:notesMaster xmlns:a="http://schemas.openxmlformats.org/drawingml/2006/main" xmlns:r="http://schemas.openxmlformats.org/officeDocument/2006/relationships" xmlns:p="http://schemas.openxmlformats.org/presentationml/2006/main">
+<p:notesMaster xmlns:a="http://schemas.openxmlformats.org/drawingml/2006/main" xmlns:p="http://schemas.openxmlformats.org/presentationml/2006/main" xmlns:r="http://schemas.openxmlformats.org/officeDocument/2006/relationships">
   <p:cSld>
     <p:bg>
       <p:bgRef idx="1001">
@@ -161,16 +142,241 @@
           <a:chExt cx="0" cy="0"/>
         </a:xfrm>
       </p:grpSpPr>
+      <p:sp>
+        <p:nvSpPr>
+          <p:cNvPr id="2" name="Header Placeholder 1"/>
+          <p:cNvSpPr>
+            <a:spLocks noGrp="1"/>
+          </p:cNvSpPr>
+          <p:nvPr>
+            <p:ph type="hdr" sz="quarter"/>
+          </p:nvPr>
+        </p:nvSpPr>
+        <p:spPr>
+          <a:xfrm>
+            <a:off x="0" y="0"/>
+            <a:ext cx="2971800" cy="457200"/>
+          </a:xfrm>
+          <a:prstGeom prst="rect">
+            <a:avLst/>
+          </a:prstGeom>
+        </p:spPr>
+        <p:txBody>
+          <a:bodyPr vert="horz" lIns="91440" tIns="45720" rIns="91440" bIns="45720" rtlCol="0"/>
+          <a:lstStyle>
+            <a:lvl1pPr algn="l">
+              <a:defRPr sz="1200"/>
+            </a:lvl1pPr>
+          </a:lstStyle>
+          <a:p>
+            <a:endParaRPr lang="en-US"/>
+          </a:p>
+        </p:txBody>
+      </p:sp>
+      <p:sp>
+        <p:nvSpPr>
+          <p:cNvPr id="3" name="Date Placeholder 2"/>
+          <p:cNvSpPr>
+            <a:spLocks noGrp="1"/>
+          </p:cNvSpPr>
+          <p:nvPr>
+            <p:ph type="dt" idx="1"/>
+          </p:nvPr>
+        </p:nvSpPr>
+        <p:spPr>
+          <a:xfrm>
+            <a:off x="3884613" y="0"/>
+            <a:ext cx="2971800" cy="457200"/>
+          </a:xfrm>
+          <a:prstGeom prst="rect">
+            <a:avLst/>
+          </a:prstGeom>
+        </p:spPr>
+        <p:txBody>
+          <a:bodyPr vert="horz" lIns="91440" tIns="45720" rIns="91440" bIns="45720" rtlCol="0"/>
+          <a:lstStyle>
+            <a:lvl1pPr algn="r">
+              <a:defRPr sz="1200"/>
+            </a:lvl1pPr>
+          </a:lstStyle>
+          <a:p>
+            <a:fld id="{0F89C1C7-3DCD-1040-A9CF-14679D8B5DDD}" type="datetimeFigureOut">
+              <a:rPr lang="en-US" smtClean="0"/>
+              <a:t>10/17/16</a:t>
+            </a:fld>
+            <a:endParaRPr lang="en-US"/>
+          </a:p>
+        </p:txBody>
+      </p:sp>
+      <p:sp>
+        <p:nvSpPr>
+          <p:cNvPr id="4" name="Slide Image Placeholder 3"/>
+          <p:cNvSpPr>
+            <a:spLocks noGrp="1" noRot="1" noChangeAspect="1"/>
+          </p:cNvSpPr>
+          <p:nvPr>
+            <p:ph type="sldImg" idx="2"/>
+          </p:nvPr>
+        </p:nvSpPr>
+        <p:spPr>
+          <a:xfrm>
+            <a:off x="1143000" y="685800"/>
+            <a:ext cx="4572000" cy="3429000"/>
+          </a:xfrm>
+          <a:prstGeom prst="rect">
+            <a:avLst/>
+          </a:prstGeom>
+          <a:noFill/>
+          <a:ln w="12700">
+            <a:solidFill>
+              <a:prstClr val="black"/>
+            </a:solidFill>
+          </a:ln>
+        </p:spPr>
+        <p:txBody>
+          <a:bodyPr vert="horz" lIns="91440" tIns="45720" rIns="91440" bIns="45720" rtlCol="0" anchor="ctr"/>
+          <a:lstStyle/>
+          <a:p>
+            <a:endParaRPr lang="en-US"/>
+          </a:p>
+        </p:txBody>
+      </p:sp>
+      <p:sp>
+        <p:nvSpPr>
+          <p:cNvPr id="5" name="Notes Placeholder 4"/>
+          <p:cNvSpPr>
+            <a:spLocks noGrp="1"/>
+          </p:cNvSpPr>
+          <p:nvPr>
+            <p:ph type="body" sz="quarter" idx="3"/>
+          </p:nvPr>
+        </p:nvSpPr>
+        <p:spPr>
+          <a:xfrm>
+            <a:off x="685800" y="4343400"/>
+            <a:ext cx="5486400" cy="4114800"/>
+          </a:xfrm>
+          <a:prstGeom prst="rect">
+            <a:avLst/>
+          </a:prstGeom>
+        </p:spPr>
+        <p:txBody>
+          <a:bodyPr vert="horz" lIns="91440" tIns="45720" rIns="91440" bIns="45720" rtlCol="0"/>
+          <a:lstStyle/>
+          <a:p>
+            <a:pPr lvl="0"/>
+            <a:r>
+              <a:rPr lang="en-US" smtClean="0"/>
+              <a:t>Click to edit Master text styles</a:t>
+            </a:r>
+          </a:p>
+          <a:p>
+            <a:pPr lvl="1"/>
+            <a:r>
+              <a:rPr lang="en-US" smtClean="0"/>
+              <a:t>Second level</a:t>
+            </a:r>
+          </a:p>
+          <a:p>
+            <a:pPr lvl="2"/>
+            <a:r>
+              <a:rPr lang="en-US" smtClean="0"/>
+              <a:t>Third level</a:t>
+            </a:r>
+          </a:p>
+          <a:p>
+            <a:pPr lvl="3"/>
+            <a:r>
+              <a:rPr lang="en-US" smtClean="0"/>
+              <a:t>Fourth level</a:t>
+            </a:r>
+          </a:p>
+          <a:p>
+            <a:pPr lvl="4"/>
+            <a:r>
+              <a:rPr lang="en-US" smtClean="0"/>
+              <a:t>Fifth level</a:t>
+            </a:r>
+            <a:endParaRPr lang="en-US"/>
+          </a:p>
+        </p:txBody>
+      </p:sp>
+      <p:sp>
+        <p:nvSpPr>
+          <p:cNvPr id="6" name="Footer Placeholder 5"/>
+          <p:cNvSpPr>
+            <a:spLocks noGrp="1"/>
+          </p:cNvSpPr>
+          <p:nvPr>
+            <p:ph type="ftr" sz="quarter" idx="4"/>
+          </p:nvPr>
+        </p:nvSpPr>
+        <p:spPr>
+          <a:xfrm>
+            <a:off x="0" y="8685213"/>
+            <a:ext cx="2971800" cy="457200"/>
+          </a:xfrm>
+          <a:prstGeom prst="rect">
+            <a:avLst/>
+          </a:prstGeom>
+        </p:spPr>
+        <p:txBody>
+          <a:bodyPr vert="horz" lIns="91440" tIns="45720" rIns="91440" bIns="45720" rtlCol="0" anchor="b"/>
+          <a:lstStyle>
+            <a:lvl1pPr algn="l">
+              <a:defRPr sz="1200"/>
+            </a:lvl1pPr>
+          </a:lstStyle>
+          <a:p>
+            <a:endParaRPr lang="en-US"/>
+          </a:p>
+        </p:txBody>
+      </p:sp>
+      <p:sp>
+        <p:nvSpPr>
+          <p:cNvPr id="7" name="Slide Number Placeholder 6"/>
+          <p:cNvSpPr>
+            <a:spLocks noGrp="1"/>
+          </p:cNvSpPr>
+          <p:nvPr>
+            <p:ph type="sldNum" sz="quarter" idx="5"/>
+          </p:nvPr>
+        </p:nvSpPr>
+        <p:spPr>
+          <a:xfrm>
+            <a:off x="3884613" y="8685213"/>
+            <a:ext cx="2971800" cy="457200"/>
+          </a:xfrm>
+          <a:prstGeom prst="rect">
+            <a:avLst/>
+          </a:prstGeom>
+        </p:spPr>
+        <p:txBody>
+          <a:bodyPr vert="horz" lIns="91440" tIns="45720" rIns="91440" bIns="45720" rtlCol="0" anchor="b"/>
+          <a:lstStyle>
+            <a:lvl1pPr algn="r">
+              <a:defRPr sz="1200"/>
+            </a:lvl1pPr>
+          </a:lstStyle>
+          <a:p>
+            <a:fld id="{BB5E49A5-4136-284D-997B-48E1D791AD67}" type="slidenum">
+              <a:rPr lang="en-US" smtClean="0"/>
+              <a:t>‹#›</a:t>
+            </a:fld>
+            <a:endParaRPr lang="en-US"/>
+          </a:p>
+        </p:txBody>
+      </p:sp>
     </p:spTree>
     <p:extLst>
       <p:ext uri="{BB962C8B-B14F-4D97-AF65-F5344CB8AC3E}">
-        <p14:creationId xmlns:p14="http://schemas.microsoft.com/office/powerpoint/2010/main" val="449749852"/>
+        <p14:creationId xmlns:p14="http://schemas.microsoft.com/office/powerpoint/2010/main" val="2623252185"/>
       </p:ext>
     </p:extLst>
   </p:cSld>
   <p:clrMap bg1="lt1" tx1="dk1" bg2="lt2" tx2="dk2" accent1="accent1" accent2="accent2" accent3="accent3" accent4="accent4" accent5="accent5" accent6="accent6" hlink="hlink" folHlink="folHlink"/>
   <p:notesStyle>
-    <a:lvl1pPr marL="0" algn="l" defTabSz="914400" rtl="0" eaLnBrk="1" latinLnBrk="0" hangingPunct="1">
+    <a:lvl1pPr marL="0" algn="l" defTabSz="457200" rtl="0" eaLnBrk="1" latinLnBrk="0" hangingPunct="1">
       <a:defRPr sz="1200" kern="1200">
         <a:solidFill>
           <a:schemeClr val="tx1"/>
@@ -180,7 +386,7 @@
         <a:cs typeface="+mn-cs"/>
       </a:defRPr>
     </a:lvl1pPr>
-    <a:lvl2pPr marL="457200" algn="l" defTabSz="914400" rtl="0" eaLnBrk="1" latinLnBrk="0" hangingPunct="1">
+    <a:lvl2pPr marL="457200" algn="l" defTabSz="457200" rtl="0" eaLnBrk="1" latinLnBrk="0" hangingPunct="1">
       <a:defRPr sz="1200" kern="1200">
         <a:solidFill>
           <a:schemeClr val="tx1"/>
@@ -190,7 +396,7 @@
         <a:cs typeface="+mn-cs"/>
       </a:defRPr>
     </a:lvl2pPr>
-    <a:lvl3pPr marL="914400" algn="l" defTabSz="914400" rtl="0" eaLnBrk="1" latinLnBrk="0" hangingPunct="1">
+    <a:lvl3pPr marL="914400" algn="l" defTabSz="457200" rtl="0" eaLnBrk="1" latinLnBrk="0" hangingPunct="1">
       <a:defRPr sz="1200" kern="1200">
         <a:solidFill>
           <a:schemeClr val="tx1"/>
@@ -200,7 +406,7 @@
         <a:cs typeface="+mn-cs"/>
       </a:defRPr>
     </a:lvl3pPr>
-    <a:lvl4pPr marL="1371600" algn="l" defTabSz="914400" rtl="0" eaLnBrk="1" latinLnBrk="0" hangingPunct="1">
+    <a:lvl4pPr marL="1371600" algn="l" defTabSz="457200" rtl="0" eaLnBrk="1" latinLnBrk="0" hangingPunct="1">
       <a:defRPr sz="1200" kern="1200">
         <a:solidFill>
           <a:schemeClr val="tx1"/>
@@ -210,7 +416,7 @@
         <a:cs typeface="+mn-cs"/>
       </a:defRPr>
     </a:lvl4pPr>
-    <a:lvl5pPr marL="1828800" algn="l" defTabSz="914400" rtl="0" eaLnBrk="1" latinLnBrk="0" hangingPunct="1">
+    <a:lvl5pPr marL="1828800" algn="l" defTabSz="457200" rtl="0" eaLnBrk="1" latinLnBrk="0" hangingPunct="1">
       <a:defRPr sz="1200" kern="1200">
         <a:solidFill>
           <a:schemeClr val="tx1"/>
@@ -220,7 +426,7 @@
         <a:cs typeface="+mn-cs"/>
       </a:defRPr>
     </a:lvl5pPr>
-    <a:lvl6pPr marL="2286000" algn="l" defTabSz="914400" rtl="0" eaLnBrk="1" latinLnBrk="0" hangingPunct="1">
+    <a:lvl6pPr marL="2286000" algn="l" defTabSz="457200" rtl="0" eaLnBrk="1" latinLnBrk="0" hangingPunct="1">
       <a:defRPr sz="1200" kern="1200">
         <a:solidFill>
           <a:schemeClr val="tx1"/>
@@ -230,7 +436,7 @@
         <a:cs typeface="+mn-cs"/>
       </a:defRPr>
     </a:lvl6pPr>
-    <a:lvl7pPr marL="2743200" algn="l" defTabSz="914400" rtl="0" eaLnBrk="1" latinLnBrk="0" hangingPunct="1">
+    <a:lvl7pPr marL="2743200" algn="l" defTabSz="457200" rtl="0" eaLnBrk="1" latinLnBrk="0" hangingPunct="1">
       <a:defRPr sz="1200" kern="1200">
         <a:solidFill>
           <a:schemeClr val="tx1"/>
@@ -240,7 +446,7 @@
         <a:cs typeface="+mn-cs"/>
       </a:defRPr>
     </a:lvl7pPr>
-    <a:lvl8pPr marL="3200400" algn="l" defTabSz="914400" rtl="0" eaLnBrk="1" latinLnBrk="0" hangingPunct="1">
+    <a:lvl8pPr marL="3200400" algn="l" defTabSz="457200" rtl="0" eaLnBrk="1" latinLnBrk="0" hangingPunct="1">
       <a:defRPr sz="1200" kern="1200">
         <a:solidFill>
           <a:schemeClr val="tx1"/>
@@ -250,7 +456,7 @@
         <a:cs typeface="+mn-cs"/>
       </a:defRPr>
     </a:lvl8pPr>
-    <a:lvl9pPr marL="3657600" algn="l" defTabSz="914400" rtl="0" eaLnBrk="1" latinLnBrk="0" hangingPunct="1">
+    <a:lvl9pPr marL="3657600" algn="l" defTabSz="457200" rtl="0" eaLnBrk="1" latinLnBrk="0" hangingPunct="1">
       <a:defRPr sz="1200" kern="1200">
         <a:solidFill>
           <a:schemeClr val="tx1"/>
@@ -265,7 +471,7 @@
 </file>
 
 <file path=ppt/notesSlides/notesSlide1.xml><?xml version="1.0" encoding="utf-8"?>
-<p:notes xmlns:a="http://schemas.openxmlformats.org/drawingml/2006/main" xmlns:r="http://schemas.openxmlformats.org/officeDocument/2006/relationships" xmlns:p="http://schemas.openxmlformats.org/presentationml/2006/main">
+<p:notes xmlns:a="http://schemas.openxmlformats.org/drawingml/2006/main" xmlns:p="http://schemas.openxmlformats.org/presentationml/2006/main" xmlns:r="http://schemas.openxmlformats.org/officeDocument/2006/relationships">
   <p:cSld>
     <p:spTree>
       <p:nvGrpSpPr>
@@ -285,7 +491,7 @@
         <p:nvSpPr>
           <p:cNvPr id="2" name="Slide Image Placeholder 1"/>
           <p:cNvSpPr>
-            <a:spLocks noGrp="1" noRot="1" noChangeAspect="1"/>
+            <a:spLocks noGrp="1"/>
           </p:cNvSpPr>
           <p:nvPr>
             <p:ph type="sldImg" idx="2"/>
@@ -300,7 +506,7 @@
             <a:spLocks noGrp="1"/>
           </p:cNvSpPr>
           <p:nvPr>
-            <p:ph type="body" sz="quarter" idx="3"/>
+            <p:ph type="body" idx="3" sz="quarter"/>
           </p:nvPr>
         </p:nvSpPr>
         <p:spPr/>
@@ -321,7 +527,7 @@
             <a:spLocks noGrp="1"/>
           </p:cNvSpPr>
           <p:nvPr>
-            <p:ph type="sldNum" sz="quarter" idx="5"/>
+            <p:ph type="sldNum" idx="5" sz="quarter"/>
           </p:nvPr>
         </p:nvSpPr>
         <p:spPr/>
@@ -335,7 +541,7 @@
 </file>
 
 <file path=ppt/notesSlides/notesSlide10.xml><?xml version="1.0" encoding="utf-8"?>
-<p:notes xmlns:a="http://schemas.openxmlformats.org/drawingml/2006/main" xmlns:r="http://schemas.openxmlformats.org/officeDocument/2006/relationships" xmlns:p="http://schemas.openxmlformats.org/presentationml/2006/main">
+<p:notes xmlns:a="http://schemas.openxmlformats.org/drawingml/2006/main" xmlns:p="http://schemas.openxmlformats.org/presentationml/2006/main" xmlns:r="http://schemas.openxmlformats.org/officeDocument/2006/relationships">
   <p:cSld>
     <p:spTree>
       <p:nvGrpSpPr>
@@ -355,7 +561,7 @@
         <p:nvSpPr>
           <p:cNvPr id="2" name="Slide Image Placeholder 1"/>
           <p:cNvSpPr>
-            <a:spLocks noGrp="1" noRot="1" noChangeAspect="1"/>
+            <a:spLocks noGrp="1"/>
           </p:cNvSpPr>
           <p:nvPr>
             <p:ph type="sldImg" idx="2"/>
@@ -370,7 +576,7 @@
             <a:spLocks noGrp="1"/>
           </p:cNvSpPr>
           <p:nvPr>
-            <p:ph type="body" sz="quarter" idx="3"/>
+            <p:ph type="body" idx="3" sz="quarter"/>
           </p:nvPr>
         </p:nvSpPr>
         <p:spPr/>
@@ -391,7 +597,7 @@
             <a:spLocks noGrp="1"/>
           </p:cNvSpPr>
           <p:nvPr>
-            <p:ph type="sldNum" sz="quarter" idx="5"/>
+            <p:ph type="sldNum" idx="5" sz="quarter"/>
           </p:nvPr>
         </p:nvSpPr>
         <p:spPr/>
@@ -405,7 +611,7 @@
 </file>
 
 <file path=ppt/notesSlides/notesSlide11.xml><?xml version="1.0" encoding="utf-8"?>
-<p:notes xmlns:a="http://schemas.openxmlformats.org/drawingml/2006/main" xmlns:r="http://schemas.openxmlformats.org/officeDocument/2006/relationships" xmlns:p="http://schemas.openxmlformats.org/presentationml/2006/main">
+<p:notes xmlns:a="http://schemas.openxmlformats.org/drawingml/2006/main" xmlns:p="http://schemas.openxmlformats.org/presentationml/2006/main" xmlns:r="http://schemas.openxmlformats.org/officeDocument/2006/relationships">
   <p:cSld>
     <p:spTree>
       <p:nvGrpSpPr>
@@ -425,7 +631,7 @@
         <p:nvSpPr>
           <p:cNvPr id="2" name="Slide Image Placeholder 1"/>
           <p:cNvSpPr>
-            <a:spLocks noGrp="1" noRot="1" noChangeAspect="1"/>
+            <a:spLocks noGrp="1"/>
           </p:cNvSpPr>
           <p:nvPr>
             <p:ph type="sldImg" idx="2"/>
@@ -440,7 +646,7 @@
             <a:spLocks noGrp="1"/>
           </p:cNvSpPr>
           <p:nvPr>
-            <p:ph type="body" sz="quarter" idx="3"/>
+            <p:ph type="body" idx="3" sz="quarter"/>
           </p:nvPr>
         </p:nvSpPr>
         <p:spPr/>
@@ -461,7 +667,7 @@
             <a:spLocks noGrp="1"/>
           </p:cNvSpPr>
           <p:nvPr>
-            <p:ph type="sldNum" sz="quarter" idx="5"/>
+            <p:ph type="sldNum" idx="5" sz="quarter"/>
           </p:nvPr>
         </p:nvSpPr>
         <p:spPr/>
@@ -475,7 +681,7 @@
 </file>
 
 <file path=ppt/notesSlides/notesSlide12.xml><?xml version="1.0" encoding="utf-8"?>
-<p:notes xmlns:a="http://schemas.openxmlformats.org/drawingml/2006/main" xmlns:r="http://schemas.openxmlformats.org/officeDocument/2006/relationships" xmlns:p="http://schemas.openxmlformats.org/presentationml/2006/main">
+<p:notes xmlns:a="http://schemas.openxmlformats.org/drawingml/2006/main" xmlns:p="http://schemas.openxmlformats.org/presentationml/2006/main" xmlns:r="http://schemas.openxmlformats.org/officeDocument/2006/relationships">
   <p:cSld>
     <p:spTree>
       <p:nvGrpSpPr>
@@ -495,7 +701,7 @@
         <p:nvSpPr>
           <p:cNvPr id="2" name="Slide Image Placeholder 1"/>
           <p:cNvSpPr>
-            <a:spLocks noGrp="1" noRot="1" noChangeAspect="1"/>
+            <a:spLocks noGrp="1"/>
           </p:cNvSpPr>
           <p:nvPr>
             <p:ph type="sldImg" idx="2"/>
@@ -510,7 +716,7 @@
             <a:spLocks noGrp="1"/>
           </p:cNvSpPr>
           <p:nvPr>
-            <p:ph type="body" sz="quarter" idx="3"/>
+            <p:ph type="body" idx="3" sz="quarter"/>
           </p:nvPr>
         </p:nvSpPr>
         <p:spPr/>
@@ -531,7 +737,7 @@
             <a:spLocks noGrp="1"/>
           </p:cNvSpPr>
           <p:nvPr>
-            <p:ph type="sldNum" sz="quarter" idx="5"/>
+            <p:ph type="sldNum" idx="5" sz="quarter"/>
           </p:nvPr>
         </p:nvSpPr>
         <p:spPr/>
@@ -545,7 +751,7 @@
 </file>
 
 <file path=ppt/notesSlides/notesSlide13.xml><?xml version="1.0" encoding="utf-8"?>
-<p:notes xmlns:a="http://schemas.openxmlformats.org/drawingml/2006/main" xmlns:r="http://schemas.openxmlformats.org/officeDocument/2006/relationships" xmlns:p="http://schemas.openxmlformats.org/presentationml/2006/main">
+<p:notes xmlns:a="http://schemas.openxmlformats.org/drawingml/2006/main" xmlns:p="http://schemas.openxmlformats.org/presentationml/2006/main" xmlns:r="http://schemas.openxmlformats.org/officeDocument/2006/relationships">
   <p:cSld>
     <p:spTree>
       <p:nvGrpSpPr>
@@ -565,7 +771,7 @@
         <p:nvSpPr>
           <p:cNvPr id="2" name="Slide Image Placeholder 1"/>
           <p:cNvSpPr>
-            <a:spLocks noGrp="1" noRot="1" noChangeAspect="1"/>
+            <a:spLocks noGrp="1"/>
           </p:cNvSpPr>
           <p:nvPr>
             <p:ph type="sldImg" idx="2"/>
@@ -580,7 +786,7 @@
             <a:spLocks noGrp="1"/>
           </p:cNvSpPr>
           <p:nvPr>
-            <p:ph type="body" sz="quarter" idx="3"/>
+            <p:ph type="body" idx="3" sz="quarter"/>
           </p:nvPr>
         </p:nvSpPr>
         <p:spPr/>
@@ -601,7 +807,7 @@
             <a:spLocks noGrp="1"/>
           </p:cNvSpPr>
           <p:nvPr>
-            <p:ph type="sldNum" sz="quarter" idx="5"/>
+            <p:ph type="sldNum" idx="5" sz="quarter"/>
           </p:nvPr>
         </p:nvSpPr>
         <p:spPr/>
@@ -615,7 +821,7 @@
 </file>
 
 <file path=ppt/notesSlides/notesSlide14.xml><?xml version="1.0" encoding="utf-8"?>
-<p:notes xmlns:a="http://schemas.openxmlformats.org/drawingml/2006/main" xmlns:r="http://schemas.openxmlformats.org/officeDocument/2006/relationships" xmlns:p="http://schemas.openxmlformats.org/presentationml/2006/main">
+<p:notes xmlns:a="http://schemas.openxmlformats.org/drawingml/2006/main" xmlns:p="http://schemas.openxmlformats.org/presentationml/2006/main" xmlns:r="http://schemas.openxmlformats.org/officeDocument/2006/relationships">
   <p:cSld>
     <p:spTree>
       <p:nvGrpSpPr>
@@ -635,7 +841,7 @@
         <p:nvSpPr>
           <p:cNvPr id="2" name="Slide Image Placeholder 1"/>
           <p:cNvSpPr>
-            <a:spLocks noGrp="1" noRot="1" noChangeAspect="1"/>
+            <a:spLocks noGrp="1"/>
           </p:cNvSpPr>
           <p:nvPr>
             <p:ph type="sldImg" idx="2"/>
@@ -650,7 +856,7 @@
             <a:spLocks noGrp="1"/>
           </p:cNvSpPr>
           <p:nvPr>
-            <p:ph type="body" sz="quarter" idx="3"/>
+            <p:ph type="body" idx="3" sz="quarter"/>
           </p:nvPr>
         </p:nvSpPr>
         <p:spPr/>
@@ -671,7 +877,7 @@
             <a:spLocks noGrp="1"/>
           </p:cNvSpPr>
           <p:nvPr>
-            <p:ph type="sldNum" sz="quarter" idx="5"/>
+            <p:ph type="sldNum" idx="5" sz="quarter"/>
           </p:nvPr>
         </p:nvSpPr>
         <p:spPr/>
@@ -685,7 +891,7 @@
 </file>
 
 <file path=ppt/notesSlides/notesSlide2.xml><?xml version="1.0" encoding="utf-8"?>
-<p:notes xmlns:a="http://schemas.openxmlformats.org/drawingml/2006/main" xmlns:r="http://schemas.openxmlformats.org/officeDocument/2006/relationships" xmlns:p="http://schemas.openxmlformats.org/presentationml/2006/main">
+<p:notes xmlns:a="http://schemas.openxmlformats.org/drawingml/2006/main" xmlns:p="http://schemas.openxmlformats.org/presentationml/2006/main" xmlns:r="http://schemas.openxmlformats.org/officeDocument/2006/relationships">
   <p:cSld>
     <p:spTree>
       <p:nvGrpSpPr>
@@ -705,7 +911,7 @@
         <p:nvSpPr>
           <p:cNvPr id="2" name="Slide Image Placeholder 1"/>
           <p:cNvSpPr>
-            <a:spLocks noGrp="1" noRot="1" noChangeAspect="1"/>
+            <a:spLocks noGrp="1"/>
           </p:cNvSpPr>
           <p:nvPr>
             <p:ph type="sldImg" idx="2"/>
@@ -720,7 +926,7 @@
             <a:spLocks noGrp="1"/>
           </p:cNvSpPr>
           <p:nvPr>
-            <p:ph type="body" sz="quarter" idx="3"/>
+            <p:ph type="body" idx="3" sz="quarter"/>
           </p:nvPr>
         </p:nvSpPr>
         <p:spPr/>
@@ -741,7 +947,7 @@
             <a:spLocks noGrp="1"/>
           </p:cNvSpPr>
           <p:nvPr>
-            <p:ph type="sldNum" sz="quarter" idx="5"/>
+            <p:ph type="sldNum" idx="5" sz="quarter"/>
           </p:nvPr>
         </p:nvSpPr>
         <p:spPr/>
@@ -755,7 +961,7 @@
 </file>
 
 <file path=ppt/notesSlides/notesSlide3.xml><?xml version="1.0" encoding="utf-8"?>
-<p:notes xmlns:a="http://schemas.openxmlformats.org/drawingml/2006/main" xmlns:r="http://schemas.openxmlformats.org/officeDocument/2006/relationships" xmlns:p="http://schemas.openxmlformats.org/presentationml/2006/main">
+<p:notes xmlns:a="http://schemas.openxmlformats.org/drawingml/2006/main" xmlns:p="http://schemas.openxmlformats.org/presentationml/2006/main" xmlns:r="http://schemas.openxmlformats.org/officeDocument/2006/relationships">
   <p:cSld>
     <p:spTree>
       <p:nvGrpSpPr>
@@ -775,7 +981,7 @@
         <p:nvSpPr>
           <p:cNvPr id="2" name="Slide Image Placeholder 1"/>
           <p:cNvSpPr>
-            <a:spLocks noGrp="1" noRot="1" noChangeAspect="1"/>
+            <a:spLocks noGrp="1"/>
           </p:cNvSpPr>
           <p:nvPr>
             <p:ph type="sldImg" idx="2"/>
@@ -790,7 +996,7 @@
             <a:spLocks noGrp="1"/>
           </p:cNvSpPr>
           <p:nvPr>
-            <p:ph type="body" sz="quarter" idx="3"/>
+            <p:ph type="body" idx="3" sz="quarter"/>
           </p:nvPr>
         </p:nvSpPr>
         <p:spPr/>
@@ -811,7 +1017,7 @@
             <a:spLocks noGrp="1"/>
           </p:cNvSpPr>
           <p:nvPr>
-            <p:ph type="sldNum" sz="quarter" idx="5"/>
+            <p:ph type="sldNum" idx="5" sz="quarter"/>
           </p:nvPr>
         </p:nvSpPr>
         <p:spPr/>
@@ -825,7 +1031,7 @@
 </file>
 
 <file path=ppt/notesSlides/notesSlide4.xml><?xml version="1.0" encoding="utf-8"?>
-<p:notes xmlns:a="http://schemas.openxmlformats.org/drawingml/2006/main" xmlns:r="http://schemas.openxmlformats.org/officeDocument/2006/relationships" xmlns:p="http://schemas.openxmlformats.org/presentationml/2006/main">
+<p:notes xmlns:a="http://schemas.openxmlformats.org/drawingml/2006/main" xmlns:p="http://schemas.openxmlformats.org/presentationml/2006/main" xmlns:r="http://schemas.openxmlformats.org/officeDocument/2006/relationships">
   <p:cSld>
     <p:spTree>
       <p:nvGrpSpPr>
@@ -845,7 +1051,7 @@
         <p:nvSpPr>
           <p:cNvPr id="2" name="Slide Image Placeholder 1"/>
           <p:cNvSpPr>
-            <a:spLocks noGrp="1" noRot="1" noChangeAspect="1"/>
+            <a:spLocks noGrp="1"/>
           </p:cNvSpPr>
           <p:nvPr>
             <p:ph type="sldImg" idx="2"/>
@@ -860,7 +1066,7 @@
             <a:spLocks noGrp="1"/>
           </p:cNvSpPr>
           <p:nvPr>
-            <p:ph type="body" sz="quarter" idx="3"/>
+            <p:ph type="body" idx="3" sz="quarter"/>
           </p:nvPr>
         </p:nvSpPr>
         <p:spPr/>
@@ -881,7 +1087,7 @@
             <a:spLocks noGrp="1"/>
           </p:cNvSpPr>
           <p:nvPr>
-            <p:ph type="sldNum" sz="quarter" idx="5"/>
+            <p:ph type="sldNum" idx="5" sz="quarter"/>
           </p:nvPr>
         </p:nvSpPr>
         <p:spPr/>
@@ -895,7 +1101,7 @@
 </file>
 
 <file path=ppt/notesSlides/notesSlide5.xml><?xml version="1.0" encoding="utf-8"?>
-<p:notes xmlns:a="http://schemas.openxmlformats.org/drawingml/2006/main" xmlns:r="http://schemas.openxmlformats.org/officeDocument/2006/relationships" xmlns:p="http://schemas.openxmlformats.org/presentationml/2006/main">
+<p:notes xmlns:a="http://schemas.openxmlformats.org/drawingml/2006/main" xmlns:p="http://schemas.openxmlformats.org/presentationml/2006/main" xmlns:r="http://schemas.openxmlformats.org/officeDocument/2006/relationships">
   <p:cSld>
     <p:spTree>
       <p:nvGrpSpPr>
@@ -915,7 +1121,7 @@
         <p:nvSpPr>
           <p:cNvPr id="2" name="Slide Image Placeholder 1"/>
           <p:cNvSpPr>
-            <a:spLocks noGrp="1" noRot="1" noChangeAspect="1"/>
+            <a:spLocks noGrp="1"/>
           </p:cNvSpPr>
           <p:nvPr>
             <p:ph type="sldImg" idx="2"/>
@@ -930,7 +1136,7 @@
             <a:spLocks noGrp="1"/>
           </p:cNvSpPr>
           <p:nvPr>
-            <p:ph type="body" sz="quarter" idx="3"/>
+            <p:ph type="body" idx="3" sz="quarter"/>
           </p:nvPr>
         </p:nvSpPr>
         <p:spPr/>
@@ -951,7 +1157,7 @@
             <a:spLocks noGrp="1"/>
           </p:cNvSpPr>
           <p:nvPr>
-            <p:ph type="sldNum" sz="quarter" idx="5"/>
+            <p:ph type="sldNum" idx="5" sz="quarter"/>
           </p:nvPr>
         </p:nvSpPr>
         <p:spPr/>
@@ -965,7 +1171,7 @@
 </file>
 
 <file path=ppt/notesSlides/notesSlide6.xml><?xml version="1.0" encoding="utf-8"?>
-<p:notes xmlns:a="http://schemas.openxmlformats.org/drawingml/2006/main" xmlns:r="http://schemas.openxmlformats.org/officeDocument/2006/relationships" xmlns:p="http://schemas.openxmlformats.org/presentationml/2006/main">
+<p:notes xmlns:a="http://schemas.openxmlformats.org/drawingml/2006/main" xmlns:p="http://schemas.openxmlformats.org/presentationml/2006/main" xmlns:r="http://schemas.openxmlformats.org/officeDocument/2006/relationships">
   <p:cSld>
     <p:spTree>
       <p:nvGrpSpPr>
@@ -985,7 +1191,7 @@
         <p:nvSpPr>
           <p:cNvPr id="2" name="Slide Image Placeholder 1"/>
           <p:cNvSpPr>
-            <a:spLocks noGrp="1" noRot="1" noChangeAspect="1"/>
+            <a:spLocks noGrp="1"/>
           </p:cNvSpPr>
           <p:nvPr>
             <p:ph type="sldImg" idx="2"/>
@@ -1000,7 +1206,7 @@
             <a:spLocks noGrp="1"/>
           </p:cNvSpPr>
           <p:nvPr>
-            <p:ph type="body" sz="quarter" idx="3"/>
+            <p:ph type="body" idx="3" sz="quarter"/>
           </p:nvPr>
         </p:nvSpPr>
         <p:spPr/>
@@ -1021,7 +1227,7 @@
             <a:spLocks noGrp="1"/>
           </p:cNvSpPr>
           <p:nvPr>
-            <p:ph type="sldNum" sz="quarter" idx="5"/>
+            <p:ph type="sldNum" idx="5" sz="quarter"/>
           </p:nvPr>
         </p:nvSpPr>
         <p:spPr/>
@@ -1035,7 +1241,7 @@
 </file>
 
 <file path=ppt/notesSlides/notesSlide7.xml><?xml version="1.0" encoding="utf-8"?>
-<p:notes xmlns:a="http://schemas.openxmlformats.org/drawingml/2006/main" xmlns:r="http://schemas.openxmlformats.org/officeDocument/2006/relationships" xmlns:p="http://schemas.openxmlformats.org/presentationml/2006/main">
+<p:notes xmlns:a="http://schemas.openxmlformats.org/drawingml/2006/main" xmlns:p="http://schemas.openxmlformats.org/presentationml/2006/main" xmlns:r="http://schemas.openxmlformats.org/officeDocument/2006/relationships">
   <p:cSld>
     <p:spTree>
       <p:nvGrpSpPr>
@@ -1055,7 +1261,7 @@
         <p:nvSpPr>
           <p:cNvPr id="2" name="Slide Image Placeholder 1"/>
           <p:cNvSpPr>
-            <a:spLocks noGrp="1" noRot="1" noChangeAspect="1"/>
+            <a:spLocks noGrp="1"/>
           </p:cNvSpPr>
           <p:nvPr>
             <p:ph type="sldImg" idx="2"/>
@@ -1070,7 +1276,7 @@
             <a:spLocks noGrp="1"/>
           </p:cNvSpPr>
           <p:nvPr>
-            <p:ph type="body" sz="quarter" idx="3"/>
+            <p:ph type="body" idx="3" sz="quarter"/>
           </p:nvPr>
         </p:nvSpPr>
         <p:spPr/>
@@ -1091,7 +1297,7 @@
             <a:spLocks noGrp="1"/>
           </p:cNvSpPr>
           <p:nvPr>
-            <p:ph type="sldNum" sz="quarter" idx="5"/>
+            <p:ph type="sldNum" idx="5" sz="quarter"/>
           </p:nvPr>
         </p:nvSpPr>
         <p:spPr/>
@@ -1105,7 +1311,7 @@
 </file>
 
 <file path=ppt/notesSlides/notesSlide8.xml><?xml version="1.0" encoding="utf-8"?>
-<p:notes xmlns:a="http://schemas.openxmlformats.org/drawingml/2006/main" xmlns:r="http://schemas.openxmlformats.org/officeDocument/2006/relationships" xmlns:p="http://schemas.openxmlformats.org/presentationml/2006/main">
+<p:notes xmlns:a="http://schemas.openxmlformats.org/drawingml/2006/main" xmlns:p="http://schemas.openxmlformats.org/presentationml/2006/main" xmlns:r="http://schemas.openxmlformats.org/officeDocument/2006/relationships">
   <p:cSld>
     <p:spTree>
       <p:nvGrpSpPr>
@@ -1125,7 +1331,7 @@
         <p:nvSpPr>
           <p:cNvPr id="2" name="Slide Image Placeholder 1"/>
           <p:cNvSpPr>
-            <a:spLocks noGrp="1" noRot="1" noChangeAspect="1"/>
+            <a:spLocks noGrp="1"/>
           </p:cNvSpPr>
           <p:nvPr>
             <p:ph type="sldImg" idx="2"/>
@@ -1140,7 +1346,7 @@
             <a:spLocks noGrp="1"/>
           </p:cNvSpPr>
           <p:nvPr>
-            <p:ph type="body" sz="quarter" idx="3"/>
+            <p:ph type="body" idx="3" sz="quarter"/>
           </p:nvPr>
         </p:nvSpPr>
         <p:spPr/>
@@ -1161,7 +1367,7 @@
             <a:spLocks noGrp="1"/>
           </p:cNvSpPr>
           <p:nvPr>
-            <p:ph type="sldNum" sz="quarter" idx="5"/>
+            <p:ph type="sldNum" idx="5" sz="quarter"/>
           </p:nvPr>
         </p:nvSpPr>
         <p:spPr/>
@@ -1175,7 +1381,7 @@
 </file>
 
 <file path=ppt/notesSlides/notesSlide9.xml><?xml version="1.0" encoding="utf-8"?>
-<p:notes xmlns:a="http://schemas.openxmlformats.org/drawingml/2006/main" xmlns:r="http://schemas.openxmlformats.org/officeDocument/2006/relationships" xmlns:p="http://schemas.openxmlformats.org/presentationml/2006/main">
+<p:notes xmlns:a="http://schemas.openxmlformats.org/drawingml/2006/main" xmlns:p="http://schemas.openxmlformats.org/presentationml/2006/main" xmlns:r="http://schemas.openxmlformats.org/officeDocument/2006/relationships">
   <p:cSld>
     <p:spTree>
       <p:nvGrpSpPr>
@@ -1195,7 +1401,7 @@
         <p:nvSpPr>
           <p:cNvPr id="2" name="Slide Image Placeholder 1"/>
           <p:cNvSpPr>
-            <a:spLocks noGrp="1" noRot="1" noChangeAspect="1"/>
+            <a:spLocks noGrp="1"/>
           </p:cNvSpPr>
           <p:nvPr>
             <p:ph type="sldImg" idx="2"/>
@@ -1210,7 +1416,7 @@
             <a:spLocks noGrp="1"/>
           </p:cNvSpPr>
           <p:nvPr>
-            <p:ph type="body" sz="quarter" idx="3"/>
+            <p:ph type="body" idx="3" sz="quarter"/>
           </p:nvPr>
         </p:nvSpPr>
         <p:spPr/>
@@ -1219,7 +1425,7 @@
           <a:lstStyle/>
           <a:p>
             <a:r>
-              <a:t>Strongest single result in the deck. But it is on a branch — say so.</a:t>
+              <a:t>Strongest single result in the deck. The flag is on main now; the numbers came from the branch, with identical verification logic.</a:t>
             </a:r>
           </a:p>
         </p:txBody>
@@ -1231,7 +1437,7 @@
             <a:spLocks noGrp="1"/>
           </p:cNvSpPr>
           <p:nvPr>
-            <p:ph type="sldNum" sz="quarter" idx="5"/>
+            <p:ph type="sldNum" idx="5" sz="quarter"/>
           </p:nvPr>
         </p:nvSpPr>
         <p:spPr/>
@@ -1282,9 +1488,10 @@
           <a:lstStyle/>
           <a:p>
             <a:r>
-              <a:rPr lang="en-US"/>
+              <a:rPr lang="en-US" smtClean="0"/>
               <a:t>Click to edit Master title style</a:t>
             </a:r>
+            <a:endParaRPr lang="en-US"/>
           </a:p>
         </p:txBody>
       </p:sp>
@@ -1400,9 +1607,10 @@
           </a:lstStyle>
           <a:p>
             <a:r>
-              <a:rPr lang="en-US"/>
+              <a:rPr lang="en-US" smtClean="0"/>
               <a:t>Click to edit Master subtitle style</a:t>
             </a:r>
+            <a:endParaRPr lang="en-US"/>
           </a:p>
         </p:txBody>
       </p:sp>
@@ -1423,7 +1631,7 @@
           <a:p>
             <a:fld id="{5BCAD085-E8A6-8845-BD4E-CB4CCA059FC4}" type="datetimeFigureOut">
               <a:rPr lang="en-US" smtClean="0"/>
-              <a:t>8/29/26</a:t>
+              <a:t>1/27/13</a:t>
             </a:fld>
             <a:endParaRPr lang="en-US"/>
           </a:p>
@@ -1517,9 +1725,10 @@
           <a:lstStyle/>
           <a:p>
             <a:r>
-              <a:rPr lang="en-US"/>
+              <a:rPr lang="en-US" smtClean="0"/>
               <a:t>Click to edit Master title style</a:t>
             </a:r>
+            <a:endParaRPr lang="en-US"/>
           </a:p>
         </p:txBody>
       </p:sp>
@@ -1540,37 +1749,38 @@
           <a:p>
             <a:pPr lvl="0"/>
             <a:r>
-              <a:rPr lang="en-US"/>
+              <a:rPr lang="en-US" smtClean="0"/>
               <a:t>Click to edit Master text styles</a:t>
             </a:r>
           </a:p>
           <a:p>
             <a:pPr lvl="1"/>
             <a:r>
-              <a:rPr lang="en-US"/>
+              <a:rPr lang="en-US" smtClean="0"/>
               <a:t>Second level</a:t>
             </a:r>
           </a:p>
           <a:p>
             <a:pPr lvl="2"/>
             <a:r>
-              <a:rPr lang="en-US"/>
+              <a:rPr lang="en-US" smtClean="0"/>
               <a:t>Third level</a:t>
             </a:r>
           </a:p>
           <a:p>
             <a:pPr lvl="3"/>
             <a:r>
-              <a:rPr lang="en-US"/>
+              <a:rPr lang="en-US" smtClean="0"/>
               <a:t>Fourth level</a:t>
             </a:r>
           </a:p>
           <a:p>
             <a:pPr lvl="4"/>
             <a:r>
-              <a:rPr lang="en-US"/>
+              <a:rPr lang="en-US" smtClean="0"/>
               <a:t>Fifth level</a:t>
             </a:r>
+            <a:endParaRPr lang="en-US"/>
           </a:p>
         </p:txBody>
       </p:sp>
@@ -1591,7 +1801,7 @@
           <a:p>
             <a:fld id="{5BCAD085-E8A6-8845-BD4E-CB4CCA059FC4}" type="datetimeFigureOut">
               <a:rPr lang="en-US" smtClean="0"/>
-              <a:t>8/29/26</a:t>
+              <a:t>1/27/13</a:t>
             </a:fld>
             <a:endParaRPr lang="en-US"/>
           </a:p>
@@ -1690,9 +1900,10 @@
           <a:lstStyle/>
           <a:p>
             <a:r>
-              <a:rPr lang="en-US"/>
+              <a:rPr lang="en-US" smtClean="0"/>
               <a:t>Click to edit Master title style</a:t>
             </a:r>
+            <a:endParaRPr lang="en-US"/>
           </a:p>
         </p:txBody>
       </p:sp>
@@ -1718,37 +1929,38 @@
           <a:p>
             <a:pPr lvl="0"/>
             <a:r>
-              <a:rPr lang="en-US"/>
+              <a:rPr lang="en-US" smtClean="0"/>
               <a:t>Click to edit Master text styles</a:t>
             </a:r>
           </a:p>
           <a:p>
             <a:pPr lvl="1"/>
             <a:r>
-              <a:rPr lang="en-US"/>
+              <a:rPr lang="en-US" smtClean="0"/>
               <a:t>Second level</a:t>
             </a:r>
           </a:p>
           <a:p>
             <a:pPr lvl="2"/>
             <a:r>
-              <a:rPr lang="en-US"/>
+              <a:rPr lang="en-US" smtClean="0"/>
               <a:t>Third level</a:t>
             </a:r>
           </a:p>
           <a:p>
             <a:pPr lvl="3"/>
             <a:r>
-              <a:rPr lang="en-US"/>
+              <a:rPr lang="en-US" smtClean="0"/>
               <a:t>Fourth level</a:t>
             </a:r>
           </a:p>
           <a:p>
             <a:pPr lvl="4"/>
             <a:r>
-              <a:rPr lang="en-US"/>
+              <a:rPr lang="en-US" smtClean="0"/>
               <a:t>Fifth level</a:t>
             </a:r>
+            <a:endParaRPr lang="en-US"/>
           </a:p>
         </p:txBody>
       </p:sp>
@@ -1769,7 +1981,7 @@
           <a:p>
             <a:fld id="{5BCAD085-E8A6-8845-BD4E-CB4CCA059FC4}" type="datetimeFigureOut">
               <a:rPr lang="en-US" smtClean="0"/>
-              <a:t>8/29/26</a:t>
+              <a:t>1/27/13</a:t>
             </a:fld>
             <a:endParaRPr lang="en-US"/>
           </a:p>
@@ -1863,9 +2075,10 @@
           <a:lstStyle/>
           <a:p>
             <a:r>
-              <a:rPr lang="en-US"/>
+              <a:rPr lang="en-US" smtClean="0"/>
               <a:t>Click to edit Master title style</a:t>
             </a:r>
+            <a:endParaRPr lang="en-US"/>
           </a:p>
         </p:txBody>
       </p:sp>
@@ -1886,37 +2099,38 @@
           <a:p>
             <a:pPr lvl="0"/>
             <a:r>
-              <a:rPr lang="en-US"/>
+              <a:rPr lang="en-US" smtClean="0"/>
               <a:t>Click to edit Master text styles</a:t>
             </a:r>
           </a:p>
           <a:p>
             <a:pPr lvl="1"/>
             <a:r>
-              <a:rPr lang="en-US"/>
+              <a:rPr lang="en-US" smtClean="0"/>
               <a:t>Second level</a:t>
             </a:r>
           </a:p>
           <a:p>
             <a:pPr lvl="2"/>
             <a:r>
-              <a:rPr lang="en-US"/>
+              <a:rPr lang="en-US" smtClean="0"/>
               <a:t>Third level</a:t>
             </a:r>
           </a:p>
           <a:p>
             <a:pPr lvl="3"/>
             <a:r>
-              <a:rPr lang="en-US"/>
+              <a:rPr lang="en-US" smtClean="0"/>
               <a:t>Fourth level</a:t>
             </a:r>
           </a:p>
           <a:p>
             <a:pPr lvl="4"/>
             <a:r>
-              <a:rPr lang="en-US"/>
+              <a:rPr lang="en-US" smtClean="0"/>
               <a:t>Fifth level</a:t>
             </a:r>
+            <a:endParaRPr lang="en-US"/>
           </a:p>
         </p:txBody>
       </p:sp>
@@ -1937,7 +2151,7 @@
           <a:p>
             <a:fld id="{5BCAD085-E8A6-8845-BD4E-CB4CCA059FC4}" type="datetimeFigureOut">
               <a:rPr lang="en-US" smtClean="0"/>
-              <a:t>8/29/26</a:t>
+              <a:t>1/27/13</a:t>
             </a:fld>
             <a:endParaRPr lang="en-US"/>
           </a:p>
@@ -2040,9 +2254,10 @@
           </a:lstStyle>
           <a:p>
             <a:r>
-              <a:rPr lang="en-US"/>
+              <a:rPr lang="en-US" smtClean="0"/>
               <a:t>Click to edit Master title style</a:t>
             </a:r>
+            <a:endParaRPr lang="en-US"/>
           </a:p>
         </p:txBody>
       </p:sp>
@@ -2159,7 +2374,7 @@
           <a:p>
             <a:pPr lvl="0"/>
             <a:r>
-              <a:rPr lang="en-US"/>
+              <a:rPr lang="en-US" smtClean="0"/>
               <a:t>Click to edit Master text styles</a:t>
             </a:r>
           </a:p>
@@ -2182,7 +2397,7 @@
           <a:p>
             <a:fld id="{5BCAD085-E8A6-8845-BD4E-CB4CCA059FC4}" type="datetimeFigureOut">
               <a:rPr lang="en-US" smtClean="0"/>
-              <a:t>8/29/26</a:t>
+              <a:t>1/27/13</a:t>
             </a:fld>
             <a:endParaRPr lang="en-US"/>
           </a:p>
@@ -2276,9 +2491,10 @@
           <a:lstStyle/>
           <a:p>
             <a:r>
-              <a:rPr lang="en-US"/>
+              <a:rPr lang="en-US" smtClean="0"/>
               <a:t>Click to edit Master title style</a:t>
             </a:r>
+            <a:endParaRPr lang="en-US"/>
           </a:p>
         </p:txBody>
       </p:sp>
@@ -2332,37 +2548,38 @@
           <a:p>
             <a:pPr lvl="0"/>
             <a:r>
-              <a:rPr lang="en-US"/>
+              <a:rPr lang="en-US" smtClean="0"/>
               <a:t>Click to edit Master text styles</a:t>
             </a:r>
           </a:p>
           <a:p>
             <a:pPr lvl="1"/>
             <a:r>
-              <a:rPr lang="en-US"/>
+              <a:rPr lang="en-US" smtClean="0"/>
               <a:t>Second level</a:t>
             </a:r>
           </a:p>
           <a:p>
             <a:pPr lvl="2"/>
             <a:r>
-              <a:rPr lang="en-US"/>
+              <a:rPr lang="en-US" smtClean="0"/>
               <a:t>Third level</a:t>
             </a:r>
           </a:p>
           <a:p>
             <a:pPr lvl="3"/>
             <a:r>
-              <a:rPr lang="en-US"/>
+              <a:rPr lang="en-US" smtClean="0"/>
               <a:t>Fourth level</a:t>
             </a:r>
           </a:p>
           <a:p>
             <a:pPr lvl="4"/>
             <a:r>
-              <a:rPr lang="en-US"/>
+              <a:rPr lang="en-US" smtClean="0"/>
               <a:t>Fifth level</a:t>
             </a:r>
+            <a:endParaRPr lang="en-US"/>
           </a:p>
         </p:txBody>
       </p:sp>
@@ -2416,37 +2633,38 @@
           <a:p>
             <a:pPr lvl="0"/>
             <a:r>
-              <a:rPr lang="en-US"/>
+              <a:rPr lang="en-US" smtClean="0"/>
               <a:t>Click to edit Master text styles</a:t>
             </a:r>
           </a:p>
           <a:p>
             <a:pPr lvl="1"/>
             <a:r>
-              <a:rPr lang="en-US"/>
+              <a:rPr lang="en-US" smtClean="0"/>
               <a:t>Second level</a:t>
             </a:r>
           </a:p>
           <a:p>
             <a:pPr lvl="2"/>
             <a:r>
-              <a:rPr lang="en-US"/>
+              <a:rPr lang="en-US" smtClean="0"/>
               <a:t>Third level</a:t>
             </a:r>
           </a:p>
           <a:p>
             <a:pPr lvl="3"/>
             <a:r>
-              <a:rPr lang="en-US"/>
+              <a:rPr lang="en-US" smtClean="0"/>
               <a:t>Fourth level</a:t>
             </a:r>
           </a:p>
           <a:p>
             <a:pPr lvl="4"/>
             <a:r>
-              <a:rPr lang="en-US"/>
+              <a:rPr lang="en-US" smtClean="0"/>
               <a:t>Fifth level</a:t>
             </a:r>
+            <a:endParaRPr lang="en-US"/>
           </a:p>
         </p:txBody>
       </p:sp>
@@ -2467,7 +2685,7 @@
           <a:p>
             <a:fld id="{5BCAD085-E8A6-8845-BD4E-CB4CCA059FC4}" type="datetimeFigureOut">
               <a:rPr lang="en-US" smtClean="0"/>
-              <a:t>8/29/26</a:t>
+              <a:t>1/27/13</a:t>
             </a:fld>
             <a:endParaRPr lang="en-US"/>
           </a:p>
@@ -2565,9 +2783,10 @@
           </a:lstStyle>
           <a:p>
             <a:r>
-              <a:rPr lang="en-US"/>
+              <a:rPr lang="en-US" smtClean="0"/>
               <a:t>Click to edit Master title style</a:t>
             </a:r>
+            <a:endParaRPr lang="en-US"/>
           </a:p>
         </p:txBody>
       </p:sp>
@@ -2630,7 +2849,7 @@
           <a:p>
             <a:pPr lvl="0"/>
             <a:r>
-              <a:rPr lang="en-US"/>
+              <a:rPr lang="en-US" smtClean="0"/>
               <a:t>Click to edit Master text styles</a:t>
             </a:r>
           </a:p>
@@ -2686,37 +2905,38 @@
           <a:p>
             <a:pPr lvl="0"/>
             <a:r>
-              <a:rPr lang="en-US"/>
+              <a:rPr lang="en-US" smtClean="0"/>
               <a:t>Click to edit Master text styles</a:t>
             </a:r>
           </a:p>
           <a:p>
             <a:pPr lvl="1"/>
             <a:r>
-              <a:rPr lang="en-US"/>
+              <a:rPr lang="en-US" smtClean="0"/>
               <a:t>Second level</a:t>
             </a:r>
           </a:p>
           <a:p>
             <a:pPr lvl="2"/>
             <a:r>
-              <a:rPr lang="en-US"/>
+              <a:rPr lang="en-US" smtClean="0"/>
               <a:t>Third level</a:t>
             </a:r>
           </a:p>
           <a:p>
             <a:pPr lvl="3"/>
             <a:r>
-              <a:rPr lang="en-US"/>
+              <a:rPr lang="en-US" smtClean="0"/>
               <a:t>Fourth level</a:t>
             </a:r>
           </a:p>
           <a:p>
             <a:pPr lvl="4"/>
             <a:r>
-              <a:rPr lang="en-US"/>
+              <a:rPr lang="en-US" smtClean="0"/>
               <a:t>Fifth level</a:t>
             </a:r>
+            <a:endParaRPr lang="en-US"/>
           </a:p>
         </p:txBody>
       </p:sp>
@@ -2779,7 +2999,7 @@
           <a:p>
             <a:pPr lvl="0"/>
             <a:r>
-              <a:rPr lang="en-US"/>
+              <a:rPr lang="en-US" smtClean="0"/>
               <a:t>Click to edit Master text styles</a:t>
             </a:r>
           </a:p>
@@ -2835,37 +3055,38 @@
           <a:p>
             <a:pPr lvl="0"/>
             <a:r>
-              <a:rPr lang="en-US"/>
+              <a:rPr lang="en-US" smtClean="0"/>
               <a:t>Click to edit Master text styles</a:t>
             </a:r>
           </a:p>
           <a:p>
             <a:pPr lvl="1"/>
             <a:r>
-              <a:rPr lang="en-US"/>
+              <a:rPr lang="en-US" smtClean="0"/>
               <a:t>Second level</a:t>
             </a:r>
           </a:p>
           <a:p>
             <a:pPr lvl="2"/>
             <a:r>
-              <a:rPr lang="en-US"/>
+              <a:rPr lang="en-US" smtClean="0"/>
               <a:t>Third level</a:t>
             </a:r>
           </a:p>
           <a:p>
             <a:pPr lvl="3"/>
             <a:r>
-              <a:rPr lang="en-US"/>
+              <a:rPr lang="en-US" smtClean="0"/>
               <a:t>Fourth level</a:t>
             </a:r>
           </a:p>
           <a:p>
             <a:pPr lvl="4"/>
             <a:r>
-              <a:rPr lang="en-US"/>
+              <a:rPr lang="en-US" smtClean="0"/>
               <a:t>Fifth level</a:t>
             </a:r>
+            <a:endParaRPr lang="en-US"/>
           </a:p>
         </p:txBody>
       </p:sp>
@@ -2886,7 +3107,7 @@
           <a:p>
             <a:fld id="{5BCAD085-E8A6-8845-BD4E-CB4CCA059FC4}" type="datetimeFigureOut">
               <a:rPr lang="en-US" smtClean="0"/>
-              <a:t>8/29/26</a:t>
+              <a:t>1/27/13</a:t>
             </a:fld>
             <a:endParaRPr lang="en-US"/>
           </a:p>
@@ -2980,9 +3201,10 @@
           <a:lstStyle/>
           <a:p>
             <a:r>
-              <a:rPr lang="en-US"/>
+              <a:rPr lang="en-US" smtClean="0"/>
               <a:t>Click to edit Master title style</a:t>
             </a:r>
+            <a:endParaRPr lang="en-US"/>
           </a:p>
         </p:txBody>
       </p:sp>
@@ -3003,7 +3225,7 @@
           <a:p>
             <a:fld id="{5BCAD085-E8A6-8845-BD4E-CB4CCA059FC4}" type="datetimeFigureOut">
               <a:rPr lang="en-US" smtClean="0"/>
-              <a:t>8/29/26</a:t>
+              <a:t>1/27/13</a:t>
             </a:fld>
             <a:endParaRPr lang="en-US"/>
           </a:p>
@@ -3098,7 +3320,7 @@
           <a:p>
             <a:fld id="{5BCAD085-E8A6-8845-BD4E-CB4CCA059FC4}" type="datetimeFigureOut">
               <a:rPr lang="en-US" smtClean="0"/>
-              <a:t>8/29/26</a:t>
+              <a:t>1/27/13</a:t>
             </a:fld>
             <a:endParaRPr lang="en-US"/>
           </a:p>
@@ -3201,9 +3423,10 @@
           </a:lstStyle>
           <a:p>
             <a:r>
-              <a:rPr lang="en-US"/>
+              <a:rPr lang="en-US" smtClean="0"/>
               <a:t>Click to edit Master title style</a:t>
             </a:r>
+            <a:endParaRPr lang="en-US"/>
           </a:p>
         </p:txBody>
       </p:sp>
@@ -3257,37 +3480,38 @@
           <a:p>
             <a:pPr lvl="0"/>
             <a:r>
-              <a:rPr lang="en-US"/>
+              <a:rPr lang="en-US" smtClean="0"/>
               <a:t>Click to edit Master text styles</a:t>
             </a:r>
           </a:p>
           <a:p>
             <a:pPr lvl="1"/>
             <a:r>
-              <a:rPr lang="en-US"/>
+              <a:rPr lang="en-US" smtClean="0"/>
               <a:t>Second level</a:t>
             </a:r>
           </a:p>
           <a:p>
             <a:pPr lvl="2"/>
             <a:r>
-              <a:rPr lang="en-US"/>
+              <a:rPr lang="en-US" smtClean="0"/>
               <a:t>Third level</a:t>
             </a:r>
           </a:p>
           <a:p>
             <a:pPr lvl="3"/>
             <a:r>
-              <a:rPr lang="en-US"/>
+              <a:rPr lang="en-US" smtClean="0"/>
               <a:t>Fourth level</a:t>
             </a:r>
           </a:p>
           <a:p>
             <a:pPr lvl="4"/>
             <a:r>
-              <a:rPr lang="en-US"/>
+              <a:rPr lang="en-US" smtClean="0"/>
               <a:t>Fifth level</a:t>
             </a:r>
+            <a:endParaRPr lang="en-US"/>
           </a:p>
         </p:txBody>
       </p:sp>
@@ -3350,7 +3574,7 @@
           <a:p>
             <a:pPr lvl="0"/>
             <a:r>
-              <a:rPr lang="en-US"/>
+              <a:rPr lang="en-US" smtClean="0"/>
               <a:t>Click to edit Master text styles</a:t>
             </a:r>
           </a:p>
@@ -3373,7 +3597,7 @@
           <a:p>
             <a:fld id="{5BCAD085-E8A6-8845-BD4E-CB4CCA059FC4}" type="datetimeFigureOut">
               <a:rPr lang="en-US" smtClean="0"/>
-              <a:t>8/29/26</a:t>
+              <a:t>1/27/13</a:t>
             </a:fld>
             <a:endParaRPr lang="en-US"/>
           </a:p>
@@ -3476,9 +3700,10 @@
           </a:lstStyle>
           <a:p>
             <a:r>
-              <a:rPr lang="en-US"/>
+              <a:rPr lang="en-US" smtClean="0"/>
               <a:t>Click to edit Master title style</a:t>
             </a:r>
+            <a:endParaRPr lang="en-US"/>
           </a:p>
         </p:txBody>
       </p:sp>
@@ -3602,7 +3827,7 @@
           <a:p>
             <a:pPr lvl="0"/>
             <a:r>
-              <a:rPr lang="en-US"/>
+              <a:rPr lang="en-US" smtClean="0"/>
               <a:t>Click to edit Master text styles</a:t>
             </a:r>
           </a:p>
@@ -3625,7 +3850,7 @@
           <a:p>
             <a:fld id="{5BCAD085-E8A6-8845-BD4E-CB4CCA059FC4}" type="datetimeFigureOut">
               <a:rPr lang="en-US" smtClean="0"/>
-              <a:t>8/29/26</a:t>
+              <a:t>1/27/13</a:t>
             </a:fld>
             <a:endParaRPr lang="en-US"/>
           </a:p>
@@ -3734,9 +3959,10 @@
           <a:lstStyle/>
           <a:p>
             <a:r>
-              <a:rPr lang="en-US"/>
+              <a:rPr lang="en-US" smtClean="0"/>
               <a:t>Click to edit Master title style</a:t>
             </a:r>
+            <a:endParaRPr lang="en-US"/>
           </a:p>
         </p:txBody>
       </p:sp>
@@ -3767,37 +3993,38 @@
           <a:p>
             <a:pPr lvl="0"/>
             <a:r>
-              <a:rPr lang="en-US"/>
+              <a:rPr lang="en-US" smtClean="0"/>
               <a:t>Click to edit Master text styles</a:t>
             </a:r>
           </a:p>
           <a:p>
             <a:pPr lvl="1"/>
             <a:r>
-              <a:rPr lang="en-US"/>
+              <a:rPr lang="en-US" smtClean="0"/>
               <a:t>Second level</a:t>
             </a:r>
           </a:p>
           <a:p>
             <a:pPr lvl="2"/>
             <a:r>
-              <a:rPr lang="en-US"/>
+              <a:rPr lang="en-US" smtClean="0"/>
               <a:t>Third level</a:t>
             </a:r>
           </a:p>
           <a:p>
             <a:pPr lvl="3"/>
             <a:r>
-              <a:rPr lang="en-US"/>
+              <a:rPr lang="en-US" smtClean="0"/>
               <a:t>Fourth level</a:t>
             </a:r>
           </a:p>
           <a:p>
             <a:pPr lvl="4"/>
             <a:r>
-              <a:rPr lang="en-US"/>
+              <a:rPr lang="en-US" smtClean="0"/>
               <a:t>Fifth level</a:t>
             </a:r>
+            <a:endParaRPr lang="en-US"/>
           </a:p>
         </p:txBody>
       </p:sp>
@@ -3836,7 +4063,7 @@
           <a:p>
             <a:fld id="{5BCAD085-E8A6-8845-BD4E-CB4CCA059FC4}" type="datetimeFigureOut">
               <a:rPr lang="en-US" smtClean="0"/>
-              <a:t>8/29/26</a:t>
+              <a:t>1/27/13</a:t>
             </a:fld>
             <a:endParaRPr lang="en-US"/>
           </a:p>
@@ -4195,7 +4422,7 @@
 </file>
 
 <file path=ppt/slides/slide1.xml><?xml version="1.0" encoding="utf-8"?>
-<p:sld xmlns:a="http://schemas.openxmlformats.org/drawingml/2006/main" xmlns:r="http://schemas.openxmlformats.org/officeDocument/2006/relationships" xmlns:p="http://schemas.openxmlformats.org/presentationml/2006/main">
+<p:sld xmlns:a="http://schemas.openxmlformats.org/drawingml/2006/main" xmlns:p="http://schemas.openxmlformats.org/presentationml/2006/main" xmlns:r="http://schemas.openxmlformats.org/officeDocument/2006/relationships">
   <p:cSld>
     <p:spTree>
       <p:nvGrpSpPr>
@@ -4203,14 +4430,7 @@
         <p:cNvGrpSpPr/>
         <p:nvPr/>
       </p:nvGrpSpPr>
-      <p:grpSpPr>
-        <a:xfrm>
-          <a:off x="0" y="0"/>
-          <a:ext cx="0" cy="0"/>
-          <a:chOff x="0" y="0"/>
-          <a:chExt cx="0" cy="0"/>
-        </a:xfrm>
-      </p:grpSpPr>
+      <p:grpSpPr/>
       <p:sp>
         <p:nvSpPr>
           <p:cNvPr id="2" name="Rectangle 1"/>
@@ -4250,9 +4470,7 @@
         <p:txBody>
           <a:bodyPr rtlCol="0" anchor="ctr"/>
           <a:lstStyle/>
-          <a:p>
-            <a:endParaRPr/>
-          </a:p>
+          <a:p/>
         </p:txBody>
       </p:sp>
       <p:sp>
@@ -4292,11 +4510,10 @@
           </a:fontRef>
         </p:style>
         <p:txBody>
-          <a:bodyPr lIns="0" tIns="0" rIns="0" bIns="0" rtlCol="0" anchor="ctr"/>
+          <a:bodyPr rtlCol="0" anchor="ctr" lIns="0" rIns="0" tIns="0" bIns="0"/>
           <a:lstStyle/>
           <a:p>
             <a:pPr algn="ctr"/>
-            <a:endParaRPr/>
           </a:p>
         </p:txBody>
       </p:sp>
@@ -4337,11 +4554,10 @@
           </a:fontRef>
         </p:style>
         <p:txBody>
-          <a:bodyPr lIns="0" tIns="0" rIns="0" bIns="0" rtlCol="0" anchor="ctr"/>
+          <a:bodyPr rtlCol="0" anchor="ctr" lIns="0" rIns="0" tIns="0" bIns="0"/>
           <a:lstStyle/>
           <a:p>
             <a:pPr algn="ctr"/>
-            <a:endParaRPr/>
           </a:p>
         </p:txBody>
       </p:sp>
@@ -4382,11 +4598,10 @@
           </a:fontRef>
         </p:style>
         <p:txBody>
-          <a:bodyPr lIns="0" tIns="0" rIns="0" bIns="0" rtlCol="0" anchor="ctr"/>
+          <a:bodyPr rtlCol="0" anchor="ctr" lIns="0" rIns="0" tIns="0" bIns="0"/>
           <a:lstStyle/>
           <a:p>
             <a:pPr algn="ctr"/>
-            <a:endParaRPr/>
           </a:p>
         </p:txBody>
       </p:sp>
@@ -4427,11 +4642,10 @@
           </a:fontRef>
         </p:style>
         <p:txBody>
-          <a:bodyPr lIns="0" tIns="0" rIns="0" bIns="0" rtlCol="0" anchor="ctr"/>
+          <a:bodyPr rtlCol="0" anchor="ctr" lIns="0" rIns="0" tIns="0" bIns="0"/>
           <a:lstStyle/>
           <a:p>
             <a:pPr algn="ctr"/>
-            <a:endParaRPr/>
           </a:p>
         </p:txBody>
       </p:sp>
@@ -4452,7 +4666,7 @@
           <a:noFill/>
         </p:spPr>
         <p:txBody>
-          <a:bodyPr wrap="square" lIns="45720" tIns="18288" rIns="45720" bIns="18288" anchor="t">
+          <a:bodyPr wrap="square" lIns="45720" rIns="45720" tIns="18288" bIns="18288" anchor="t">
             <a:spAutoFit/>
           </a:bodyPr>
           <a:lstStyle/>
@@ -4491,7 +4705,7 @@
           <a:noFill/>
         </p:spPr>
         <p:txBody>
-          <a:bodyPr wrap="square" lIns="45720" tIns="18288" rIns="45720" bIns="18288" anchor="t">
+          <a:bodyPr wrap="square" lIns="45720" rIns="45720" tIns="18288" bIns="18288" anchor="t">
             <a:spAutoFit/>
           </a:bodyPr>
           <a:lstStyle/>
@@ -4530,7 +4744,7 @@
           <a:noFill/>
         </p:spPr>
         <p:txBody>
-          <a:bodyPr wrap="square" lIns="45720" tIns="18288" rIns="45720" bIns="18288" anchor="t">
+          <a:bodyPr wrap="square" lIns="45720" rIns="45720" tIns="18288" bIns="18288" anchor="t">
             <a:spAutoFit/>
           </a:bodyPr>
           <a:lstStyle/>
@@ -4591,9 +4805,7 @@
         <p:txBody>
           <a:bodyPr rtlCol="0" anchor="ctr"/>
           <a:lstStyle/>
-          <a:p>
-            <a:endParaRPr/>
-          </a:p>
+          <a:p/>
         </p:txBody>
       </p:sp>
       <p:sp>
@@ -4613,7 +4825,7 @@
           <a:noFill/>
         </p:spPr>
         <p:txBody>
-          <a:bodyPr wrap="square" lIns="45720" tIns="18288" rIns="45720" bIns="18288" anchor="t">
+          <a:bodyPr wrap="square" lIns="45720" rIns="45720" tIns="18288" bIns="18288" anchor="t">
             <a:spAutoFit/>
           </a:bodyPr>
           <a:lstStyle/>
@@ -4652,7 +4864,7 @@
           <a:noFill/>
         </p:spPr>
         <p:txBody>
-          <a:bodyPr wrap="square" lIns="45720" tIns="18288" rIns="45720" bIns="18288" anchor="t">
+          <a:bodyPr wrap="square" lIns="45720" rIns="45720" tIns="18288" bIns="18288" anchor="t">
             <a:spAutoFit/>
           </a:bodyPr>
           <a:lstStyle/>
@@ -4683,7 +4895,7 @@
 </file>
 
 <file path=ppt/slides/slide10.xml><?xml version="1.0" encoding="utf-8"?>
-<p:sld xmlns:a="http://schemas.openxmlformats.org/drawingml/2006/main" xmlns:r="http://schemas.openxmlformats.org/officeDocument/2006/relationships" xmlns:p="http://schemas.openxmlformats.org/presentationml/2006/main">
+<p:sld xmlns:a="http://schemas.openxmlformats.org/drawingml/2006/main" xmlns:p="http://schemas.openxmlformats.org/presentationml/2006/main" xmlns:r="http://schemas.openxmlformats.org/officeDocument/2006/relationships">
   <p:cSld>
     <p:spTree>
       <p:nvGrpSpPr>
@@ -4691,14 +4903,7 @@
         <p:cNvGrpSpPr/>
         <p:nvPr/>
       </p:nvGrpSpPr>
-      <p:grpSpPr>
-        <a:xfrm>
-          <a:off x="0" y="0"/>
-          <a:ext cx="0" cy="0"/>
-          <a:chOff x="0" y="0"/>
-          <a:chExt cx="0" cy="0"/>
-        </a:xfrm>
-      </p:grpSpPr>
+      <p:grpSpPr/>
       <p:sp>
         <p:nvSpPr>
           <p:cNvPr id="2" name="TextBox 1"/>
@@ -4716,7 +4921,7 @@
           <a:noFill/>
         </p:spPr>
         <p:txBody>
-          <a:bodyPr wrap="square" lIns="45720" tIns="18288" rIns="45720" bIns="18288" anchor="t">
+          <a:bodyPr wrap="square" lIns="45720" rIns="45720" tIns="18288" bIns="18288" anchor="t">
             <a:spAutoFit/>
           </a:bodyPr>
           <a:lstStyle/>
@@ -4755,7 +4960,7 @@
           <a:noFill/>
         </p:spPr>
         <p:txBody>
-          <a:bodyPr wrap="square" lIns="45720" tIns="18288" rIns="45720" bIns="18288" anchor="t">
+          <a:bodyPr wrap="square" lIns="45720" rIns="45720" tIns="18288" bIns="18288" anchor="t">
             <a:spAutoFit/>
           </a:bodyPr>
           <a:lstStyle/>
@@ -4818,9 +5023,7 @@
         <p:txBody>
           <a:bodyPr rtlCol="0" anchor="ctr"/>
           <a:lstStyle/>
-          <a:p>
-            <a:endParaRPr/>
-          </a:p>
+          <a:p/>
         </p:txBody>
       </p:sp>
       <p:sp>
@@ -4840,7 +5043,7 @@
           <a:noFill/>
         </p:spPr>
         <p:txBody>
-          <a:bodyPr wrap="square" lIns="45720" tIns="18288" rIns="45720" bIns="18288" anchor="ctr">
+          <a:bodyPr wrap="square" lIns="45720" rIns="45720" tIns="18288" bIns="18288" anchor="ctr">
             <a:spAutoFit/>
           </a:bodyPr>
           <a:lstStyle/>
@@ -4879,7 +5082,7 @@
           <a:noFill/>
         </p:spPr>
         <p:txBody>
-          <a:bodyPr wrap="square" lIns="45720" tIns="18288" rIns="45720" bIns="18288" anchor="ctr">
+          <a:bodyPr wrap="square" lIns="45720" rIns="45720" tIns="18288" bIns="18288" anchor="ctr">
             <a:spAutoFit/>
           </a:bodyPr>
           <a:lstStyle/>
@@ -4918,7 +5121,7 @@
           <a:noFill/>
         </p:spPr>
         <p:txBody>
-          <a:bodyPr wrap="square" lIns="45720" tIns="18288" rIns="45720" bIns="18288" anchor="ctr">
+          <a:bodyPr wrap="square" lIns="45720" rIns="45720" tIns="18288" bIns="18288" anchor="ctr">
             <a:spAutoFit/>
           </a:bodyPr>
           <a:lstStyle/>
@@ -4957,7 +5160,7 @@
           <a:noFill/>
         </p:spPr>
         <p:txBody>
-          <a:bodyPr wrap="square" lIns="45720" tIns="18288" rIns="45720" bIns="18288" anchor="ctr">
+          <a:bodyPr wrap="square" lIns="45720" rIns="45720" tIns="18288" bIns="18288" anchor="ctr">
             <a:spAutoFit/>
           </a:bodyPr>
           <a:lstStyle/>
@@ -4996,7 +5199,7 @@
           <a:noFill/>
         </p:spPr>
         <p:txBody>
-          <a:bodyPr wrap="square" lIns="45720" tIns="18288" rIns="45720" bIns="18288" anchor="ctr">
+          <a:bodyPr wrap="square" lIns="45720" rIns="45720" tIns="18288" bIns="18288" anchor="ctr">
             <a:spAutoFit/>
           </a:bodyPr>
           <a:lstStyle/>
@@ -5057,9 +5260,7 @@
         <p:txBody>
           <a:bodyPr rtlCol="0" anchor="ctr"/>
           <a:lstStyle/>
-          <a:p>
-            <a:endParaRPr/>
-          </a:p>
+          <a:p/>
         </p:txBody>
       </p:sp>
       <p:sp>
@@ -5079,7 +5280,7 @@
           <a:noFill/>
         </p:spPr>
         <p:txBody>
-          <a:bodyPr wrap="square" lIns="45720" tIns="18288" rIns="45720" bIns="18288" anchor="ctr">
+          <a:bodyPr wrap="square" lIns="45720" rIns="45720" tIns="18288" bIns="18288" anchor="ctr">
             <a:spAutoFit/>
           </a:bodyPr>
           <a:lstStyle/>
@@ -5118,7 +5319,7 @@
           <a:noFill/>
         </p:spPr>
         <p:txBody>
-          <a:bodyPr wrap="square" lIns="45720" tIns="18288" rIns="45720" bIns="18288" anchor="ctr">
+          <a:bodyPr wrap="square" lIns="45720" rIns="45720" tIns="18288" bIns="18288" anchor="ctr">
             <a:spAutoFit/>
           </a:bodyPr>
           <a:lstStyle/>
@@ -5157,7 +5358,7 @@
           <a:noFill/>
         </p:spPr>
         <p:txBody>
-          <a:bodyPr wrap="square" lIns="45720" tIns="18288" rIns="45720" bIns="18288" anchor="ctr">
+          <a:bodyPr wrap="square" lIns="45720" rIns="45720" tIns="18288" bIns="18288" anchor="ctr">
             <a:spAutoFit/>
           </a:bodyPr>
           <a:lstStyle/>
@@ -5196,7 +5397,7 @@
           <a:noFill/>
         </p:spPr>
         <p:txBody>
-          <a:bodyPr wrap="square" lIns="45720" tIns="18288" rIns="45720" bIns="18288" anchor="ctr">
+          <a:bodyPr wrap="square" lIns="45720" rIns="45720" tIns="18288" bIns="18288" anchor="ctr">
             <a:spAutoFit/>
           </a:bodyPr>
           <a:lstStyle/>
@@ -5235,7 +5436,7 @@
           <a:noFill/>
         </p:spPr>
         <p:txBody>
-          <a:bodyPr wrap="square" lIns="45720" tIns="18288" rIns="45720" bIns="18288" anchor="ctr">
+          <a:bodyPr wrap="square" lIns="45720" rIns="45720" tIns="18288" bIns="18288" anchor="ctr">
             <a:spAutoFit/>
           </a:bodyPr>
           <a:lstStyle/>
@@ -5274,7 +5475,7 @@
           <a:noFill/>
         </p:spPr>
         <p:txBody>
-          <a:bodyPr wrap="square" lIns="45720" tIns="18288" rIns="45720" bIns="18288" anchor="ctr">
+          <a:bodyPr wrap="square" lIns="45720" rIns="45720" tIns="18288" bIns="18288" anchor="ctr">
             <a:spAutoFit/>
           </a:bodyPr>
           <a:lstStyle/>
@@ -5313,7 +5514,7 @@
           <a:noFill/>
         </p:spPr>
         <p:txBody>
-          <a:bodyPr wrap="square" lIns="45720" tIns="18288" rIns="45720" bIns="18288" anchor="ctr">
+          <a:bodyPr wrap="square" lIns="45720" rIns="45720" tIns="18288" bIns="18288" anchor="ctr">
             <a:spAutoFit/>
           </a:bodyPr>
           <a:lstStyle/>
@@ -5352,7 +5553,7 @@
           <a:noFill/>
         </p:spPr>
         <p:txBody>
-          <a:bodyPr wrap="square" lIns="45720" tIns="18288" rIns="45720" bIns="18288" anchor="ctr">
+          <a:bodyPr wrap="square" lIns="45720" rIns="45720" tIns="18288" bIns="18288" anchor="ctr">
             <a:spAutoFit/>
           </a:bodyPr>
           <a:lstStyle/>
@@ -5391,7 +5592,7 @@
           <a:noFill/>
         </p:spPr>
         <p:txBody>
-          <a:bodyPr wrap="square" lIns="45720" tIns="18288" rIns="45720" bIns="18288" anchor="ctr">
+          <a:bodyPr wrap="square" lIns="45720" rIns="45720" tIns="18288" bIns="18288" anchor="ctr">
             <a:spAutoFit/>
           </a:bodyPr>
           <a:lstStyle/>
@@ -5430,7 +5631,7 @@
           <a:noFill/>
         </p:spPr>
         <p:txBody>
-          <a:bodyPr wrap="square" lIns="45720" tIns="18288" rIns="45720" bIns="18288" anchor="ctr">
+          <a:bodyPr wrap="square" lIns="45720" rIns="45720" tIns="18288" bIns="18288" anchor="ctr">
             <a:spAutoFit/>
           </a:bodyPr>
           <a:lstStyle/>
@@ -5491,9 +5692,7 @@
         <p:txBody>
           <a:bodyPr rtlCol="0" anchor="ctr"/>
           <a:lstStyle/>
-          <a:p>
-            <a:endParaRPr/>
-          </a:p>
+          <a:p/>
         </p:txBody>
       </p:sp>
       <p:sp>
@@ -5513,7 +5712,7 @@
           <a:noFill/>
         </p:spPr>
         <p:txBody>
-          <a:bodyPr wrap="square" lIns="45720" tIns="18288" rIns="45720" bIns="18288" anchor="ctr">
+          <a:bodyPr wrap="square" lIns="45720" rIns="45720" tIns="18288" bIns="18288" anchor="ctr">
             <a:spAutoFit/>
           </a:bodyPr>
           <a:lstStyle/>
@@ -5552,7 +5751,7 @@
           <a:noFill/>
         </p:spPr>
         <p:txBody>
-          <a:bodyPr wrap="square" lIns="45720" tIns="18288" rIns="45720" bIns="18288" anchor="ctr">
+          <a:bodyPr wrap="square" lIns="45720" rIns="45720" tIns="18288" bIns="18288" anchor="ctr">
             <a:spAutoFit/>
           </a:bodyPr>
           <a:lstStyle/>
@@ -5591,7 +5790,7 @@
           <a:noFill/>
         </p:spPr>
         <p:txBody>
-          <a:bodyPr wrap="square" lIns="45720" tIns="18288" rIns="45720" bIns="18288" anchor="ctr">
+          <a:bodyPr wrap="square" lIns="45720" rIns="45720" tIns="18288" bIns="18288" anchor="ctr">
             <a:spAutoFit/>
           </a:bodyPr>
           <a:lstStyle/>
@@ -5630,7 +5829,7 @@
           <a:noFill/>
         </p:spPr>
         <p:txBody>
-          <a:bodyPr wrap="square" lIns="45720" tIns="18288" rIns="45720" bIns="18288" anchor="ctr">
+          <a:bodyPr wrap="square" lIns="45720" rIns="45720" tIns="18288" bIns="18288" anchor="ctr">
             <a:spAutoFit/>
           </a:bodyPr>
           <a:lstStyle/>
@@ -5669,7 +5868,7 @@
           <a:noFill/>
         </p:spPr>
         <p:txBody>
-          <a:bodyPr wrap="square" lIns="45720" tIns="18288" rIns="45720" bIns="18288" anchor="ctr">
+          <a:bodyPr wrap="square" lIns="45720" rIns="45720" tIns="18288" bIns="18288" anchor="ctr">
             <a:spAutoFit/>
           </a:bodyPr>
           <a:lstStyle/>
@@ -5708,7 +5907,7 @@
           <a:noFill/>
         </p:spPr>
         <p:txBody>
-          <a:bodyPr wrap="square" lIns="45720" tIns="18288" rIns="45720" bIns="18288" anchor="ctr">
+          <a:bodyPr wrap="square" lIns="45720" rIns="45720" tIns="18288" bIns="18288" anchor="ctr">
             <a:spAutoFit/>
           </a:bodyPr>
           <a:lstStyle/>
@@ -5747,7 +5946,7 @@
           <a:noFill/>
         </p:spPr>
         <p:txBody>
-          <a:bodyPr wrap="square" lIns="45720" tIns="18288" rIns="45720" bIns="18288" anchor="ctr">
+          <a:bodyPr wrap="square" lIns="45720" rIns="45720" tIns="18288" bIns="18288" anchor="ctr">
             <a:spAutoFit/>
           </a:bodyPr>
           <a:lstStyle/>
@@ -5786,7 +5985,7 @@
           <a:noFill/>
         </p:spPr>
         <p:txBody>
-          <a:bodyPr wrap="square" lIns="45720" tIns="18288" rIns="45720" bIns="18288" anchor="ctr">
+          <a:bodyPr wrap="square" lIns="45720" rIns="45720" tIns="18288" bIns="18288" anchor="ctr">
             <a:spAutoFit/>
           </a:bodyPr>
           <a:lstStyle/>
@@ -5825,7 +6024,7 @@
           <a:noFill/>
         </p:spPr>
         <p:txBody>
-          <a:bodyPr wrap="square" lIns="45720" tIns="18288" rIns="45720" bIns="18288" anchor="ctr">
+          <a:bodyPr wrap="square" lIns="45720" rIns="45720" tIns="18288" bIns="18288" anchor="ctr">
             <a:spAutoFit/>
           </a:bodyPr>
           <a:lstStyle/>
@@ -5864,7 +6063,7 @@
           <a:noFill/>
         </p:spPr>
         <p:txBody>
-          <a:bodyPr wrap="square" lIns="45720" tIns="18288" rIns="45720" bIns="18288" anchor="ctr">
+          <a:bodyPr wrap="square" lIns="45720" rIns="45720" tIns="18288" bIns="18288" anchor="ctr">
             <a:spAutoFit/>
           </a:bodyPr>
           <a:lstStyle/>
@@ -5925,9 +6124,7 @@
         <p:txBody>
           <a:bodyPr rtlCol="0" anchor="ctr"/>
           <a:lstStyle/>
-          <a:p>
-            <a:endParaRPr/>
-          </a:p>
+          <a:p/>
         </p:txBody>
       </p:sp>
       <p:sp>
@@ -5947,7 +6144,7 @@
           <a:noFill/>
         </p:spPr>
         <p:txBody>
-          <a:bodyPr wrap="square" lIns="45720" tIns="18288" rIns="45720" bIns="18288" anchor="ctr">
+          <a:bodyPr wrap="square" lIns="45720" rIns="45720" tIns="18288" bIns="18288" anchor="ctr">
             <a:spAutoFit/>
           </a:bodyPr>
           <a:lstStyle/>
@@ -5986,7 +6183,7 @@
           <a:noFill/>
         </p:spPr>
         <p:txBody>
-          <a:bodyPr wrap="square" lIns="45720" tIns="18288" rIns="45720" bIns="18288" anchor="ctr">
+          <a:bodyPr wrap="square" lIns="45720" rIns="45720" tIns="18288" bIns="18288" anchor="ctr">
             <a:spAutoFit/>
           </a:bodyPr>
           <a:lstStyle/>
@@ -6025,7 +6222,7 @@
           <a:noFill/>
         </p:spPr>
         <p:txBody>
-          <a:bodyPr wrap="square" lIns="45720" tIns="18288" rIns="45720" bIns="18288" anchor="ctr">
+          <a:bodyPr wrap="square" lIns="45720" rIns="45720" tIns="18288" bIns="18288" anchor="ctr">
             <a:spAutoFit/>
           </a:bodyPr>
           <a:lstStyle/>
@@ -6064,7 +6261,7 @@
           <a:noFill/>
         </p:spPr>
         <p:txBody>
-          <a:bodyPr wrap="square" lIns="45720" tIns="18288" rIns="45720" bIns="18288" anchor="ctr">
+          <a:bodyPr wrap="square" lIns="45720" rIns="45720" tIns="18288" bIns="18288" anchor="ctr">
             <a:spAutoFit/>
           </a:bodyPr>
           <a:lstStyle/>
@@ -6103,7 +6300,7 @@
           <a:noFill/>
         </p:spPr>
         <p:txBody>
-          <a:bodyPr wrap="square" lIns="45720" tIns="18288" rIns="45720" bIns="18288" anchor="ctr">
+          <a:bodyPr wrap="square" lIns="45720" rIns="45720" tIns="18288" bIns="18288" anchor="ctr">
             <a:spAutoFit/>
           </a:bodyPr>
           <a:lstStyle/>
@@ -6166,9 +6363,7 @@
         <p:txBody>
           <a:bodyPr rtlCol="0" anchor="ctr"/>
           <a:lstStyle/>
-          <a:p>
-            <a:endParaRPr/>
-          </a:p>
+          <a:p/>
         </p:txBody>
       </p:sp>
       <p:sp>
@@ -6188,7 +6383,7 @@
           <a:noFill/>
         </p:spPr>
         <p:txBody>
-          <a:bodyPr wrap="square" lIns="45720" tIns="18288" rIns="45720" bIns="18288" anchor="t">
+          <a:bodyPr wrap="square" lIns="45720" rIns="45720" tIns="18288" bIns="18288" anchor="t">
             <a:spAutoFit/>
           </a:bodyPr>
           <a:lstStyle/>
@@ -6227,7 +6422,7 @@
           <a:noFill/>
         </p:spPr>
         <p:txBody>
-          <a:bodyPr wrap="square" lIns="45720" tIns="18288" rIns="45720" bIns="18288" anchor="t">
+          <a:bodyPr wrap="square" lIns="45720" rIns="45720" tIns="18288" bIns="18288" anchor="t">
             <a:spAutoFit/>
           </a:bodyPr>
           <a:lstStyle/>
@@ -6266,7 +6461,7 @@
           <a:noFill/>
         </p:spPr>
         <p:txBody>
-          <a:bodyPr wrap="square" lIns="45720" tIns="18288" rIns="45720" bIns="18288" anchor="t">
+          <a:bodyPr wrap="square" lIns="45720" rIns="45720" tIns="18288" bIns="18288" anchor="t">
             <a:spAutoFit/>
           </a:bodyPr>
           <a:lstStyle/>
@@ -6297,7 +6492,7 @@
 </file>
 
 <file path=ppt/slides/slide11.xml><?xml version="1.0" encoding="utf-8"?>
-<p:sld xmlns:a="http://schemas.openxmlformats.org/drawingml/2006/main" xmlns:r="http://schemas.openxmlformats.org/officeDocument/2006/relationships" xmlns:p="http://schemas.openxmlformats.org/presentationml/2006/main">
+<p:sld xmlns:a="http://schemas.openxmlformats.org/drawingml/2006/main" xmlns:p="http://schemas.openxmlformats.org/presentationml/2006/main" xmlns:r="http://schemas.openxmlformats.org/officeDocument/2006/relationships">
   <p:cSld>
     <p:spTree>
       <p:nvGrpSpPr>
@@ -6305,14 +6500,7 @@
         <p:cNvGrpSpPr/>
         <p:nvPr/>
       </p:nvGrpSpPr>
-      <p:grpSpPr>
-        <a:xfrm>
-          <a:off x="0" y="0"/>
-          <a:ext cx="0" cy="0"/>
-          <a:chOff x="0" y="0"/>
-          <a:chExt cx="0" cy="0"/>
-        </a:xfrm>
-      </p:grpSpPr>
+      <p:grpSpPr/>
       <p:sp>
         <p:nvSpPr>
           <p:cNvPr id="2" name="TextBox 1"/>
@@ -6330,7 +6518,7 @@
           <a:noFill/>
         </p:spPr>
         <p:txBody>
-          <a:bodyPr wrap="square" lIns="45720" tIns="18288" rIns="45720" bIns="18288" anchor="t">
+          <a:bodyPr wrap="square" lIns="45720" rIns="45720" tIns="18288" bIns="18288" anchor="t">
             <a:spAutoFit/>
           </a:bodyPr>
           <a:lstStyle/>
@@ -6369,7 +6557,7 @@
           <a:noFill/>
         </p:spPr>
         <p:txBody>
-          <a:bodyPr wrap="square" lIns="45720" tIns="18288" rIns="45720" bIns="18288" anchor="t">
+          <a:bodyPr wrap="square" lIns="45720" rIns="45720" tIns="18288" bIns="18288" anchor="t">
             <a:spAutoFit/>
           </a:bodyPr>
           <a:lstStyle/>
@@ -6432,9 +6620,7 @@
         <p:txBody>
           <a:bodyPr rtlCol="0" anchor="ctr"/>
           <a:lstStyle/>
-          <a:p>
-            <a:endParaRPr/>
-          </a:p>
+          <a:p/>
         </p:txBody>
       </p:sp>
       <p:sp>
@@ -6454,7 +6640,7 @@
           <a:noFill/>
         </p:spPr>
         <p:txBody>
-          <a:bodyPr wrap="square" lIns="45720" tIns="18288" rIns="45720" bIns="18288" anchor="ctr">
+          <a:bodyPr wrap="square" lIns="45720" rIns="45720" tIns="18288" bIns="18288" anchor="ctr">
             <a:spAutoFit/>
           </a:bodyPr>
           <a:lstStyle/>
@@ -6493,7 +6679,7 @@
           <a:noFill/>
         </p:spPr>
         <p:txBody>
-          <a:bodyPr wrap="square" lIns="45720" tIns="18288" rIns="45720" bIns="18288" anchor="ctr">
+          <a:bodyPr wrap="square" lIns="45720" rIns="45720" tIns="18288" bIns="18288" anchor="ctr">
             <a:spAutoFit/>
           </a:bodyPr>
           <a:lstStyle/>
@@ -6532,7 +6718,7 @@
           <a:noFill/>
         </p:spPr>
         <p:txBody>
-          <a:bodyPr wrap="square" lIns="45720" tIns="18288" rIns="45720" bIns="18288" anchor="ctr">
+          <a:bodyPr wrap="square" lIns="45720" rIns="45720" tIns="18288" bIns="18288" anchor="ctr">
             <a:spAutoFit/>
           </a:bodyPr>
           <a:lstStyle/>
@@ -6571,7 +6757,7 @@
           <a:noFill/>
         </p:spPr>
         <p:txBody>
-          <a:bodyPr wrap="square" lIns="45720" tIns="18288" rIns="45720" bIns="18288" anchor="ctr">
+          <a:bodyPr wrap="square" lIns="45720" rIns="45720" tIns="18288" bIns="18288" anchor="ctr">
             <a:spAutoFit/>
           </a:bodyPr>
           <a:lstStyle/>
@@ -6610,7 +6796,7 @@
           <a:noFill/>
         </p:spPr>
         <p:txBody>
-          <a:bodyPr wrap="square" lIns="45720" tIns="18288" rIns="45720" bIns="18288" anchor="ctr">
+          <a:bodyPr wrap="square" lIns="45720" rIns="45720" tIns="18288" bIns="18288" anchor="ctr">
             <a:spAutoFit/>
           </a:bodyPr>
           <a:lstStyle/>
@@ -6649,7 +6835,7 @@
           <a:noFill/>
         </p:spPr>
         <p:txBody>
-          <a:bodyPr wrap="square" lIns="45720" tIns="18288" rIns="45720" bIns="18288" anchor="ctr">
+          <a:bodyPr wrap="square" lIns="45720" rIns="45720" tIns="18288" bIns="18288" anchor="ctr">
             <a:spAutoFit/>
           </a:bodyPr>
           <a:lstStyle/>
@@ -6688,7 +6874,7 @@
           <a:noFill/>
         </p:spPr>
         <p:txBody>
-          <a:bodyPr wrap="square" lIns="45720" tIns="18288" rIns="45720" bIns="18288" anchor="ctr">
+          <a:bodyPr wrap="square" lIns="45720" rIns="45720" tIns="18288" bIns="18288" anchor="ctr">
             <a:spAutoFit/>
           </a:bodyPr>
           <a:lstStyle/>
@@ -6727,7 +6913,7 @@
           <a:noFill/>
         </p:spPr>
         <p:txBody>
-          <a:bodyPr wrap="square" lIns="45720" tIns="18288" rIns="45720" bIns="18288" anchor="ctr">
+          <a:bodyPr wrap="square" lIns="45720" rIns="45720" tIns="18288" bIns="18288" anchor="ctr">
             <a:spAutoFit/>
           </a:bodyPr>
           <a:lstStyle/>
@@ -6766,7 +6952,7 @@
           <a:noFill/>
         </p:spPr>
         <p:txBody>
-          <a:bodyPr wrap="square" lIns="45720" tIns="18288" rIns="45720" bIns="18288" anchor="ctr">
+          <a:bodyPr wrap="square" lIns="45720" rIns="45720" tIns="18288" bIns="18288" anchor="ctr">
             <a:spAutoFit/>
           </a:bodyPr>
           <a:lstStyle/>
@@ -6805,7 +6991,7 @@
           <a:noFill/>
         </p:spPr>
         <p:txBody>
-          <a:bodyPr wrap="square" lIns="45720" tIns="18288" rIns="45720" bIns="18288" anchor="ctr">
+          <a:bodyPr wrap="square" lIns="45720" rIns="45720" tIns="18288" bIns="18288" anchor="ctr">
             <a:spAutoFit/>
           </a:bodyPr>
           <a:lstStyle/>
@@ -6844,7 +7030,7 @@
           <a:noFill/>
         </p:spPr>
         <p:txBody>
-          <a:bodyPr wrap="square" lIns="45720" tIns="18288" rIns="45720" bIns="18288" anchor="ctr">
+          <a:bodyPr wrap="square" lIns="45720" rIns="45720" tIns="18288" bIns="18288" anchor="ctr">
             <a:spAutoFit/>
           </a:bodyPr>
           <a:lstStyle/>
@@ -6883,7 +7069,7 @@
           <a:noFill/>
         </p:spPr>
         <p:txBody>
-          <a:bodyPr wrap="square" lIns="45720" tIns="18288" rIns="45720" bIns="18288" anchor="ctr">
+          <a:bodyPr wrap="square" lIns="45720" rIns="45720" tIns="18288" bIns="18288" anchor="ctr">
             <a:spAutoFit/>
           </a:bodyPr>
           <a:lstStyle/>
@@ -6922,7 +7108,7 @@
           <a:noFill/>
         </p:spPr>
         <p:txBody>
-          <a:bodyPr wrap="square" lIns="45720" tIns="18288" rIns="45720" bIns="18288" anchor="ctr">
+          <a:bodyPr wrap="square" lIns="45720" rIns="45720" tIns="18288" bIns="18288" anchor="ctr">
             <a:spAutoFit/>
           </a:bodyPr>
           <a:lstStyle/>
@@ -6961,7 +7147,7 @@
           <a:noFill/>
         </p:spPr>
         <p:txBody>
-          <a:bodyPr wrap="square" lIns="45720" tIns="18288" rIns="45720" bIns="18288" anchor="ctr">
+          <a:bodyPr wrap="square" lIns="45720" rIns="45720" tIns="18288" bIns="18288" anchor="ctr">
             <a:spAutoFit/>
           </a:bodyPr>
           <a:lstStyle/>
@@ -7000,17 +7186,25 @@
           <a:noFill/>
         </p:spPr>
         <p:txBody>
-          <a:bodyPr wrap="square" lIns="45720" tIns="18288" rIns="45720" bIns="18288" anchor="ctr">
-            <a:spAutoFit/>
-          </a:bodyPr>
-          <a:lstStyle/>
-          <a:p>
-            <a:pPr algn="l">
-              <a:lnSpc>
-                <a:spcPct val="100000"/>
-              </a:lnSpc>
-            </a:pPr>
-            <a:endParaRPr/>
+          <a:bodyPr wrap="square" lIns="45720" rIns="45720" tIns="18288" bIns="18288" anchor="ctr">
+            <a:spAutoFit/>
+          </a:bodyPr>
+          <a:lstStyle/>
+          <a:p>
+            <a:pPr algn="l">
+              <a:lnSpc>
+                <a:spcPct val="100000"/>
+              </a:lnSpc>
+            </a:pPr>
+            <a:r>
+              <a:rPr sz="1150" b="1" i="0">
+                <a:solidFill>
+                  <a:srgbClr val="2E2A27"/>
+                </a:solidFill>
+                <a:latin typeface="Calibri"/>
+              </a:rPr>
+              <a:t/>
+            </a:r>
           </a:p>
         </p:txBody>
       </p:sp>
@@ -7031,7 +7225,7 @@
           <a:noFill/>
         </p:spPr>
         <p:txBody>
-          <a:bodyPr wrap="square" lIns="45720" tIns="18288" rIns="45720" bIns="18288" anchor="ctr">
+          <a:bodyPr wrap="square" lIns="45720" rIns="45720" tIns="18288" bIns="18288" anchor="ctr">
             <a:spAutoFit/>
           </a:bodyPr>
           <a:lstStyle/>
@@ -7070,7 +7264,7 @@
           <a:noFill/>
         </p:spPr>
         <p:txBody>
-          <a:bodyPr wrap="square" lIns="45720" tIns="18288" rIns="45720" bIns="18288" anchor="ctr">
+          <a:bodyPr wrap="square" lIns="45720" rIns="45720" tIns="18288" bIns="18288" anchor="ctr">
             <a:spAutoFit/>
           </a:bodyPr>
           <a:lstStyle/>
@@ -7109,7 +7303,7 @@
           <a:noFill/>
         </p:spPr>
         <p:txBody>
-          <a:bodyPr wrap="square" lIns="45720" tIns="18288" rIns="45720" bIns="18288" anchor="ctr">
+          <a:bodyPr wrap="square" lIns="45720" rIns="45720" tIns="18288" bIns="18288" anchor="ctr">
             <a:spAutoFit/>
           </a:bodyPr>
           <a:lstStyle/>
@@ -7148,7 +7342,7 @@
           <a:noFill/>
         </p:spPr>
         <p:txBody>
-          <a:bodyPr wrap="square" lIns="45720" tIns="18288" rIns="45720" bIns="18288" anchor="ctr">
+          <a:bodyPr wrap="square" lIns="45720" rIns="45720" tIns="18288" bIns="18288" anchor="ctr">
             <a:spAutoFit/>
           </a:bodyPr>
           <a:lstStyle/>
@@ -7187,7 +7381,7 @@
           <a:noFill/>
         </p:spPr>
         <p:txBody>
-          <a:bodyPr wrap="square" lIns="45720" tIns="18288" rIns="45720" bIns="18288" anchor="ctr">
+          <a:bodyPr wrap="square" lIns="45720" rIns="45720" tIns="18288" bIns="18288" anchor="ctr">
             <a:spAutoFit/>
           </a:bodyPr>
           <a:lstStyle/>
@@ -7226,7 +7420,7 @@
           <a:noFill/>
         </p:spPr>
         <p:txBody>
-          <a:bodyPr wrap="square" lIns="45720" tIns="18288" rIns="45720" bIns="18288" anchor="ctr">
+          <a:bodyPr wrap="square" lIns="45720" rIns="45720" tIns="18288" bIns="18288" anchor="ctr">
             <a:spAutoFit/>
           </a:bodyPr>
           <a:lstStyle/>
@@ -7265,17 +7459,25 @@
           <a:noFill/>
         </p:spPr>
         <p:txBody>
-          <a:bodyPr wrap="square" lIns="45720" tIns="18288" rIns="45720" bIns="18288" anchor="ctr">
-            <a:spAutoFit/>
-          </a:bodyPr>
-          <a:lstStyle/>
-          <a:p>
-            <a:pPr algn="l">
-              <a:lnSpc>
-                <a:spcPct val="100000"/>
-              </a:lnSpc>
-            </a:pPr>
-            <a:endParaRPr/>
+          <a:bodyPr wrap="square" lIns="45720" rIns="45720" tIns="18288" bIns="18288" anchor="ctr">
+            <a:spAutoFit/>
+          </a:bodyPr>
+          <a:lstStyle/>
+          <a:p>
+            <a:pPr algn="l">
+              <a:lnSpc>
+                <a:spcPct val="100000"/>
+              </a:lnSpc>
+            </a:pPr>
+            <a:r>
+              <a:rPr sz="1150" b="1" i="0">
+                <a:solidFill>
+                  <a:srgbClr val="2E2A27"/>
+                </a:solidFill>
+                <a:latin typeface="Calibri"/>
+              </a:rPr>
+              <a:t/>
+            </a:r>
           </a:p>
         </p:txBody>
       </p:sp>
@@ -7296,7 +7498,7 @@
           <a:noFill/>
         </p:spPr>
         <p:txBody>
-          <a:bodyPr wrap="square" lIns="45720" tIns="18288" rIns="45720" bIns="18288" anchor="ctr">
+          <a:bodyPr wrap="square" lIns="45720" rIns="45720" tIns="18288" bIns="18288" anchor="ctr">
             <a:spAutoFit/>
           </a:bodyPr>
           <a:lstStyle/>
@@ -7335,7 +7537,7 @@
           <a:noFill/>
         </p:spPr>
         <p:txBody>
-          <a:bodyPr wrap="square" lIns="45720" tIns="18288" rIns="45720" bIns="18288" anchor="ctr">
+          <a:bodyPr wrap="square" lIns="45720" rIns="45720" tIns="18288" bIns="18288" anchor="ctr">
             <a:spAutoFit/>
           </a:bodyPr>
           <a:lstStyle/>
@@ -7374,7 +7576,7 @@
           <a:noFill/>
         </p:spPr>
         <p:txBody>
-          <a:bodyPr wrap="square" lIns="45720" tIns="18288" rIns="45720" bIns="18288" anchor="ctr">
+          <a:bodyPr wrap="square" lIns="45720" rIns="45720" tIns="18288" bIns="18288" anchor="ctr">
             <a:spAutoFit/>
           </a:bodyPr>
           <a:lstStyle/>
@@ -7413,7 +7615,7 @@
           <a:noFill/>
         </p:spPr>
         <p:txBody>
-          <a:bodyPr wrap="square" lIns="45720" tIns="18288" rIns="45720" bIns="18288" anchor="ctr">
+          <a:bodyPr wrap="square" lIns="45720" rIns="45720" tIns="18288" bIns="18288" anchor="ctr">
             <a:spAutoFit/>
           </a:bodyPr>
           <a:lstStyle/>
@@ -7452,7 +7654,7 @@
           <a:noFill/>
         </p:spPr>
         <p:txBody>
-          <a:bodyPr wrap="square" lIns="45720" tIns="18288" rIns="45720" bIns="18288" anchor="ctr">
+          <a:bodyPr wrap="square" lIns="45720" rIns="45720" tIns="18288" bIns="18288" anchor="ctr">
             <a:spAutoFit/>
           </a:bodyPr>
           <a:lstStyle/>
@@ -7491,7 +7693,7 @@
           <a:noFill/>
         </p:spPr>
         <p:txBody>
-          <a:bodyPr wrap="square" lIns="45720" tIns="18288" rIns="45720" bIns="18288" anchor="ctr">
+          <a:bodyPr wrap="square" lIns="45720" rIns="45720" tIns="18288" bIns="18288" anchor="ctr">
             <a:spAutoFit/>
           </a:bodyPr>
           <a:lstStyle/>
@@ -7530,7 +7732,7 @@
           <a:noFill/>
         </p:spPr>
         <p:txBody>
-          <a:bodyPr wrap="square" lIns="45720" tIns="18288" rIns="45720" bIns="18288" anchor="ctr">
+          <a:bodyPr wrap="square" lIns="45720" rIns="45720" tIns="18288" bIns="18288" anchor="ctr">
             <a:spAutoFit/>
           </a:bodyPr>
           <a:lstStyle/>
@@ -7569,7 +7771,7 @@
           <a:noFill/>
         </p:spPr>
         <p:txBody>
-          <a:bodyPr wrap="square" lIns="45720" tIns="18288" rIns="45720" bIns="18288" anchor="ctr">
+          <a:bodyPr wrap="square" lIns="45720" rIns="45720" tIns="18288" bIns="18288" anchor="ctr">
             <a:spAutoFit/>
           </a:bodyPr>
           <a:lstStyle/>
@@ -7608,7 +7810,7 @@
           <a:noFill/>
         </p:spPr>
         <p:txBody>
-          <a:bodyPr wrap="square" lIns="45720" tIns="18288" rIns="45720" bIns="18288" anchor="ctr">
+          <a:bodyPr wrap="square" lIns="45720" rIns="45720" tIns="18288" bIns="18288" anchor="ctr">
             <a:spAutoFit/>
           </a:bodyPr>
           <a:lstStyle/>
@@ -7647,7 +7849,7 @@
           <a:noFill/>
         </p:spPr>
         <p:txBody>
-          <a:bodyPr wrap="square" lIns="45720" tIns="18288" rIns="45720" bIns="18288" anchor="ctr">
+          <a:bodyPr wrap="square" lIns="45720" rIns="45720" tIns="18288" bIns="18288" anchor="ctr">
             <a:spAutoFit/>
           </a:bodyPr>
           <a:lstStyle/>
@@ -7686,7 +7888,7 @@
           <a:noFill/>
         </p:spPr>
         <p:txBody>
-          <a:bodyPr wrap="square" lIns="45720" tIns="18288" rIns="45720" bIns="18288" anchor="ctr">
+          <a:bodyPr wrap="square" lIns="45720" rIns="45720" tIns="18288" bIns="18288" anchor="ctr">
             <a:spAutoFit/>
           </a:bodyPr>
           <a:lstStyle/>
@@ -7725,7 +7927,7 @@
           <a:noFill/>
         </p:spPr>
         <p:txBody>
-          <a:bodyPr wrap="square" lIns="45720" tIns="18288" rIns="45720" bIns="18288" anchor="ctr">
+          <a:bodyPr wrap="square" lIns="45720" rIns="45720" tIns="18288" bIns="18288" anchor="ctr">
             <a:spAutoFit/>
           </a:bodyPr>
           <a:lstStyle/>
@@ -7764,7 +7966,7 @@
           <a:noFill/>
         </p:spPr>
         <p:txBody>
-          <a:bodyPr wrap="square" lIns="45720" tIns="18288" rIns="45720" bIns="18288" anchor="ctr">
+          <a:bodyPr wrap="square" lIns="45720" rIns="45720" tIns="18288" bIns="18288" anchor="ctr">
             <a:spAutoFit/>
           </a:bodyPr>
           <a:lstStyle/>
@@ -7803,17 +8005,25 @@
           <a:noFill/>
         </p:spPr>
         <p:txBody>
-          <a:bodyPr wrap="square" lIns="45720" tIns="18288" rIns="45720" bIns="18288" anchor="ctr">
-            <a:spAutoFit/>
-          </a:bodyPr>
-          <a:lstStyle/>
-          <a:p>
-            <a:pPr algn="l">
-              <a:lnSpc>
-                <a:spcPct val="100000"/>
-              </a:lnSpc>
-            </a:pPr>
-            <a:endParaRPr/>
+          <a:bodyPr wrap="square" lIns="45720" rIns="45720" tIns="18288" bIns="18288" anchor="ctr">
+            <a:spAutoFit/>
+          </a:bodyPr>
+          <a:lstStyle/>
+          <a:p>
+            <a:pPr algn="l">
+              <a:lnSpc>
+                <a:spcPct val="100000"/>
+              </a:lnSpc>
+            </a:pPr>
+            <a:r>
+              <a:rPr sz="1150" b="1" i="0">
+                <a:solidFill>
+                  <a:srgbClr val="2E2A27"/>
+                </a:solidFill>
+                <a:latin typeface="Calibri"/>
+              </a:rPr>
+              <a:t/>
+            </a:r>
           </a:p>
         </p:txBody>
       </p:sp>
@@ -7834,7 +8044,7 @@
           <a:noFill/>
         </p:spPr>
         <p:txBody>
-          <a:bodyPr wrap="square" lIns="45720" tIns="18288" rIns="45720" bIns="18288" anchor="ctr">
+          <a:bodyPr wrap="square" lIns="45720" rIns="45720" tIns="18288" bIns="18288" anchor="ctr">
             <a:spAutoFit/>
           </a:bodyPr>
           <a:lstStyle/>
@@ -7873,7 +8083,7 @@
           <a:noFill/>
         </p:spPr>
         <p:txBody>
-          <a:bodyPr wrap="square" lIns="45720" tIns="18288" rIns="45720" bIns="18288" anchor="ctr">
+          <a:bodyPr wrap="square" lIns="45720" rIns="45720" tIns="18288" bIns="18288" anchor="ctr">
             <a:spAutoFit/>
           </a:bodyPr>
           <a:lstStyle/>
@@ -7912,7 +8122,7 @@
           <a:noFill/>
         </p:spPr>
         <p:txBody>
-          <a:bodyPr wrap="square" lIns="45720" tIns="18288" rIns="45720" bIns="18288" anchor="ctr">
+          <a:bodyPr wrap="square" lIns="45720" rIns="45720" tIns="18288" bIns="18288" anchor="ctr">
             <a:spAutoFit/>
           </a:bodyPr>
           <a:lstStyle/>
@@ -7951,7 +8161,7 @@
           <a:noFill/>
         </p:spPr>
         <p:txBody>
-          <a:bodyPr wrap="square" lIns="45720" tIns="18288" rIns="45720" bIns="18288" anchor="ctr">
+          <a:bodyPr wrap="square" lIns="45720" rIns="45720" tIns="18288" bIns="18288" anchor="ctr">
             <a:spAutoFit/>
           </a:bodyPr>
           <a:lstStyle/>
@@ -7990,7 +8200,7 @@
           <a:noFill/>
         </p:spPr>
         <p:txBody>
-          <a:bodyPr wrap="square" lIns="45720" tIns="18288" rIns="45720" bIns="18288" anchor="ctr">
+          <a:bodyPr wrap="square" lIns="45720" rIns="45720" tIns="18288" bIns="18288" anchor="ctr">
             <a:spAutoFit/>
           </a:bodyPr>
           <a:lstStyle/>
@@ -8029,7 +8239,7 @@
           <a:noFill/>
         </p:spPr>
         <p:txBody>
-          <a:bodyPr wrap="square" lIns="45720" tIns="18288" rIns="45720" bIns="18288" anchor="ctr">
+          <a:bodyPr wrap="square" lIns="45720" rIns="45720" tIns="18288" bIns="18288" anchor="ctr">
             <a:spAutoFit/>
           </a:bodyPr>
           <a:lstStyle/>
@@ -8068,17 +8278,25 @@
           <a:noFill/>
         </p:spPr>
         <p:txBody>
-          <a:bodyPr wrap="square" lIns="45720" tIns="18288" rIns="45720" bIns="18288" anchor="ctr">
-            <a:spAutoFit/>
-          </a:bodyPr>
-          <a:lstStyle/>
-          <a:p>
-            <a:pPr algn="l">
-              <a:lnSpc>
-                <a:spcPct val="100000"/>
-              </a:lnSpc>
-            </a:pPr>
-            <a:endParaRPr/>
+          <a:bodyPr wrap="square" lIns="45720" rIns="45720" tIns="18288" bIns="18288" anchor="ctr">
+            <a:spAutoFit/>
+          </a:bodyPr>
+          <a:lstStyle/>
+          <a:p>
+            <a:pPr algn="l">
+              <a:lnSpc>
+                <a:spcPct val="100000"/>
+              </a:lnSpc>
+            </a:pPr>
+            <a:r>
+              <a:rPr sz="1150" b="1" i="0">
+                <a:solidFill>
+                  <a:srgbClr val="2E2A27"/>
+                </a:solidFill>
+                <a:latin typeface="Calibri"/>
+              </a:rPr>
+              <a:t/>
+            </a:r>
           </a:p>
         </p:txBody>
       </p:sp>
@@ -8099,7 +8317,7 @@
           <a:noFill/>
         </p:spPr>
         <p:txBody>
-          <a:bodyPr wrap="square" lIns="45720" tIns="18288" rIns="45720" bIns="18288" anchor="ctr">
+          <a:bodyPr wrap="square" lIns="45720" rIns="45720" tIns="18288" bIns="18288" anchor="ctr">
             <a:spAutoFit/>
           </a:bodyPr>
           <a:lstStyle/>
@@ -8138,7 +8356,7 @@
           <a:noFill/>
         </p:spPr>
         <p:txBody>
-          <a:bodyPr wrap="square" lIns="45720" tIns="18288" rIns="45720" bIns="18288" anchor="ctr">
+          <a:bodyPr wrap="square" lIns="45720" rIns="45720" tIns="18288" bIns="18288" anchor="ctr">
             <a:spAutoFit/>
           </a:bodyPr>
           <a:lstStyle/>
@@ -8177,7 +8395,7 @@
           <a:noFill/>
         </p:spPr>
         <p:txBody>
-          <a:bodyPr wrap="square" lIns="45720" tIns="18288" rIns="45720" bIns="18288" anchor="ctr">
+          <a:bodyPr wrap="square" lIns="45720" rIns="45720" tIns="18288" bIns="18288" anchor="ctr">
             <a:spAutoFit/>
           </a:bodyPr>
           <a:lstStyle/>
@@ -8216,7 +8434,7 @@
           <a:noFill/>
         </p:spPr>
         <p:txBody>
-          <a:bodyPr wrap="square" lIns="45720" tIns="18288" rIns="45720" bIns="18288" anchor="ctr">
+          <a:bodyPr wrap="square" lIns="45720" rIns="45720" tIns="18288" bIns="18288" anchor="ctr">
             <a:spAutoFit/>
           </a:bodyPr>
           <a:lstStyle/>
@@ -8255,7 +8473,7 @@
           <a:noFill/>
         </p:spPr>
         <p:txBody>
-          <a:bodyPr wrap="square" lIns="45720" tIns="18288" rIns="45720" bIns="18288" anchor="ctr">
+          <a:bodyPr wrap="square" lIns="45720" rIns="45720" tIns="18288" bIns="18288" anchor="ctr">
             <a:spAutoFit/>
           </a:bodyPr>
           <a:lstStyle/>
@@ -8294,7 +8512,7 @@
           <a:noFill/>
         </p:spPr>
         <p:txBody>
-          <a:bodyPr wrap="square" lIns="45720" tIns="18288" rIns="45720" bIns="18288" anchor="ctr">
+          <a:bodyPr wrap="square" lIns="45720" rIns="45720" tIns="18288" bIns="18288" anchor="ctr">
             <a:spAutoFit/>
           </a:bodyPr>
           <a:lstStyle/>
@@ -8357,9 +8575,7 @@
         <p:txBody>
           <a:bodyPr rtlCol="0" anchor="ctr"/>
           <a:lstStyle/>
-          <a:p>
-            <a:endParaRPr/>
-          </a:p>
+          <a:p/>
         </p:txBody>
       </p:sp>
       <p:sp>
@@ -8379,7 +8595,7 @@
           <a:noFill/>
         </p:spPr>
         <p:txBody>
-          <a:bodyPr wrap="square" lIns="45720" tIns="18288" rIns="45720" bIns="18288" anchor="t">
+          <a:bodyPr wrap="square" lIns="45720" rIns="45720" tIns="18288" bIns="18288" anchor="t">
             <a:spAutoFit/>
           </a:bodyPr>
           <a:lstStyle/>
@@ -8418,7 +8634,7 @@
           <a:noFill/>
         </p:spPr>
         <p:txBody>
-          <a:bodyPr wrap="square" lIns="45720" tIns="18288" rIns="45720" bIns="18288" anchor="t">
+          <a:bodyPr wrap="square" lIns="45720" rIns="45720" tIns="18288" bIns="18288" anchor="t">
             <a:spAutoFit/>
           </a:bodyPr>
           <a:lstStyle/>
@@ -8481,9 +8697,7 @@
         <p:txBody>
           <a:bodyPr rtlCol="0" anchor="ctr"/>
           <a:lstStyle/>
-          <a:p>
-            <a:endParaRPr/>
-          </a:p>
+          <a:p/>
         </p:txBody>
       </p:sp>
       <p:sp>
@@ -8503,7 +8717,7 @@
           <a:noFill/>
         </p:spPr>
         <p:txBody>
-          <a:bodyPr wrap="square" lIns="45720" tIns="18288" rIns="45720" bIns="18288" anchor="t">
+          <a:bodyPr wrap="square" lIns="45720" rIns="45720" tIns="18288" bIns="18288" anchor="t">
             <a:spAutoFit/>
           </a:bodyPr>
           <a:lstStyle/>
@@ -8542,7 +8756,7 @@
           <a:noFill/>
         </p:spPr>
         <p:txBody>
-          <a:bodyPr wrap="square" lIns="45720" tIns="18288" rIns="45720" bIns="18288" anchor="t">
+          <a:bodyPr wrap="square" lIns="45720" rIns="45720" tIns="18288" bIns="18288" anchor="t">
             <a:spAutoFit/>
           </a:bodyPr>
           <a:lstStyle/>
@@ -8581,7 +8795,7 @@
           <a:noFill/>
         </p:spPr>
         <p:txBody>
-          <a:bodyPr wrap="square" lIns="45720" tIns="18288" rIns="45720" bIns="18288" anchor="t">
+          <a:bodyPr wrap="square" lIns="45720" rIns="45720" tIns="18288" bIns="18288" anchor="t">
             <a:spAutoFit/>
           </a:bodyPr>
           <a:lstStyle/>
@@ -8612,7 +8826,7 @@
 </file>
 
 <file path=ppt/slides/slide12.xml><?xml version="1.0" encoding="utf-8"?>
-<p:sld xmlns:a="http://schemas.openxmlformats.org/drawingml/2006/main" xmlns:r="http://schemas.openxmlformats.org/officeDocument/2006/relationships" xmlns:p="http://schemas.openxmlformats.org/presentationml/2006/main">
+<p:sld xmlns:a="http://schemas.openxmlformats.org/drawingml/2006/main" xmlns:p="http://schemas.openxmlformats.org/presentationml/2006/main" xmlns:r="http://schemas.openxmlformats.org/officeDocument/2006/relationships">
   <p:cSld>
     <p:spTree>
       <p:nvGrpSpPr>
@@ -8620,14 +8834,7 @@
         <p:cNvGrpSpPr/>
         <p:nvPr/>
       </p:nvGrpSpPr>
-      <p:grpSpPr>
-        <a:xfrm>
-          <a:off x="0" y="0"/>
-          <a:ext cx="0" cy="0"/>
-          <a:chOff x="0" y="0"/>
-          <a:chExt cx="0" cy="0"/>
-        </a:xfrm>
-      </p:grpSpPr>
+      <p:grpSpPr/>
       <p:sp>
         <p:nvSpPr>
           <p:cNvPr id="2" name="TextBox 1"/>
@@ -8645,7 +8852,7 @@
           <a:noFill/>
         </p:spPr>
         <p:txBody>
-          <a:bodyPr wrap="square" lIns="45720" tIns="18288" rIns="45720" bIns="18288" anchor="t">
+          <a:bodyPr wrap="square" lIns="45720" rIns="45720" tIns="18288" bIns="18288" anchor="t">
             <a:spAutoFit/>
           </a:bodyPr>
           <a:lstStyle/>
@@ -8684,7 +8891,7 @@
           <a:noFill/>
         </p:spPr>
         <p:txBody>
-          <a:bodyPr wrap="square" lIns="45720" tIns="18288" rIns="45720" bIns="18288" anchor="t">
+          <a:bodyPr wrap="square" lIns="45720" rIns="45720" tIns="18288" bIns="18288" anchor="t">
             <a:spAutoFit/>
           </a:bodyPr>
           <a:lstStyle/>
@@ -8747,9 +8954,7 @@
         <p:txBody>
           <a:bodyPr rtlCol="0" anchor="ctr"/>
           <a:lstStyle/>
-          <a:p>
-            <a:endParaRPr/>
-          </a:p>
+          <a:p/>
         </p:txBody>
       </p:sp>
       <p:sp>
@@ -8769,7 +8974,7 @@
           <a:noFill/>
         </p:spPr>
         <p:txBody>
-          <a:bodyPr wrap="square" lIns="45720" tIns="18288" rIns="45720" bIns="18288" anchor="ctr">
+          <a:bodyPr wrap="square" lIns="45720" rIns="45720" tIns="18288" bIns="18288" anchor="ctr">
             <a:spAutoFit/>
           </a:bodyPr>
           <a:lstStyle/>
@@ -8808,7 +9013,7 @@
           <a:noFill/>
         </p:spPr>
         <p:txBody>
-          <a:bodyPr wrap="square" lIns="45720" tIns="18288" rIns="45720" bIns="18288" anchor="ctr">
+          <a:bodyPr wrap="square" lIns="45720" rIns="45720" tIns="18288" bIns="18288" anchor="ctr">
             <a:spAutoFit/>
           </a:bodyPr>
           <a:lstStyle/>
@@ -8847,7 +9052,7 @@
           <a:noFill/>
         </p:spPr>
         <p:txBody>
-          <a:bodyPr wrap="square" lIns="45720" tIns="18288" rIns="45720" bIns="18288" anchor="ctr">
+          <a:bodyPr wrap="square" lIns="45720" rIns="45720" tIns="18288" bIns="18288" anchor="ctr">
             <a:spAutoFit/>
           </a:bodyPr>
           <a:lstStyle/>
@@ -8886,7 +9091,7 @@
           <a:noFill/>
         </p:spPr>
         <p:txBody>
-          <a:bodyPr wrap="square" lIns="45720" tIns="18288" rIns="45720" bIns="18288" anchor="ctr">
+          <a:bodyPr wrap="square" lIns="45720" rIns="45720" tIns="18288" bIns="18288" anchor="ctr">
             <a:spAutoFit/>
           </a:bodyPr>
           <a:lstStyle/>
@@ -8925,7 +9130,7 @@
           <a:noFill/>
         </p:spPr>
         <p:txBody>
-          <a:bodyPr wrap="square" lIns="45720" tIns="18288" rIns="45720" bIns="18288" anchor="ctr">
+          <a:bodyPr wrap="square" lIns="45720" rIns="45720" tIns="18288" bIns="18288" anchor="ctr">
             <a:spAutoFit/>
           </a:bodyPr>
           <a:lstStyle/>
@@ -8964,7 +9169,7 @@
           <a:noFill/>
         </p:spPr>
         <p:txBody>
-          <a:bodyPr wrap="square" lIns="45720" tIns="18288" rIns="45720" bIns="18288" anchor="ctr">
+          <a:bodyPr wrap="square" lIns="45720" rIns="45720" tIns="18288" bIns="18288" anchor="ctr">
             <a:spAutoFit/>
           </a:bodyPr>
           <a:lstStyle/>
@@ -9003,7 +9208,7 @@
           <a:noFill/>
         </p:spPr>
         <p:txBody>
-          <a:bodyPr wrap="square" lIns="45720" tIns="18288" rIns="45720" bIns="18288" anchor="ctr">
+          <a:bodyPr wrap="square" lIns="45720" rIns="45720" tIns="18288" bIns="18288" anchor="ctr">
             <a:spAutoFit/>
           </a:bodyPr>
           <a:lstStyle/>
@@ -9064,9 +9269,7 @@
         <p:txBody>
           <a:bodyPr rtlCol="0" anchor="ctr"/>
           <a:lstStyle/>
-          <a:p>
-            <a:endParaRPr/>
-          </a:p>
+          <a:p/>
         </p:txBody>
       </p:sp>
       <p:sp>
@@ -9086,7 +9289,7 @@
           <a:noFill/>
         </p:spPr>
         <p:txBody>
-          <a:bodyPr wrap="square" lIns="45720" tIns="18288" rIns="45720" bIns="18288" anchor="ctr">
+          <a:bodyPr wrap="square" lIns="45720" rIns="45720" tIns="18288" bIns="18288" anchor="ctr">
             <a:spAutoFit/>
           </a:bodyPr>
           <a:lstStyle/>
@@ -9125,7 +9328,7 @@
           <a:noFill/>
         </p:spPr>
         <p:txBody>
-          <a:bodyPr wrap="square" lIns="45720" tIns="18288" rIns="45720" bIns="18288" anchor="ctr">
+          <a:bodyPr wrap="square" lIns="45720" rIns="45720" tIns="18288" bIns="18288" anchor="ctr">
             <a:spAutoFit/>
           </a:bodyPr>
           <a:lstStyle/>
@@ -9164,7 +9367,7 @@
           <a:noFill/>
         </p:spPr>
         <p:txBody>
-          <a:bodyPr wrap="square" lIns="45720" tIns="18288" rIns="45720" bIns="18288" anchor="ctr">
+          <a:bodyPr wrap="square" lIns="45720" rIns="45720" tIns="18288" bIns="18288" anchor="ctr">
             <a:spAutoFit/>
           </a:bodyPr>
           <a:lstStyle/>
@@ -9203,7 +9406,7 @@
           <a:noFill/>
         </p:spPr>
         <p:txBody>
-          <a:bodyPr wrap="square" lIns="45720" tIns="18288" rIns="45720" bIns="18288" anchor="ctr">
+          <a:bodyPr wrap="square" lIns="45720" rIns="45720" tIns="18288" bIns="18288" anchor="ctr">
             <a:spAutoFit/>
           </a:bodyPr>
           <a:lstStyle/>
@@ -9242,7 +9445,7 @@
           <a:noFill/>
         </p:spPr>
         <p:txBody>
-          <a:bodyPr wrap="square" lIns="45720" tIns="18288" rIns="45720" bIns="18288" anchor="ctr">
+          <a:bodyPr wrap="square" lIns="45720" rIns="45720" tIns="18288" bIns="18288" anchor="ctr">
             <a:spAutoFit/>
           </a:bodyPr>
           <a:lstStyle/>
@@ -9281,7 +9484,7 @@
           <a:noFill/>
         </p:spPr>
         <p:txBody>
-          <a:bodyPr wrap="square" lIns="45720" tIns="18288" rIns="45720" bIns="18288" anchor="ctr">
+          <a:bodyPr wrap="square" lIns="45720" rIns="45720" tIns="18288" bIns="18288" anchor="ctr">
             <a:spAutoFit/>
           </a:bodyPr>
           <a:lstStyle/>
@@ -9320,7 +9523,7 @@
           <a:noFill/>
         </p:spPr>
         <p:txBody>
-          <a:bodyPr wrap="square" lIns="45720" tIns="18288" rIns="45720" bIns="18288" anchor="ctr">
+          <a:bodyPr wrap="square" lIns="45720" rIns="45720" tIns="18288" bIns="18288" anchor="ctr">
             <a:spAutoFit/>
           </a:bodyPr>
           <a:lstStyle/>
@@ -9359,17 +9562,25 @@
           <a:noFill/>
         </p:spPr>
         <p:txBody>
-          <a:bodyPr wrap="square" lIns="45720" tIns="18288" rIns="45720" bIns="18288" anchor="ctr">
-            <a:spAutoFit/>
-          </a:bodyPr>
-          <a:lstStyle/>
-          <a:p>
-            <a:pPr algn="l">
-              <a:lnSpc>
-                <a:spcPct val="100000"/>
-              </a:lnSpc>
-            </a:pPr>
-            <a:endParaRPr/>
+          <a:bodyPr wrap="square" lIns="45720" rIns="45720" tIns="18288" bIns="18288" anchor="ctr">
+            <a:spAutoFit/>
+          </a:bodyPr>
+          <a:lstStyle/>
+          <a:p>
+            <a:pPr algn="l">
+              <a:lnSpc>
+                <a:spcPct val="100000"/>
+              </a:lnSpc>
+            </a:pPr>
+            <a:r>
+              <a:rPr sz="1150" b="1" i="0">
+                <a:solidFill>
+                  <a:srgbClr val="2E2A27"/>
+                </a:solidFill>
+                <a:latin typeface="Calibri"/>
+              </a:rPr>
+              <a:t/>
+            </a:r>
           </a:p>
         </p:txBody>
       </p:sp>
@@ -9390,7 +9601,7 @@
           <a:noFill/>
         </p:spPr>
         <p:txBody>
-          <a:bodyPr wrap="square" lIns="45720" tIns="18288" rIns="45720" bIns="18288" anchor="ctr">
+          <a:bodyPr wrap="square" lIns="45720" rIns="45720" tIns="18288" bIns="18288" anchor="ctr">
             <a:spAutoFit/>
           </a:bodyPr>
           <a:lstStyle/>
@@ -9429,7 +9640,7 @@
           <a:noFill/>
         </p:spPr>
         <p:txBody>
-          <a:bodyPr wrap="square" lIns="45720" tIns="18288" rIns="45720" bIns="18288" anchor="ctr">
+          <a:bodyPr wrap="square" lIns="45720" rIns="45720" tIns="18288" bIns="18288" anchor="ctr">
             <a:spAutoFit/>
           </a:bodyPr>
           <a:lstStyle/>
@@ -9468,7 +9679,7 @@
           <a:noFill/>
         </p:spPr>
         <p:txBody>
-          <a:bodyPr wrap="square" lIns="45720" tIns="18288" rIns="45720" bIns="18288" anchor="ctr">
+          <a:bodyPr wrap="square" lIns="45720" rIns="45720" tIns="18288" bIns="18288" anchor="ctr">
             <a:spAutoFit/>
           </a:bodyPr>
           <a:lstStyle/>
@@ -9507,7 +9718,7 @@
           <a:noFill/>
         </p:spPr>
         <p:txBody>
-          <a:bodyPr wrap="square" lIns="45720" tIns="18288" rIns="45720" bIns="18288" anchor="ctr">
+          <a:bodyPr wrap="square" lIns="45720" rIns="45720" tIns="18288" bIns="18288" anchor="ctr">
             <a:spAutoFit/>
           </a:bodyPr>
           <a:lstStyle/>
@@ -9546,7 +9757,7 @@
           <a:noFill/>
         </p:spPr>
         <p:txBody>
-          <a:bodyPr wrap="square" lIns="45720" tIns="18288" rIns="45720" bIns="18288" anchor="ctr">
+          <a:bodyPr wrap="square" lIns="45720" rIns="45720" tIns="18288" bIns="18288" anchor="ctr">
             <a:spAutoFit/>
           </a:bodyPr>
           <a:lstStyle/>
@@ -9585,7 +9796,7 @@
           <a:noFill/>
         </p:spPr>
         <p:txBody>
-          <a:bodyPr wrap="square" lIns="45720" tIns="18288" rIns="45720" bIns="18288" anchor="ctr">
+          <a:bodyPr wrap="square" lIns="45720" rIns="45720" tIns="18288" bIns="18288" anchor="ctr">
             <a:spAutoFit/>
           </a:bodyPr>
           <a:lstStyle/>
@@ -9646,9 +9857,7 @@
         <p:txBody>
           <a:bodyPr rtlCol="0" anchor="ctr"/>
           <a:lstStyle/>
-          <a:p>
-            <a:endParaRPr/>
-          </a:p>
+          <a:p/>
         </p:txBody>
       </p:sp>
       <p:sp>
@@ -9668,7 +9877,7 @@
           <a:noFill/>
         </p:spPr>
         <p:txBody>
-          <a:bodyPr wrap="square" lIns="45720" tIns="18288" rIns="45720" bIns="18288" anchor="ctr">
+          <a:bodyPr wrap="square" lIns="45720" rIns="45720" tIns="18288" bIns="18288" anchor="ctr">
             <a:spAutoFit/>
           </a:bodyPr>
           <a:lstStyle/>
@@ -9707,7 +9916,7 @@
           <a:noFill/>
         </p:spPr>
         <p:txBody>
-          <a:bodyPr wrap="square" lIns="45720" tIns="18288" rIns="45720" bIns="18288" anchor="ctr">
+          <a:bodyPr wrap="square" lIns="45720" rIns="45720" tIns="18288" bIns="18288" anchor="ctr">
             <a:spAutoFit/>
           </a:bodyPr>
           <a:lstStyle/>
@@ -9746,7 +9955,7 @@
           <a:noFill/>
         </p:spPr>
         <p:txBody>
-          <a:bodyPr wrap="square" lIns="45720" tIns="18288" rIns="45720" bIns="18288" anchor="ctr">
+          <a:bodyPr wrap="square" lIns="45720" rIns="45720" tIns="18288" bIns="18288" anchor="ctr">
             <a:spAutoFit/>
           </a:bodyPr>
           <a:lstStyle/>
@@ -9785,7 +9994,7 @@
           <a:noFill/>
         </p:spPr>
         <p:txBody>
-          <a:bodyPr wrap="square" lIns="45720" tIns="18288" rIns="45720" bIns="18288" anchor="ctr">
+          <a:bodyPr wrap="square" lIns="45720" rIns="45720" tIns="18288" bIns="18288" anchor="ctr">
             <a:spAutoFit/>
           </a:bodyPr>
           <a:lstStyle/>
@@ -9824,7 +10033,7 @@
           <a:noFill/>
         </p:spPr>
         <p:txBody>
-          <a:bodyPr wrap="square" lIns="45720" tIns="18288" rIns="45720" bIns="18288" anchor="ctr">
+          <a:bodyPr wrap="square" lIns="45720" rIns="45720" tIns="18288" bIns="18288" anchor="ctr">
             <a:spAutoFit/>
           </a:bodyPr>
           <a:lstStyle/>
@@ -9863,7 +10072,7 @@
           <a:noFill/>
         </p:spPr>
         <p:txBody>
-          <a:bodyPr wrap="square" lIns="45720" tIns="18288" rIns="45720" bIns="18288" anchor="ctr">
+          <a:bodyPr wrap="square" lIns="45720" rIns="45720" tIns="18288" bIns="18288" anchor="ctr">
             <a:spAutoFit/>
           </a:bodyPr>
           <a:lstStyle/>
@@ -9902,7 +10111,7 @@
           <a:noFill/>
         </p:spPr>
         <p:txBody>
-          <a:bodyPr wrap="square" lIns="45720" tIns="18288" rIns="45720" bIns="18288" anchor="ctr">
+          <a:bodyPr wrap="square" lIns="45720" rIns="45720" tIns="18288" bIns="18288" anchor="ctr">
             <a:spAutoFit/>
           </a:bodyPr>
           <a:lstStyle/>
@@ -9941,17 +10150,25 @@
           <a:noFill/>
         </p:spPr>
         <p:txBody>
-          <a:bodyPr wrap="square" lIns="45720" tIns="18288" rIns="45720" bIns="18288" anchor="ctr">
-            <a:spAutoFit/>
-          </a:bodyPr>
-          <a:lstStyle/>
-          <a:p>
-            <a:pPr algn="l">
-              <a:lnSpc>
-                <a:spcPct val="100000"/>
-              </a:lnSpc>
-            </a:pPr>
-            <a:endParaRPr/>
+          <a:bodyPr wrap="square" lIns="45720" rIns="45720" tIns="18288" bIns="18288" anchor="ctr">
+            <a:spAutoFit/>
+          </a:bodyPr>
+          <a:lstStyle/>
+          <a:p>
+            <a:pPr algn="l">
+              <a:lnSpc>
+                <a:spcPct val="100000"/>
+              </a:lnSpc>
+            </a:pPr>
+            <a:r>
+              <a:rPr sz="1150" b="1" i="0">
+                <a:solidFill>
+                  <a:srgbClr val="2E2A27"/>
+                </a:solidFill>
+                <a:latin typeface="Calibri"/>
+              </a:rPr>
+              <a:t/>
+            </a:r>
           </a:p>
         </p:txBody>
       </p:sp>
@@ -9972,7 +10189,7 @@
           <a:noFill/>
         </p:spPr>
         <p:txBody>
-          <a:bodyPr wrap="square" lIns="45720" tIns="18288" rIns="45720" bIns="18288" anchor="ctr">
+          <a:bodyPr wrap="square" lIns="45720" rIns="45720" tIns="18288" bIns="18288" anchor="ctr">
             <a:spAutoFit/>
           </a:bodyPr>
           <a:lstStyle/>
@@ -10011,7 +10228,7 @@
           <a:noFill/>
         </p:spPr>
         <p:txBody>
-          <a:bodyPr wrap="square" lIns="45720" tIns="18288" rIns="45720" bIns="18288" anchor="ctr">
+          <a:bodyPr wrap="square" lIns="45720" rIns="45720" tIns="18288" bIns="18288" anchor="ctr">
             <a:spAutoFit/>
           </a:bodyPr>
           <a:lstStyle/>
@@ -10050,7 +10267,7 @@
           <a:noFill/>
         </p:spPr>
         <p:txBody>
-          <a:bodyPr wrap="square" lIns="45720" tIns="18288" rIns="45720" bIns="18288" anchor="ctr">
+          <a:bodyPr wrap="square" lIns="45720" rIns="45720" tIns="18288" bIns="18288" anchor="ctr">
             <a:spAutoFit/>
           </a:bodyPr>
           <a:lstStyle/>
@@ -10089,7 +10306,7 @@
           <a:noFill/>
         </p:spPr>
         <p:txBody>
-          <a:bodyPr wrap="square" lIns="45720" tIns="18288" rIns="45720" bIns="18288" anchor="ctr">
+          <a:bodyPr wrap="square" lIns="45720" rIns="45720" tIns="18288" bIns="18288" anchor="ctr">
             <a:spAutoFit/>
           </a:bodyPr>
           <a:lstStyle/>
@@ -10128,7 +10345,7 @@
           <a:noFill/>
         </p:spPr>
         <p:txBody>
-          <a:bodyPr wrap="square" lIns="45720" tIns="18288" rIns="45720" bIns="18288" anchor="ctr">
+          <a:bodyPr wrap="square" lIns="45720" rIns="45720" tIns="18288" bIns="18288" anchor="ctr">
             <a:spAutoFit/>
           </a:bodyPr>
           <a:lstStyle/>
@@ -10167,7 +10384,7 @@
           <a:noFill/>
         </p:spPr>
         <p:txBody>
-          <a:bodyPr wrap="square" lIns="45720" tIns="18288" rIns="45720" bIns="18288" anchor="ctr">
+          <a:bodyPr wrap="square" lIns="45720" rIns="45720" tIns="18288" bIns="18288" anchor="ctr">
             <a:spAutoFit/>
           </a:bodyPr>
           <a:lstStyle/>
@@ -10206,7 +10423,7 @@
           <a:noFill/>
         </p:spPr>
         <p:txBody>
-          <a:bodyPr wrap="square" lIns="45720" tIns="18288" rIns="45720" bIns="18288" anchor="t">
+          <a:bodyPr wrap="square" lIns="45720" rIns="45720" tIns="18288" bIns="18288" anchor="t">
             <a:spAutoFit/>
           </a:bodyPr>
           <a:lstStyle/>
@@ -10269,9 +10486,7 @@
         <p:txBody>
           <a:bodyPr rtlCol="0" anchor="ctr"/>
           <a:lstStyle/>
-          <a:p>
-            <a:endParaRPr/>
-          </a:p>
+          <a:p/>
         </p:txBody>
       </p:sp>
       <p:sp>
@@ -10291,7 +10506,7 @@
           <a:noFill/>
         </p:spPr>
         <p:txBody>
-          <a:bodyPr wrap="square" lIns="45720" tIns="18288" rIns="45720" bIns="18288" anchor="t">
+          <a:bodyPr wrap="square" lIns="45720" rIns="45720" tIns="18288" bIns="18288" anchor="t">
             <a:spAutoFit/>
           </a:bodyPr>
           <a:lstStyle/>
@@ -10330,7 +10545,7 @@
           <a:noFill/>
         </p:spPr>
         <p:txBody>
-          <a:bodyPr wrap="square" lIns="45720" tIns="18288" rIns="45720" bIns="18288" anchor="t">
+          <a:bodyPr wrap="square" lIns="45720" rIns="45720" tIns="18288" bIns="18288" anchor="t">
             <a:spAutoFit/>
           </a:bodyPr>
           <a:lstStyle/>
@@ -10393,9 +10608,7 @@
         <p:txBody>
           <a:bodyPr rtlCol="0" anchor="ctr"/>
           <a:lstStyle/>
-          <a:p>
-            <a:endParaRPr/>
-          </a:p>
+          <a:p/>
         </p:txBody>
       </p:sp>
       <p:sp>
@@ -10415,7 +10628,7 @@
           <a:noFill/>
         </p:spPr>
         <p:txBody>
-          <a:bodyPr wrap="square" lIns="45720" tIns="18288" rIns="45720" bIns="18288" anchor="t">
+          <a:bodyPr wrap="square" lIns="45720" rIns="45720" tIns="18288" bIns="18288" anchor="t">
             <a:spAutoFit/>
           </a:bodyPr>
           <a:lstStyle/>
@@ -10454,7 +10667,7 @@
           <a:noFill/>
         </p:spPr>
         <p:txBody>
-          <a:bodyPr wrap="square" lIns="45720" tIns="18288" rIns="45720" bIns="18288" anchor="t">
+          <a:bodyPr wrap="square" lIns="45720" rIns="45720" tIns="18288" bIns="18288" anchor="t">
             <a:spAutoFit/>
           </a:bodyPr>
           <a:lstStyle/>
@@ -10517,9 +10730,7 @@
         <p:txBody>
           <a:bodyPr rtlCol="0" anchor="ctr"/>
           <a:lstStyle/>
-          <a:p>
-            <a:endParaRPr/>
-          </a:p>
+          <a:p/>
         </p:txBody>
       </p:sp>
       <p:sp>
@@ -10539,7 +10750,7 @@
           <a:noFill/>
         </p:spPr>
         <p:txBody>
-          <a:bodyPr wrap="square" lIns="45720" tIns="18288" rIns="45720" bIns="18288" anchor="t">
+          <a:bodyPr wrap="square" lIns="45720" rIns="45720" tIns="18288" bIns="18288" anchor="t">
             <a:spAutoFit/>
           </a:bodyPr>
           <a:lstStyle/>
@@ -10578,7 +10789,7 @@
           <a:noFill/>
         </p:spPr>
         <p:txBody>
-          <a:bodyPr wrap="square" lIns="45720" tIns="18288" rIns="45720" bIns="18288" anchor="t">
+          <a:bodyPr wrap="square" lIns="45720" rIns="45720" tIns="18288" bIns="18288" anchor="t">
             <a:spAutoFit/>
           </a:bodyPr>
           <a:lstStyle/>
@@ -10617,7 +10828,7 @@
           <a:noFill/>
         </p:spPr>
         <p:txBody>
-          <a:bodyPr wrap="square" lIns="45720" tIns="18288" rIns="45720" bIns="18288" anchor="t">
+          <a:bodyPr wrap="square" lIns="45720" rIns="45720" tIns="18288" bIns="18288" anchor="t">
             <a:spAutoFit/>
           </a:bodyPr>
           <a:lstStyle/>
@@ -10648,7 +10859,7 @@
 </file>
 
 <file path=ppt/slides/slide13.xml><?xml version="1.0" encoding="utf-8"?>
-<p:sld xmlns:a="http://schemas.openxmlformats.org/drawingml/2006/main" xmlns:r="http://schemas.openxmlformats.org/officeDocument/2006/relationships" xmlns:p="http://schemas.openxmlformats.org/presentationml/2006/main">
+<p:sld xmlns:a="http://schemas.openxmlformats.org/drawingml/2006/main" xmlns:p="http://schemas.openxmlformats.org/presentationml/2006/main" xmlns:r="http://schemas.openxmlformats.org/officeDocument/2006/relationships">
   <p:cSld>
     <p:spTree>
       <p:nvGrpSpPr>
@@ -10656,14 +10867,7 @@
         <p:cNvGrpSpPr/>
         <p:nvPr/>
       </p:nvGrpSpPr>
-      <p:grpSpPr>
-        <a:xfrm>
-          <a:off x="0" y="0"/>
-          <a:ext cx="0" cy="0"/>
-          <a:chOff x="0" y="0"/>
-          <a:chExt cx="0" cy="0"/>
-        </a:xfrm>
-      </p:grpSpPr>
+      <p:grpSpPr/>
       <p:sp>
         <p:nvSpPr>
           <p:cNvPr id="2" name="Rectangle 1"/>
@@ -10703,9 +10907,7 @@
         <p:txBody>
           <a:bodyPr rtlCol="0" anchor="ctr"/>
           <a:lstStyle/>
-          <a:p>
-            <a:endParaRPr/>
-          </a:p>
+          <a:p/>
         </p:txBody>
       </p:sp>
       <p:sp>
@@ -10725,7 +10927,7 @@
           <a:noFill/>
         </p:spPr>
         <p:txBody>
-          <a:bodyPr wrap="square" lIns="45720" tIns="18288" rIns="45720" bIns="18288" anchor="t">
+          <a:bodyPr wrap="square" lIns="45720" rIns="45720" tIns="18288" bIns="18288" anchor="t">
             <a:spAutoFit/>
           </a:bodyPr>
           <a:lstStyle/>
@@ -10764,7 +10966,7 @@
           <a:noFill/>
         </p:spPr>
         <p:txBody>
-          <a:bodyPr wrap="square" lIns="45720" tIns="18288" rIns="45720" bIns="18288" anchor="t">
+          <a:bodyPr wrap="square" lIns="45720" rIns="45720" tIns="18288" bIns="18288" anchor="t">
             <a:spAutoFit/>
           </a:bodyPr>
           <a:lstStyle/>
@@ -10823,11 +11025,10 @@
           </a:fontRef>
         </p:style>
         <p:txBody>
-          <a:bodyPr lIns="0" tIns="0" rIns="0" bIns="0" rtlCol="0" anchor="ctr"/>
+          <a:bodyPr rtlCol="0" anchor="ctr" lIns="0" rIns="0" tIns="0" bIns="0"/>
           <a:lstStyle/>
           <a:p>
             <a:pPr algn="ctr"/>
-            <a:endParaRPr/>
           </a:p>
         </p:txBody>
       </p:sp>
@@ -10848,7 +11049,7 @@
           <a:noFill/>
         </p:spPr>
         <p:txBody>
-          <a:bodyPr wrap="square" lIns="45720" tIns="18288" rIns="45720" bIns="18288" anchor="t">
+          <a:bodyPr wrap="square" lIns="45720" rIns="45720" tIns="18288" bIns="18288" anchor="t">
             <a:spAutoFit/>
           </a:bodyPr>
           <a:lstStyle/>
@@ -10887,7 +11088,7 @@
           <a:noFill/>
         </p:spPr>
         <p:txBody>
-          <a:bodyPr wrap="square" lIns="45720" tIns="18288" rIns="45720" bIns="18288" anchor="t">
+          <a:bodyPr wrap="square" lIns="45720" rIns="45720" tIns="18288" bIns="18288" anchor="t">
             <a:spAutoFit/>
           </a:bodyPr>
           <a:lstStyle/>
@@ -10946,11 +11147,10 @@
           </a:fontRef>
         </p:style>
         <p:txBody>
-          <a:bodyPr lIns="0" tIns="0" rIns="0" bIns="0" rtlCol="0" anchor="ctr"/>
+          <a:bodyPr rtlCol="0" anchor="ctr" lIns="0" rIns="0" tIns="0" bIns="0"/>
           <a:lstStyle/>
           <a:p>
             <a:pPr algn="ctr"/>
-            <a:endParaRPr/>
           </a:p>
         </p:txBody>
       </p:sp>
@@ -10971,7 +11171,7 @@
           <a:noFill/>
         </p:spPr>
         <p:txBody>
-          <a:bodyPr wrap="square" lIns="45720" tIns="18288" rIns="45720" bIns="18288" anchor="t">
+          <a:bodyPr wrap="square" lIns="45720" rIns="45720" tIns="18288" bIns="18288" anchor="t">
             <a:spAutoFit/>
           </a:bodyPr>
           <a:lstStyle/>
@@ -11010,7 +11210,7 @@
           <a:noFill/>
         </p:spPr>
         <p:txBody>
-          <a:bodyPr wrap="square" lIns="45720" tIns="18288" rIns="45720" bIns="18288" anchor="t">
+          <a:bodyPr wrap="square" lIns="45720" rIns="45720" tIns="18288" bIns="18288" anchor="t">
             <a:spAutoFit/>
           </a:bodyPr>
           <a:lstStyle/>
@@ -11069,11 +11269,10 @@
           </a:fontRef>
         </p:style>
         <p:txBody>
-          <a:bodyPr lIns="0" tIns="0" rIns="0" bIns="0" rtlCol="0" anchor="ctr"/>
+          <a:bodyPr rtlCol="0" anchor="ctr" lIns="0" rIns="0" tIns="0" bIns="0"/>
           <a:lstStyle/>
           <a:p>
             <a:pPr algn="ctr"/>
-            <a:endParaRPr/>
           </a:p>
         </p:txBody>
       </p:sp>
@@ -11094,7 +11293,7 @@
           <a:noFill/>
         </p:spPr>
         <p:txBody>
-          <a:bodyPr wrap="square" lIns="45720" tIns="18288" rIns="45720" bIns="18288" anchor="t">
+          <a:bodyPr wrap="square" lIns="45720" rIns="45720" tIns="18288" bIns="18288" anchor="t">
             <a:spAutoFit/>
           </a:bodyPr>
           <a:lstStyle/>
@@ -11133,7 +11332,7 @@
           <a:noFill/>
         </p:spPr>
         <p:txBody>
-          <a:bodyPr wrap="square" lIns="45720" tIns="18288" rIns="45720" bIns="18288" anchor="t">
+          <a:bodyPr wrap="square" lIns="45720" rIns="45720" tIns="18288" bIns="18288" anchor="t">
             <a:spAutoFit/>
           </a:bodyPr>
           <a:lstStyle/>
@@ -11192,11 +11391,10 @@
           </a:fontRef>
         </p:style>
         <p:txBody>
-          <a:bodyPr lIns="0" tIns="0" rIns="0" bIns="0" rtlCol="0" anchor="ctr"/>
+          <a:bodyPr rtlCol="0" anchor="ctr" lIns="0" rIns="0" tIns="0" bIns="0"/>
           <a:lstStyle/>
           <a:p>
             <a:pPr algn="ctr"/>
-            <a:endParaRPr/>
           </a:p>
         </p:txBody>
       </p:sp>
@@ -11217,7 +11415,7 @@
           <a:noFill/>
         </p:spPr>
         <p:txBody>
-          <a:bodyPr wrap="square" lIns="45720" tIns="18288" rIns="45720" bIns="18288" anchor="t">
+          <a:bodyPr wrap="square" lIns="45720" rIns="45720" tIns="18288" bIns="18288" anchor="t">
             <a:spAutoFit/>
           </a:bodyPr>
           <a:lstStyle/>
@@ -11256,7 +11454,7 @@
           <a:noFill/>
         </p:spPr>
         <p:txBody>
-          <a:bodyPr wrap="square" lIns="45720" tIns="18288" rIns="45720" bIns="18288" anchor="t">
+          <a:bodyPr wrap="square" lIns="45720" rIns="45720" tIns="18288" bIns="18288" anchor="t">
             <a:spAutoFit/>
           </a:bodyPr>
           <a:lstStyle/>
@@ -11295,7 +11493,7 @@
           <a:noFill/>
         </p:spPr>
         <p:txBody>
-          <a:bodyPr wrap="square" lIns="45720" tIns="18288" rIns="45720" bIns="18288" anchor="t">
+          <a:bodyPr wrap="square" lIns="45720" rIns="45720" tIns="18288" bIns="18288" anchor="t">
             <a:spAutoFit/>
           </a:bodyPr>
           <a:lstStyle/>
@@ -11354,11 +11552,10 @@
           </a:fontRef>
         </p:style>
         <p:txBody>
-          <a:bodyPr lIns="0" tIns="0" rIns="0" bIns="0" rtlCol="0" anchor="ctr"/>
+          <a:bodyPr rtlCol="0" anchor="ctr" lIns="0" rIns="0" tIns="0" bIns="0"/>
           <a:lstStyle/>
           <a:p>
             <a:pPr algn="ctr"/>
-            <a:endParaRPr/>
           </a:p>
         </p:txBody>
       </p:sp>
@@ -11379,7 +11576,7 @@
           <a:noFill/>
         </p:spPr>
         <p:txBody>
-          <a:bodyPr wrap="square" lIns="45720" tIns="18288" rIns="45720" bIns="18288" anchor="t">
+          <a:bodyPr wrap="square" lIns="45720" rIns="45720" tIns="18288" bIns="18288" anchor="t">
             <a:spAutoFit/>
           </a:bodyPr>
           <a:lstStyle/>
@@ -11418,7 +11615,7 @@
           <a:noFill/>
         </p:spPr>
         <p:txBody>
-          <a:bodyPr wrap="square" lIns="45720" tIns="18288" rIns="45720" bIns="18288" anchor="t">
+          <a:bodyPr wrap="square" lIns="45720" rIns="45720" tIns="18288" bIns="18288" anchor="t">
             <a:spAutoFit/>
           </a:bodyPr>
           <a:lstStyle/>
@@ -11477,11 +11674,10 @@
           </a:fontRef>
         </p:style>
         <p:txBody>
-          <a:bodyPr lIns="0" tIns="0" rIns="0" bIns="0" rtlCol="0" anchor="ctr"/>
+          <a:bodyPr rtlCol="0" anchor="ctr" lIns="0" rIns="0" tIns="0" bIns="0"/>
           <a:lstStyle/>
           <a:p>
             <a:pPr algn="ctr"/>
-            <a:endParaRPr/>
           </a:p>
         </p:txBody>
       </p:sp>
@@ -11502,7 +11698,7 @@
           <a:noFill/>
         </p:spPr>
         <p:txBody>
-          <a:bodyPr wrap="square" lIns="45720" tIns="18288" rIns="45720" bIns="18288" anchor="t">
+          <a:bodyPr wrap="square" lIns="45720" rIns="45720" tIns="18288" bIns="18288" anchor="t">
             <a:spAutoFit/>
           </a:bodyPr>
           <a:lstStyle/>
@@ -11541,7 +11737,7 @@
           <a:noFill/>
         </p:spPr>
         <p:txBody>
-          <a:bodyPr wrap="square" lIns="45720" tIns="18288" rIns="45720" bIns="18288" anchor="t">
+          <a:bodyPr wrap="square" lIns="45720" rIns="45720" tIns="18288" bIns="18288" anchor="t">
             <a:spAutoFit/>
           </a:bodyPr>
           <a:lstStyle/>
@@ -11600,11 +11796,10 @@
           </a:fontRef>
         </p:style>
         <p:txBody>
-          <a:bodyPr lIns="0" tIns="0" rIns="0" bIns="0" rtlCol="0" anchor="ctr"/>
+          <a:bodyPr rtlCol="0" anchor="ctr" lIns="0" rIns="0" tIns="0" bIns="0"/>
           <a:lstStyle/>
           <a:p>
             <a:pPr algn="ctr"/>
-            <a:endParaRPr/>
           </a:p>
         </p:txBody>
       </p:sp>
@@ -11625,7 +11820,7 @@
           <a:noFill/>
         </p:spPr>
         <p:txBody>
-          <a:bodyPr wrap="square" lIns="45720" tIns="18288" rIns="45720" bIns="18288" anchor="t">
+          <a:bodyPr wrap="square" lIns="45720" rIns="45720" tIns="18288" bIns="18288" anchor="t">
             <a:spAutoFit/>
           </a:bodyPr>
           <a:lstStyle/>
@@ -11664,7 +11859,7 @@
           <a:noFill/>
         </p:spPr>
         <p:txBody>
-          <a:bodyPr wrap="square" lIns="45720" tIns="18288" rIns="45720" bIns="18288" anchor="t">
+          <a:bodyPr wrap="square" lIns="45720" rIns="45720" tIns="18288" bIns="18288" anchor="t">
             <a:spAutoFit/>
           </a:bodyPr>
           <a:lstStyle/>
@@ -11723,11 +11918,10 @@
           </a:fontRef>
         </p:style>
         <p:txBody>
-          <a:bodyPr lIns="0" tIns="0" rIns="0" bIns="0" rtlCol="0" anchor="ctr"/>
+          <a:bodyPr rtlCol="0" anchor="ctr" lIns="0" rIns="0" tIns="0" bIns="0"/>
           <a:lstStyle/>
           <a:p>
             <a:pPr algn="ctr"/>
-            <a:endParaRPr/>
           </a:p>
         </p:txBody>
       </p:sp>
@@ -11748,7 +11942,7 @@
           <a:noFill/>
         </p:spPr>
         <p:txBody>
-          <a:bodyPr wrap="square" lIns="45720" tIns="18288" rIns="45720" bIns="18288" anchor="t">
+          <a:bodyPr wrap="square" lIns="45720" rIns="45720" tIns="18288" bIns="18288" anchor="t">
             <a:spAutoFit/>
           </a:bodyPr>
           <a:lstStyle/>
@@ -11787,7 +11981,7 @@
           <a:noFill/>
         </p:spPr>
         <p:txBody>
-          <a:bodyPr wrap="square" lIns="45720" tIns="18288" rIns="45720" bIns="18288" anchor="t">
+          <a:bodyPr wrap="square" lIns="45720" rIns="45720" tIns="18288" bIns="18288" anchor="t">
             <a:spAutoFit/>
           </a:bodyPr>
           <a:lstStyle/>
@@ -11848,9 +12042,7 @@
         <p:txBody>
           <a:bodyPr rtlCol="0" anchor="ctr"/>
           <a:lstStyle/>
-          <a:p>
-            <a:endParaRPr/>
-          </a:p>
+          <a:p/>
         </p:txBody>
       </p:sp>
       <p:sp>
@@ -11870,7 +12062,7 @@
           <a:noFill/>
         </p:spPr>
         <p:txBody>
-          <a:bodyPr wrap="square" lIns="45720" tIns="18288" rIns="45720" bIns="18288" anchor="t">
+          <a:bodyPr wrap="square" lIns="45720" rIns="45720" tIns="18288" bIns="18288" anchor="t">
             <a:spAutoFit/>
           </a:bodyPr>
           <a:lstStyle/>
@@ -11901,7 +12093,7 @@
 </file>
 
 <file path=ppt/slides/slide14.xml><?xml version="1.0" encoding="utf-8"?>
-<p:sld xmlns:a="http://schemas.openxmlformats.org/drawingml/2006/main" xmlns:r="http://schemas.openxmlformats.org/officeDocument/2006/relationships" xmlns:p="http://schemas.openxmlformats.org/presentationml/2006/main">
+<p:sld xmlns:a="http://schemas.openxmlformats.org/drawingml/2006/main" xmlns:p="http://schemas.openxmlformats.org/presentationml/2006/main" xmlns:r="http://schemas.openxmlformats.org/officeDocument/2006/relationships">
   <p:cSld>
     <p:spTree>
       <p:nvGrpSpPr>
@@ -11909,14 +12101,7 @@
         <p:cNvGrpSpPr/>
         <p:nvPr/>
       </p:nvGrpSpPr>
-      <p:grpSpPr>
-        <a:xfrm>
-          <a:off x="0" y="0"/>
-          <a:ext cx="0" cy="0"/>
-          <a:chOff x="0" y="0"/>
-          <a:chExt cx="0" cy="0"/>
-        </a:xfrm>
-      </p:grpSpPr>
+      <p:grpSpPr/>
       <p:sp>
         <p:nvSpPr>
           <p:cNvPr id="2" name="TextBox 1"/>
@@ -11934,7 +12119,7 @@
           <a:noFill/>
         </p:spPr>
         <p:txBody>
-          <a:bodyPr wrap="square" lIns="45720" tIns="18288" rIns="45720" bIns="18288" anchor="t">
+          <a:bodyPr wrap="square" lIns="45720" rIns="45720" tIns="18288" bIns="18288" anchor="t">
             <a:spAutoFit/>
           </a:bodyPr>
           <a:lstStyle/>
@@ -11973,7 +12158,7 @@
           <a:noFill/>
         </p:spPr>
         <p:txBody>
-          <a:bodyPr wrap="square" lIns="45720" tIns="18288" rIns="45720" bIns="18288" anchor="t">
+          <a:bodyPr wrap="square" lIns="45720" rIns="45720" tIns="18288" bIns="18288" anchor="t">
             <a:spAutoFit/>
           </a:bodyPr>
           <a:lstStyle/>
@@ -12032,7 +12217,7 @@
           </a:fontRef>
         </p:style>
         <p:txBody>
-          <a:bodyPr lIns="0" tIns="0" rIns="0" bIns="0" rtlCol="0" anchor="ctr"/>
+          <a:bodyPr rtlCol="0" anchor="ctr" lIns="0" rIns="0" tIns="0" bIns="0"/>
           <a:lstStyle/>
           <a:p>
             <a:pPr algn="ctr"/>
@@ -12065,7 +12250,7 @@
           <a:noFill/>
         </p:spPr>
         <p:txBody>
-          <a:bodyPr wrap="square" lIns="45720" tIns="18288" rIns="45720" bIns="18288" anchor="t">
+          <a:bodyPr wrap="square" lIns="45720" rIns="45720" tIns="18288" bIns="18288" anchor="t">
             <a:spAutoFit/>
           </a:bodyPr>
           <a:lstStyle/>
@@ -12104,7 +12289,7 @@
           <a:noFill/>
         </p:spPr>
         <p:txBody>
-          <a:bodyPr wrap="square" lIns="45720" tIns="18288" rIns="45720" bIns="18288" anchor="t">
+          <a:bodyPr wrap="square" lIns="45720" rIns="45720" tIns="18288" bIns="18288" anchor="t">
             <a:spAutoFit/>
           </a:bodyPr>
           <a:lstStyle/>
@@ -12163,7 +12348,7 @@
           </a:fontRef>
         </p:style>
         <p:txBody>
-          <a:bodyPr lIns="0" tIns="0" rIns="0" bIns="0" rtlCol="0" anchor="ctr"/>
+          <a:bodyPr rtlCol="0" anchor="ctr" lIns="0" rIns="0" tIns="0" bIns="0"/>
           <a:lstStyle/>
           <a:p>
             <a:pPr algn="ctr"/>
@@ -12196,7 +12381,7 @@
           <a:noFill/>
         </p:spPr>
         <p:txBody>
-          <a:bodyPr wrap="square" lIns="45720" tIns="18288" rIns="45720" bIns="18288" anchor="t">
+          <a:bodyPr wrap="square" lIns="45720" rIns="45720" tIns="18288" bIns="18288" anchor="t">
             <a:spAutoFit/>
           </a:bodyPr>
           <a:lstStyle/>
@@ -12213,7 +12398,7 @@
                 </a:solidFill>
                 <a:latin typeface="Calibri"/>
               </a:rPr>
-              <a:t>Merge --bowtie2-recheck into main</a:t>
+              <a:t>Run the Kraken2 index ablation</a:t>
             </a:r>
           </a:p>
         </p:txBody>
@@ -12235,7 +12420,7 @@
           <a:noFill/>
         </p:spPr>
         <p:txBody>
-          <a:bodyPr wrap="square" lIns="45720" tIns="18288" rIns="45720" bIns="18288" anchor="t">
+          <a:bodyPr wrap="square" lIns="45720" rIns="45720" tIns="18288" bIns="18288" anchor="t">
             <a:spAutoFit/>
           </a:bodyPr>
           <a:lstStyle/>
@@ -12252,7 +12437,7 @@
                 </a:solidFill>
                 <a:latin typeface="Calibri"/>
               </a:rPr>
-              <a:t>The default method in every result above ships only on a branch. Merge it, or state the branch explicitly wherever results are reported.</a:t>
+              <a:t>Every committed result used kraken16, a mixed database, not the human-only index the manuscript describes. benchmark_k2_index_ablation.sh measures how much of the 1.41% host carry-over is the index rather than the method.</a:t>
             </a:r>
           </a:p>
         </p:txBody>
@@ -12294,7 +12479,7 @@
           </a:fontRef>
         </p:style>
         <p:txBody>
-          <a:bodyPr lIns="0" tIns="0" rIns="0" bIns="0" rtlCol="0" anchor="ctr"/>
+          <a:bodyPr rtlCol="0" anchor="ctr" lIns="0" rIns="0" tIns="0" bIns="0"/>
           <a:lstStyle/>
           <a:p>
             <a:pPr algn="ctr"/>
@@ -12327,7 +12512,7 @@
           <a:noFill/>
         </p:spPr>
         <p:txBody>
-          <a:bodyPr wrap="square" lIns="45720" tIns="18288" rIns="45720" bIns="18288" anchor="t">
+          <a:bodyPr wrap="square" lIns="45720" rIns="45720" tIns="18288" bIns="18288" anchor="t">
             <a:spAutoFit/>
           </a:bodyPr>
           <a:lstStyle/>
@@ -12366,7 +12551,7 @@
           <a:noFill/>
         </p:spPr>
         <p:txBody>
-          <a:bodyPr wrap="square" lIns="45720" tIns="18288" rIns="45720" bIns="18288" anchor="t">
+          <a:bodyPr wrap="square" lIns="45720" rIns="45720" tIns="18288" bIns="18288" anchor="t">
             <a:spAutoFit/>
           </a:bodyPr>
           <a:lstStyle/>
@@ -12425,7 +12610,7 @@
           </a:fontRef>
         </p:style>
         <p:txBody>
-          <a:bodyPr lIns="0" tIns="0" rIns="0" bIns="0" rtlCol="0" anchor="ctr"/>
+          <a:bodyPr rtlCol="0" anchor="ctr" lIns="0" rIns="0" tIns="0" bIns="0"/>
           <a:lstStyle/>
           <a:p>
             <a:pPr algn="ctr"/>
@@ -12458,7 +12643,7 @@
           <a:noFill/>
         </p:spPr>
         <p:txBody>
-          <a:bodyPr wrap="square" lIns="45720" tIns="18288" rIns="45720" bIns="18288" anchor="t">
+          <a:bodyPr wrap="square" lIns="45720" rIns="45720" tIns="18288" bIns="18288" anchor="t">
             <a:spAutoFit/>
           </a:bodyPr>
           <a:lstStyle/>
@@ -12497,7 +12682,7 @@
           <a:noFill/>
         </p:spPr>
         <p:txBody>
-          <a:bodyPr wrap="square" lIns="45720" tIns="18288" rIns="45720" bIns="18288" anchor="t">
+          <a:bodyPr wrap="square" lIns="45720" rIns="45720" tIns="18288" bIns="18288" anchor="t">
             <a:spAutoFit/>
           </a:bodyPr>
           <a:lstStyle/>
@@ -12556,7 +12741,7 @@
           </a:fontRef>
         </p:style>
         <p:txBody>
-          <a:bodyPr lIns="0" tIns="0" rIns="0" bIns="0" rtlCol="0" anchor="ctr"/>
+          <a:bodyPr rtlCol="0" anchor="ctr" lIns="0" rIns="0" tIns="0" bIns="0"/>
           <a:lstStyle/>
           <a:p>
             <a:pPr algn="ctr"/>
@@ -12589,7 +12774,7 @@
           <a:noFill/>
         </p:spPr>
         <p:txBody>
-          <a:bodyPr wrap="square" lIns="45720" tIns="18288" rIns="45720" bIns="18288" anchor="t">
+          <a:bodyPr wrap="square" lIns="45720" rIns="45720" tIns="18288" bIns="18288" anchor="t">
             <a:spAutoFit/>
           </a:bodyPr>
           <a:lstStyle/>
@@ -12628,7 +12813,7 @@
           <a:noFill/>
         </p:spPr>
         <p:txBody>
-          <a:bodyPr wrap="square" lIns="45720" tIns="18288" rIns="45720" bIns="18288" anchor="t">
+          <a:bodyPr wrap="square" lIns="45720" rIns="45720" tIns="18288" bIns="18288" anchor="t">
             <a:spAutoFit/>
           </a:bodyPr>
           <a:lstStyle/>
@@ -12691,9 +12876,7 @@
         <p:txBody>
           <a:bodyPr rtlCol="0" anchor="ctr"/>
           <a:lstStyle/>
-          <a:p>
-            <a:endParaRPr/>
-          </a:p>
+          <a:p/>
         </p:txBody>
       </p:sp>
       <p:sp>
@@ -12713,7 +12896,7 @@
           <a:noFill/>
         </p:spPr>
         <p:txBody>
-          <a:bodyPr wrap="square" lIns="45720" tIns="18288" rIns="45720" bIns="18288" anchor="t">
+          <a:bodyPr wrap="square" lIns="45720" rIns="45720" tIns="18288" bIns="18288" anchor="t">
             <a:spAutoFit/>
           </a:bodyPr>
           <a:lstStyle/>
@@ -12744,7 +12927,7 @@
 </file>
 
 <file path=ppt/slides/slide2.xml><?xml version="1.0" encoding="utf-8"?>
-<p:sld xmlns:a="http://schemas.openxmlformats.org/drawingml/2006/main" xmlns:r="http://schemas.openxmlformats.org/officeDocument/2006/relationships" xmlns:p="http://schemas.openxmlformats.org/presentationml/2006/main">
+<p:sld xmlns:a="http://schemas.openxmlformats.org/drawingml/2006/main" xmlns:p="http://schemas.openxmlformats.org/presentationml/2006/main" xmlns:r="http://schemas.openxmlformats.org/officeDocument/2006/relationships">
   <p:cSld>
     <p:spTree>
       <p:nvGrpSpPr>
@@ -12752,14 +12935,7 @@
         <p:cNvGrpSpPr/>
         <p:nvPr/>
       </p:nvGrpSpPr>
-      <p:grpSpPr>
-        <a:xfrm>
-          <a:off x="0" y="0"/>
-          <a:ext cx="0" cy="0"/>
-          <a:chOff x="0" y="0"/>
-          <a:chExt cx="0" cy="0"/>
-        </a:xfrm>
-      </p:grpSpPr>
+      <p:grpSpPr/>
       <p:sp>
         <p:nvSpPr>
           <p:cNvPr id="2" name="TextBox 1"/>
@@ -12777,7 +12953,7 @@
           <a:noFill/>
         </p:spPr>
         <p:txBody>
-          <a:bodyPr wrap="square" lIns="45720" tIns="18288" rIns="45720" bIns="18288" anchor="t">
+          <a:bodyPr wrap="square" lIns="45720" rIns="45720" tIns="18288" bIns="18288" anchor="t">
             <a:spAutoFit/>
           </a:bodyPr>
           <a:lstStyle/>
@@ -12816,7 +12992,7 @@
           <a:noFill/>
         </p:spPr>
         <p:txBody>
-          <a:bodyPr wrap="square" lIns="45720" tIns="18288" rIns="45720" bIns="18288" anchor="t">
+          <a:bodyPr wrap="square" lIns="45720" rIns="45720" tIns="18288" bIns="18288" anchor="t">
             <a:spAutoFit/>
           </a:bodyPr>
           <a:lstStyle/>
@@ -12879,9 +13055,7 @@
         <p:txBody>
           <a:bodyPr rtlCol="0" anchor="ctr"/>
           <a:lstStyle/>
-          <a:p>
-            <a:endParaRPr/>
-          </a:p>
+          <a:p/>
         </p:txBody>
       </p:sp>
       <p:sp>
@@ -12901,7 +13075,7 @@
           <a:noFill/>
         </p:spPr>
         <p:txBody>
-          <a:bodyPr wrap="square" lIns="45720" tIns="18288" rIns="45720" bIns="18288" anchor="t">
+          <a:bodyPr wrap="square" lIns="45720" rIns="45720" tIns="18288" bIns="18288" anchor="t">
             <a:spAutoFit/>
           </a:bodyPr>
           <a:lstStyle/>
@@ -12940,7 +13114,7 @@
           <a:noFill/>
         </p:spPr>
         <p:txBody>
-          <a:bodyPr wrap="square" lIns="45720" tIns="18288" rIns="45720" bIns="18288" anchor="t">
+          <a:bodyPr wrap="square" lIns="45720" rIns="45720" tIns="18288" bIns="18288" anchor="t">
             <a:spAutoFit/>
           </a:bodyPr>
           <a:lstStyle/>
@@ -12979,7 +13153,7 @@
           <a:noFill/>
         </p:spPr>
         <p:txBody>
-          <a:bodyPr wrap="square" lIns="45720" tIns="18288" rIns="45720" bIns="18288" anchor="ctr">
+          <a:bodyPr wrap="square" lIns="45720" rIns="45720" tIns="18288" bIns="18288" anchor="ctr">
             <a:spAutoFit/>
           </a:bodyPr>
           <a:lstStyle/>
@@ -13018,7 +13192,7 @@
           <a:noFill/>
         </p:spPr>
         <p:txBody>
-          <a:bodyPr wrap="square" lIns="45720" tIns="18288" rIns="45720" bIns="18288" anchor="ctr">
+          <a:bodyPr wrap="square" lIns="45720" rIns="45720" tIns="18288" bIns="18288" anchor="ctr">
             <a:spAutoFit/>
           </a:bodyPr>
           <a:lstStyle/>
@@ -13081,9 +13255,7 @@
         <p:txBody>
           <a:bodyPr rtlCol="0" anchor="ctr"/>
           <a:lstStyle/>
-          <a:p>
-            <a:endParaRPr/>
-          </a:p>
+          <a:p/>
         </p:txBody>
       </p:sp>
       <p:sp>
@@ -13103,7 +13275,7 @@
           <a:noFill/>
         </p:spPr>
         <p:txBody>
-          <a:bodyPr wrap="square" lIns="45720" tIns="18288" rIns="45720" bIns="18288" anchor="t">
+          <a:bodyPr wrap="square" lIns="45720" rIns="45720" tIns="18288" bIns="18288" anchor="t">
             <a:spAutoFit/>
           </a:bodyPr>
           <a:lstStyle/>
@@ -13142,7 +13314,7 @@
           <a:noFill/>
         </p:spPr>
         <p:txBody>
-          <a:bodyPr wrap="square" lIns="45720" tIns="18288" rIns="45720" bIns="18288" anchor="t">
+          <a:bodyPr wrap="square" lIns="45720" rIns="45720" tIns="18288" bIns="18288" anchor="t">
             <a:spAutoFit/>
           </a:bodyPr>
           <a:lstStyle/>
@@ -13181,7 +13353,7 @@
           <a:noFill/>
         </p:spPr>
         <p:txBody>
-          <a:bodyPr wrap="square" lIns="45720" tIns="18288" rIns="45720" bIns="18288" anchor="ctr">
+          <a:bodyPr wrap="square" lIns="45720" rIns="45720" tIns="18288" bIns="18288" anchor="ctr">
             <a:spAutoFit/>
           </a:bodyPr>
           <a:lstStyle/>
@@ -13220,7 +13392,7 @@
           <a:noFill/>
         </p:spPr>
         <p:txBody>
-          <a:bodyPr wrap="square" lIns="45720" tIns="18288" rIns="45720" bIns="18288" anchor="ctr">
+          <a:bodyPr wrap="square" lIns="45720" rIns="45720" tIns="18288" bIns="18288" anchor="ctr">
             <a:spAutoFit/>
           </a:bodyPr>
           <a:lstStyle/>
@@ -13283,9 +13455,7 @@
         <p:txBody>
           <a:bodyPr rtlCol="0" anchor="ctr"/>
           <a:lstStyle/>
-          <a:p>
-            <a:endParaRPr/>
-          </a:p>
+          <a:p/>
         </p:txBody>
       </p:sp>
       <p:sp>
@@ -13305,7 +13475,7 @@
           <a:noFill/>
         </p:spPr>
         <p:txBody>
-          <a:bodyPr wrap="square" lIns="45720" tIns="18288" rIns="45720" bIns="18288" anchor="t">
+          <a:bodyPr wrap="square" lIns="45720" rIns="45720" tIns="18288" bIns="18288" anchor="t">
             <a:spAutoFit/>
           </a:bodyPr>
           <a:lstStyle/>
@@ -13344,7 +13514,7 @@
           <a:noFill/>
         </p:spPr>
         <p:txBody>
-          <a:bodyPr wrap="square" lIns="45720" tIns="18288" rIns="45720" bIns="18288" anchor="t">
+          <a:bodyPr wrap="square" lIns="45720" rIns="45720" tIns="18288" bIns="18288" anchor="t">
             <a:spAutoFit/>
           </a:bodyPr>
           <a:lstStyle/>
@@ -13383,7 +13553,7 @@
           <a:noFill/>
         </p:spPr>
         <p:txBody>
-          <a:bodyPr wrap="square" lIns="45720" tIns="18288" rIns="45720" bIns="18288" anchor="ctr">
+          <a:bodyPr wrap="square" lIns="45720" rIns="45720" tIns="18288" bIns="18288" anchor="ctr">
             <a:spAutoFit/>
           </a:bodyPr>
           <a:lstStyle/>
@@ -13422,7 +13592,7 @@
           <a:noFill/>
         </p:spPr>
         <p:txBody>
-          <a:bodyPr wrap="square" lIns="45720" tIns="18288" rIns="45720" bIns="18288" anchor="ctr">
+          <a:bodyPr wrap="square" lIns="45720" rIns="45720" tIns="18288" bIns="18288" anchor="ctr">
             <a:spAutoFit/>
           </a:bodyPr>
           <a:lstStyle/>
@@ -13485,9 +13655,7 @@
         <p:txBody>
           <a:bodyPr rtlCol="0" anchor="ctr"/>
           <a:lstStyle/>
-          <a:p>
-            <a:endParaRPr/>
-          </a:p>
+          <a:p/>
         </p:txBody>
       </p:sp>
       <p:sp>
@@ -13507,7 +13675,7 @@
           <a:noFill/>
         </p:spPr>
         <p:txBody>
-          <a:bodyPr wrap="square" lIns="45720" tIns="18288" rIns="45720" bIns="18288" anchor="t">
+          <a:bodyPr wrap="square" lIns="45720" rIns="45720" tIns="18288" bIns="18288" anchor="t">
             <a:spAutoFit/>
           </a:bodyPr>
           <a:lstStyle/>
@@ -13546,7 +13714,7 @@
           <a:noFill/>
         </p:spPr>
         <p:txBody>
-          <a:bodyPr wrap="square" lIns="45720" tIns="18288" rIns="45720" bIns="18288" anchor="t">
+          <a:bodyPr wrap="square" lIns="45720" rIns="45720" tIns="18288" bIns="18288" anchor="t">
             <a:spAutoFit/>
           </a:bodyPr>
           <a:lstStyle/>
@@ -13585,7 +13753,7 @@
           <a:noFill/>
         </p:spPr>
         <p:txBody>
-          <a:bodyPr wrap="square" lIns="45720" tIns="18288" rIns="45720" bIns="18288" anchor="ctr">
+          <a:bodyPr wrap="square" lIns="45720" rIns="45720" tIns="18288" bIns="18288" anchor="ctr">
             <a:spAutoFit/>
           </a:bodyPr>
           <a:lstStyle/>
@@ -13624,7 +13792,7 @@
           <a:noFill/>
         </p:spPr>
         <p:txBody>
-          <a:bodyPr wrap="square" lIns="45720" tIns="18288" rIns="45720" bIns="18288" anchor="ctr">
+          <a:bodyPr wrap="square" lIns="45720" rIns="45720" tIns="18288" bIns="18288" anchor="ctr">
             <a:spAutoFit/>
           </a:bodyPr>
           <a:lstStyle/>
@@ -13687,9 +13855,7 @@
         <p:txBody>
           <a:bodyPr rtlCol="0" anchor="ctr"/>
           <a:lstStyle/>
-          <a:p>
-            <a:endParaRPr/>
-          </a:p>
+          <a:p/>
         </p:txBody>
       </p:sp>
       <p:sp>
@@ -13709,7 +13875,7 @@
           <a:noFill/>
         </p:spPr>
         <p:txBody>
-          <a:bodyPr wrap="square" lIns="45720" tIns="18288" rIns="45720" bIns="18288" anchor="t">
+          <a:bodyPr wrap="square" lIns="45720" rIns="45720" tIns="18288" bIns="18288" anchor="t">
             <a:spAutoFit/>
           </a:bodyPr>
           <a:lstStyle/>
@@ -13748,7 +13914,7 @@
           <a:noFill/>
         </p:spPr>
         <p:txBody>
-          <a:bodyPr wrap="square" lIns="45720" tIns="18288" rIns="45720" bIns="18288" anchor="t">
+          <a:bodyPr wrap="square" lIns="45720" rIns="45720" tIns="18288" bIns="18288" anchor="t">
             <a:spAutoFit/>
           </a:bodyPr>
           <a:lstStyle/>
@@ -13787,7 +13953,7 @@
           <a:noFill/>
         </p:spPr>
         <p:txBody>
-          <a:bodyPr wrap="square" lIns="45720" tIns="18288" rIns="45720" bIns="18288" anchor="ctr">
+          <a:bodyPr wrap="square" lIns="45720" rIns="45720" tIns="18288" bIns="18288" anchor="ctr">
             <a:spAutoFit/>
           </a:bodyPr>
           <a:lstStyle/>
@@ -13848,9 +14014,7 @@
         <p:txBody>
           <a:bodyPr rtlCol="0" anchor="ctr"/>
           <a:lstStyle/>
-          <a:p>
-            <a:endParaRPr/>
-          </a:p>
+          <a:p/>
         </p:txBody>
       </p:sp>
       <p:sp>
@@ -13870,7 +14034,7 @@
           <a:noFill/>
         </p:spPr>
         <p:txBody>
-          <a:bodyPr wrap="square" lIns="45720" tIns="18288" rIns="45720" bIns="18288" anchor="t">
+          <a:bodyPr wrap="square" lIns="45720" rIns="45720" tIns="18288" bIns="18288" anchor="t">
             <a:spAutoFit/>
           </a:bodyPr>
           <a:lstStyle/>
@@ -13901,7 +14065,7 @@
 </file>
 
 <file path=ppt/slides/slide3.xml><?xml version="1.0" encoding="utf-8"?>
-<p:sld xmlns:a="http://schemas.openxmlformats.org/drawingml/2006/main" xmlns:r="http://schemas.openxmlformats.org/officeDocument/2006/relationships" xmlns:p="http://schemas.openxmlformats.org/presentationml/2006/main">
+<p:sld xmlns:a="http://schemas.openxmlformats.org/drawingml/2006/main" xmlns:p="http://schemas.openxmlformats.org/presentationml/2006/main" xmlns:r="http://schemas.openxmlformats.org/officeDocument/2006/relationships">
   <p:cSld>
     <p:spTree>
       <p:nvGrpSpPr>
@@ -13909,14 +14073,7 @@
         <p:cNvGrpSpPr/>
         <p:nvPr/>
       </p:nvGrpSpPr>
-      <p:grpSpPr>
-        <a:xfrm>
-          <a:off x="0" y="0"/>
-          <a:ext cx="0" cy="0"/>
-          <a:chOff x="0" y="0"/>
-          <a:chExt cx="0" cy="0"/>
-        </a:xfrm>
-      </p:grpSpPr>
+      <p:grpSpPr/>
       <p:sp>
         <p:nvSpPr>
           <p:cNvPr id="2" name="TextBox 1"/>
@@ -13934,7 +14091,7 @@
           <a:noFill/>
         </p:spPr>
         <p:txBody>
-          <a:bodyPr wrap="square" lIns="45720" tIns="18288" rIns="45720" bIns="18288" anchor="t">
+          <a:bodyPr wrap="square" lIns="45720" rIns="45720" tIns="18288" bIns="18288" anchor="t">
             <a:spAutoFit/>
           </a:bodyPr>
           <a:lstStyle/>
@@ -13973,7 +14130,7 @@
           <a:noFill/>
         </p:spPr>
         <p:txBody>
-          <a:bodyPr wrap="square" lIns="45720" tIns="18288" rIns="45720" bIns="18288" anchor="t">
+          <a:bodyPr wrap="square" lIns="45720" rIns="45720" tIns="18288" bIns="18288" anchor="t">
             <a:spAutoFit/>
           </a:bodyPr>
           <a:lstStyle/>
@@ -14036,9 +14193,7 @@
         <p:txBody>
           <a:bodyPr rtlCol="0" anchor="ctr"/>
           <a:lstStyle/>
-          <a:p>
-            <a:endParaRPr/>
-          </a:p>
+          <a:p/>
         </p:txBody>
       </p:sp>
       <p:sp>
@@ -14058,7 +14213,7 @@
           <a:noFill/>
         </p:spPr>
         <p:txBody>
-          <a:bodyPr wrap="square" lIns="45720" tIns="18288" rIns="45720" bIns="18288" anchor="t">
+          <a:bodyPr wrap="square" lIns="45720" rIns="45720" tIns="18288" bIns="18288" anchor="t">
             <a:spAutoFit/>
           </a:bodyPr>
           <a:lstStyle/>
@@ -14097,7 +14252,7 @@
           <a:noFill/>
         </p:spPr>
         <p:txBody>
-          <a:bodyPr wrap="square" lIns="45720" tIns="18288" rIns="45720" bIns="18288" anchor="t">
+          <a:bodyPr wrap="square" lIns="45720" rIns="45720" tIns="18288" bIns="18288" anchor="t">
             <a:spAutoFit/>
           </a:bodyPr>
           <a:lstStyle/>
@@ -14136,7 +14291,7 @@
           <a:noFill/>
         </p:spPr>
         <p:txBody>
-          <a:bodyPr wrap="square" lIns="45720" tIns="18288" rIns="45720" bIns="18288" anchor="t">
+          <a:bodyPr wrap="square" lIns="45720" rIns="45720" tIns="18288" bIns="18288" anchor="t">
             <a:spAutoFit/>
           </a:bodyPr>
           <a:lstStyle/>
@@ -14215,9 +14370,7 @@
         <p:txBody>
           <a:bodyPr rtlCol="0" anchor="ctr"/>
           <a:lstStyle/>
-          <a:p>
-            <a:endParaRPr/>
-          </a:p>
+          <a:p/>
         </p:txBody>
       </p:sp>
       <p:sp>
@@ -14237,7 +14390,7 @@
           <a:noFill/>
         </p:spPr>
         <p:txBody>
-          <a:bodyPr wrap="square" lIns="45720" tIns="18288" rIns="45720" bIns="18288" anchor="t">
+          <a:bodyPr wrap="square" lIns="45720" rIns="45720" tIns="18288" bIns="18288" anchor="t">
             <a:spAutoFit/>
           </a:bodyPr>
           <a:lstStyle/>
@@ -14276,7 +14429,7 @@
           <a:noFill/>
         </p:spPr>
         <p:txBody>
-          <a:bodyPr wrap="square" lIns="45720" tIns="18288" rIns="45720" bIns="18288" anchor="t">
+          <a:bodyPr wrap="square" lIns="45720" rIns="45720" tIns="18288" bIns="18288" anchor="t">
             <a:spAutoFit/>
           </a:bodyPr>
           <a:lstStyle/>
@@ -14315,7 +14468,7 @@
           <a:noFill/>
         </p:spPr>
         <p:txBody>
-          <a:bodyPr wrap="square" lIns="45720" tIns="18288" rIns="45720" bIns="18288" anchor="t">
+          <a:bodyPr wrap="square" lIns="45720" rIns="45720" tIns="18288" bIns="18288" anchor="t">
             <a:spAutoFit/>
           </a:bodyPr>
           <a:lstStyle/>
@@ -14394,9 +14547,7 @@
         <p:txBody>
           <a:bodyPr rtlCol="0" anchor="ctr"/>
           <a:lstStyle/>
-          <a:p>
-            <a:endParaRPr/>
-          </a:p>
+          <a:p/>
         </p:txBody>
       </p:sp>
       <p:sp>
@@ -14416,7 +14567,7 @@
           <a:noFill/>
         </p:spPr>
         <p:txBody>
-          <a:bodyPr wrap="square" lIns="45720" tIns="18288" rIns="45720" bIns="18288" anchor="t">
+          <a:bodyPr wrap="square" lIns="45720" rIns="45720" tIns="18288" bIns="18288" anchor="t">
             <a:spAutoFit/>
           </a:bodyPr>
           <a:lstStyle/>
@@ -14455,7 +14606,7 @@
           <a:noFill/>
         </p:spPr>
         <p:txBody>
-          <a:bodyPr wrap="square" lIns="45720" tIns="18288" rIns="45720" bIns="18288" anchor="t">
+          <a:bodyPr wrap="square" lIns="45720" rIns="45720" tIns="18288" bIns="18288" anchor="t">
             <a:spAutoFit/>
           </a:bodyPr>
           <a:lstStyle/>
@@ -14494,7 +14645,7 @@
           <a:noFill/>
         </p:spPr>
         <p:txBody>
-          <a:bodyPr wrap="square" lIns="45720" tIns="18288" rIns="45720" bIns="18288" anchor="t">
+          <a:bodyPr wrap="square" lIns="45720" rIns="45720" tIns="18288" bIns="18288" anchor="t">
             <a:spAutoFit/>
           </a:bodyPr>
           <a:lstStyle/>
@@ -14573,9 +14724,7 @@
         <p:txBody>
           <a:bodyPr rtlCol="0" anchor="ctr"/>
           <a:lstStyle/>
-          <a:p>
-            <a:endParaRPr/>
-          </a:p>
+          <a:p/>
         </p:txBody>
       </p:sp>
       <p:sp>
@@ -14595,7 +14744,7 @@
           <a:noFill/>
         </p:spPr>
         <p:txBody>
-          <a:bodyPr wrap="square" lIns="45720" tIns="18288" rIns="45720" bIns="18288" anchor="t">
+          <a:bodyPr wrap="square" lIns="45720" rIns="45720" tIns="18288" bIns="18288" anchor="t">
             <a:spAutoFit/>
           </a:bodyPr>
           <a:lstStyle/>
@@ -14634,7 +14783,7 @@
           <a:noFill/>
         </p:spPr>
         <p:txBody>
-          <a:bodyPr wrap="square" lIns="45720" tIns="18288" rIns="45720" bIns="18288" anchor="t">
+          <a:bodyPr wrap="square" lIns="45720" rIns="45720" tIns="18288" bIns="18288" anchor="t">
             <a:spAutoFit/>
           </a:bodyPr>
           <a:lstStyle/>
@@ -14673,7 +14822,7 @@
           <a:noFill/>
         </p:spPr>
         <p:txBody>
-          <a:bodyPr wrap="square" lIns="45720" tIns="18288" rIns="45720" bIns="18288" anchor="t">
+          <a:bodyPr wrap="square" lIns="45720" rIns="45720" tIns="18288" bIns="18288" anchor="t">
             <a:spAutoFit/>
           </a:bodyPr>
           <a:lstStyle/>
@@ -14752,9 +14901,7 @@
         <p:txBody>
           <a:bodyPr rtlCol="0" anchor="ctr"/>
           <a:lstStyle/>
-          <a:p>
-            <a:endParaRPr/>
-          </a:p>
+          <a:p/>
         </p:txBody>
       </p:sp>
       <p:sp>
@@ -14774,7 +14921,7 @@
           <a:noFill/>
         </p:spPr>
         <p:txBody>
-          <a:bodyPr wrap="square" lIns="45720" tIns="18288" rIns="45720" bIns="18288" anchor="t">
+          <a:bodyPr wrap="square" lIns="45720" rIns="45720" tIns="18288" bIns="18288" anchor="t">
             <a:spAutoFit/>
           </a:bodyPr>
           <a:lstStyle/>
@@ -14813,7 +14960,7 @@
           <a:noFill/>
         </p:spPr>
         <p:txBody>
-          <a:bodyPr wrap="square" lIns="45720" tIns="18288" rIns="45720" bIns="18288" anchor="t">
+          <a:bodyPr wrap="square" lIns="45720" rIns="45720" tIns="18288" bIns="18288" anchor="t">
             <a:spAutoFit/>
           </a:bodyPr>
           <a:lstStyle/>
@@ -14852,7 +14999,7 @@
           <a:noFill/>
         </p:spPr>
         <p:txBody>
-          <a:bodyPr wrap="square" lIns="45720" tIns="18288" rIns="45720" bIns="18288" anchor="t">
+          <a:bodyPr wrap="square" lIns="45720" rIns="45720" tIns="18288" bIns="18288" anchor="t">
             <a:spAutoFit/>
           </a:bodyPr>
           <a:lstStyle/>
@@ -14931,9 +15078,7 @@
         <p:txBody>
           <a:bodyPr rtlCol="0" anchor="ctr"/>
           <a:lstStyle/>
-          <a:p>
-            <a:endParaRPr/>
-          </a:p>
+          <a:p/>
         </p:txBody>
       </p:sp>
       <p:sp>
@@ -14953,7 +15098,7 @@
           <a:noFill/>
         </p:spPr>
         <p:txBody>
-          <a:bodyPr wrap="square" lIns="45720" tIns="18288" rIns="45720" bIns="18288" anchor="t">
+          <a:bodyPr wrap="square" lIns="45720" rIns="45720" tIns="18288" bIns="18288" anchor="t">
             <a:spAutoFit/>
           </a:bodyPr>
           <a:lstStyle/>
@@ -14992,7 +15137,7 @@
           <a:noFill/>
         </p:spPr>
         <p:txBody>
-          <a:bodyPr wrap="square" lIns="45720" tIns="18288" rIns="45720" bIns="18288" anchor="t">
+          <a:bodyPr wrap="square" lIns="45720" rIns="45720" tIns="18288" bIns="18288" anchor="t">
             <a:spAutoFit/>
           </a:bodyPr>
           <a:lstStyle/>
@@ -15031,7 +15176,7 @@
           <a:noFill/>
         </p:spPr>
         <p:txBody>
-          <a:bodyPr wrap="square" lIns="45720" tIns="18288" rIns="45720" bIns="18288" anchor="t">
+          <a:bodyPr wrap="square" lIns="45720" rIns="45720" tIns="18288" bIns="18288" anchor="t">
             <a:spAutoFit/>
           </a:bodyPr>
           <a:lstStyle/>
@@ -15110,9 +15255,7 @@
         <p:txBody>
           <a:bodyPr rtlCol="0" anchor="ctr"/>
           <a:lstStyle/>
-          <a:p>
-            <a:endParaRPr/>
-          </a:p>
+          <a:p/>
         </p:txBody>
       </p:sp>
       <p:sp>
@@ -15132,7 +15275,7 @@
           <a:noFill/>
         </p:spPr>
         <p:txBody>
-          <a:bodyPr wrap="square" lIns="45720" tIns="18288" rIns="45720" bIns="18288" anchor="t">
+          <a:bodyPr wrap="square" lIns="45720" rIns="45720" tIns="18288" bIns="18288" anchor="t">
             <a:spAutoFit/>
           </a:bodyPr>
           <a:lstStyle/>
@@ -15171,7 +15314,7 @@
           <a:noFill/>
         </p:spPr>
         <p:txBody>
-          <a:bodyPr wrap="square" lIns="45720" tIns="18288" rIns="45720" bIns="18288" anchor="t">
+          <a:bodyPr wrap="square" lIns="45720" rIns="45720" tIns="18288" bIns="18288" anchor="t">
             <a:spAutoFit/>
           </a:bodyPr>
           <a:lstStyle/>
@@ -15210,7 +15353,7 @@
           <a:noFill/>
         </p:spPr>
         <p:txBody>
-          <a:bodyPr wrap="square" lIns="45720" tIns="18288" rIns="45720" bIns="18288" anchor="t">
+          <a:bodyPr wrap="square" lIns="45720" rIns="45720" tIns="18288" bIns="18288" anchor="t">
             <a:spAutoFit/>
           </a:bodyPr>
           <a:lstStyle/>
@@ -15289,9 +15432,7 @@
         <p:txBody>
           <a:bodyPr rtlCol="0" anchor="ctr"/>
           <a:lstStyle/>
-          <a:p>
-            <a:endParaRPr/>
-          </a:p>
+          <a:p/>
         </p:txBody>
       </p:sp>
       <p:sp>
@@ -15311,7 +15452,7 @@
           <a:noFill/>
         </p:spPr>
         <p:txBody>
-          <a:bodyPr wrap="square" lIns="45720" tIns="18288" rIns="45720" bIns="18288" anchor="t">
+          <a:bodyPr wrap="square" lIns="45720" rIns="45720" tIns="18288" bIns="18288" anchor="t">
             <a:spAutoFit/>
           </a:bodyPr>
           <a:lstStyle/>
@@ -15350,7 +15491,7 @@
           <a:noFill/>
         </p:spPr>
         <p:txBody>
-          <a:bodyPr wrap="square" lIns="45720" tIns="18288" rIns="45720" bIns="18288" anchor="t">
+          <a:bodyPr wrap="square" lIns="45720" rIns="45720" tIns="18288" bIns="18288" anchor="t">
             <a:spAutoFit/>
           </a:bodyPr>
           <a:lstStyle/>
@@ -15389,7 +15530,7 @@
           <a:noFill/>
         </p:spPr>
         <p:txBody>
-          <a:bodyPr wrap="square" lIns="45720" tIns="18288" rIns="45720" bIns="18288" anchor="t">
+          <a:bodyPr wrap="square" lIns="45720" rIns="45720" tIns="18288" bIns="18288" anchor="t">
             <a:spAutoFit/>
           </a:bodyPr>
           <a:lstStyle/>
@@ -15468,9 +15609,7 @@
         <p:txBody>
           <a:bodyPr rtlCol="0" anchor="ctr"/>
           <a:lstStyle/>
-          <a:p>
-            <a:endParaRPr/>
-          </a:p>
+          <a:p/>
         </p:txBody>
       </p:sp>
       <p:sp>
@@ -15490,7 +15629,7 @@
           <a:noFill/>
         </p:spPr>
         <p:txBody>
-          <a:bodyPr wrap="square" lIns="45720" tIns="18288" rIns="45720" bIns="18288" anchor="t">
+          <a:bodyPr wrap="square" lIns="45720" rIns="45720" tIns="18288" bIns="18288" anchor="t">
             <a:spAutoFit/>
           </a:bodyPr>
           <a:lstStyle/>
@@ -15529,7 +15668,7 @@
           <a:noFill/>
         </p:spPr>
         <p:txBody>
-          <a:bodyPr wrap="square" lIns="45720" tIns="18288" rIns="45720" bIns="18288" anchor="t">
+          <a:bodyPr wrap="square" lIns="45720" rIns="45720" tIns="18288" bIns="18288" anchor="t">
             <a:spAutoFit/>
           </a:bodyPr>
           <a:lstStyle/>
@@ -15568,7 +15707,7 @@
           <a:noFill/>
         </p:spPr>
         <p:txBody>
-          <a:bodyPr wrap="square" lIns="45720" tIns="18288" rIns="45720" bIns="18288" anchor="t">
+          <a:bodyPr wrap="square" lIns="45720" rIns="45720" tIns="18288" bIns="18288" anchor="t">
             <a:spAutoFit/>
           </a:bodyPr>
           <a:lstStyle/>
@@ -15607,7 +15746,7 @@
           <a:noFill/>
         </p:spPr>
         <p:txBody>
-          <a:bodyPr wrap="square" lIns="45720" tIns="18288" rIns="45720" bIns="18288" anchor="t">
+          <a:bodyPr wrap="square" lIns="45720" rIns="45720" tIns="18288" bIns="18288" anchor="t">
             <a:spAutoFit/>
           </a:bodyPr>
           <a:lstStyle/>
@@ -15646,7 +15785,7 @@
           <a:noFill/>
         </p:spPr>
         <p:txBody>
-          <a:bodyPr wrap="square" lIns="45720" tIns="18288" rIns="45720" bIns="18288" anchor="t">
+          <a:bodyPr wrap="square" lIns="45720" rIns="45720" tIns="18288" bIns="18288" anchor="t">
             <a:spAutoFit/>
           </a:bodyPr>
           <a:lstStyle/>
@@ -15685,7 +15824,7 @@
           <a:noFill/>
         </p:spPr>
         <p:txBody>
-          <a:bodyPr wrap="square" lIns="45720" tIns="18288" rIns="45720" bIns="18288" anchor="t">
+          <a:bodyPr wrap="square" lIns="45720" rIns="45720" tIns="18288" bIns="18288" anchor="t">
             <a:spAutoFit/>
           </a:bodyPr>
           <a:lstStyle/>
@@ -15724,7 +15863,7 @@
           <a:noFill/>
         </p:spPr>
         <p:txBody>
-          <a:bodyPr wrap="square" lIns="45720" tIns="18288" rIns="45720" bIns="18288" anchor="t">
+          <a:bodyPr wrap="square" lIns="45720" rIns="45720" tIns="18288" bIns="18288" anchor="t">
             <a:spAutoFit/>
           </a:bodyPr>
           <a:lstStyle/>
@@ -15763,7 +15902,7 @@
           <a:noFill/>
         </p:spPr>
         <p:txBody>
-          <a:bodyPr wrap="square" lIns="45720" tIns="18288" rIns="45720" bIns="18288" anchor="t">
+          <a:bodyPr wrap="square" lIns="45720" rIns="45720" tIns="18288" bIns="18288" anchor="t">
             <a:spAutoFit/>
           </a:bodyPr>
           <a:lstStyle/>
@@ -15794,7 +15933,7 @@
 </file>
 
 <file path=ppt/slides/slide4.xml><?xml version="1.0" encoding="utf-8"?>
-<p:sld xmlns:a="http://schemas.openxmlformats.org/drawingml/2006/main" xmlns:r="http://schemas.openxmlformats.org/officeDocument/2006/relationships" xmlns:p="http://schemas.openxmlformats.org/presentationml/2006/main">
+<p:sld xmlns:a="http://schemas.openxmlformats.org/drawingml/2006/main" xmlns:p="http://schemas.openxmlformats.org/presentationml/2006/main" xmlns:r="http://schemas.openxmlformats.org/officeDocument/2006/relationships">
   <p:cSld>
     <p:spTree>
       <p:nvGrpSpPr>
@@ -15802,14 +15941,7 @@
         <p:cNvGrpSpPr/>
         <p:nvPr/>
       </p:nvGrpSpPr>
-      <p:grpSpPr>
-        <a:xfrm>
-          <a:off x="0" y="0"/>
-          <a:ext cx="0" cy="0"/>
-          <a:chOff x="0" y="0"/>
-          <a:chExt cx="0" cy="0"/>
-        </a:xfrm>
-      </p:grpSpPr>
+      <p:grpSpPr/>
       <p:sp>
         <p:nvSpPr>
           <p:cNvPr id="2" name="TextBox 1"/>
@@ -15827,7 +15959,7 @@
           <a:noFill/>
         </p:spPr>
         <p:txBody>
-          <a:bodyPr wrap="square" lIns="45720" tIns="18288" rIns="45720" bIns="18288" anchor="t">
+          <a:bodyPr wrap="square" lIns="45720" rIns="45720" tIns="18288" bIns="18288" anchor="t">
             <a:spAutoFit/>
           </a:bodyPr>
           <a:lstStyle/>
@@ -15866,7 +15998,7 @@
           <a:noFill/>
         </p:spPr>
         <p:txBody>
-          <a:bodyPr wrap="square" lIns="45720" tIns="18288" rIns="45720" bIns="18288" anchor="t">
+          <a:bodyPr wrap="square" lIns="45720" rIns="45720" tIns="18288" bIns="18288" anchor="t">
             <a:spAutoFit/>
           </a:bodyPr>
           <a:lstStyle/>
@@ -15929,9 +16061,7 @@
         <p:txBody>
           <a:bodyPr rtlCol="0" anchor="ctr"/>
           <a:lstStyle/>
-          <a:p>
-            <a:endParaRPr/>
-          </a:p>
+          <a:p/>
         </p:txBody>
       </p:sp>
       <p:sp>
@@ -15951,7 +16081,7 @@
           <a:noFill/>
         </p:spPr>
         <p:txBody>
-          <a:bodyPr wrap="square" lIns="45720" tIns="18288" rIns="45720" bIns="18288" anchor="t">
+          <a:bodyPr wrap="square" lIns="45720" rIns="45720" tIns="18288" bIns="18288" anchor="t">
             <a:spAutoFit/>
           </a:bodyPr>
           <a:lstStyle/>
@@ -16102,7 +16232,7 @@
           <a:noFill/>
         </p:spPr>
         <p:txBody>
-          <a:bodyPr wrap="square" lIns="45720" tIns="18288" rIns="45720" bIns="18288" anchor="t">
+          <a:bodyPr wrap="square" lIns="45720" rIns="45720" tIns="18288" bIns="18288" anchor="t">
             <a:spAutoFit/>
           </a:bodyPr>
           <a:lstStyle/>
@@ -16161,11 +16291,10 @@
           </a:fontRef>
         </p:style>
         <p:txBody>
-          <a:bodyPr lIns="0" tIns="0" rIns="0" bIns="0" rtlCol="0" anchor="ctr"/>
+          <a:bodyPr rtlCol="0" anchor="ctr" lIns="0" rIns="0" tIns="0" bIns="0"/>
           <a:lstStyle/>
           <a:p>
             <a:pPr algn="ctr"/>
-            <a:endParaRPr/>
           </a:p>
         </p:txBody>
       </p:sp>
@@ -16186,7 +16315,7 @@
           <a:noFill/>
         </p:spPr>
         <p:txBody>
-          <a:bodyPr wrap="square" lIns="45720" tIns="18288" rIns="45720" bIns="18288" anchor="t">
+          <a:bodyPr wrap="square" lIns="45720" rIns="45720" tIns="18288" bIns="18288" anchor="t">
             <a:spAutoFit/>
           </a:bodyPr>
           <a:lstStyle/>
@@ -16245,11 +16374,10 @@
           </a:fontRef>
         </p:style>
         <p:txBody>
-          <a:bodyPr lIns="0" tIns="0" rIns="0" bIns="0" rtlCol="0" anchor="ctr"/>
+          <a:bodyPr rtlCol="0" anchor="ctr" lIns="0" rIns="0" tIns="0" bIns="0"/>
           <a:lstStyle/>
           <a:p>
             <a:pPr algn="ctr"/>
-            <a:endParaRPr/>
           </a:p>
         </p:txBody>
       </p:sp>
@@ -16270,7 +16398,7 @@
           <a:noFill/>
         </p:spPr>
         <p:txBody>
-          <a:bodyPr wrap="square" lIns="45720" tIns="18288" rIns="45720" bIns="18288" anchor="t">
+          <a:bodyPr wrap="square" lIns="45720" rIns="45720" tIns="18288" bIns="18288" anchor="t">
             <a:spAutoFit/>
           </a:bodyPr>
           <a:lstStyle/>
@@ -16329,11 +16457,10 @@
           </a:fontRef>
         </p:style>
         <p:txBody>
-          <a:bodyPr lIns="0" tIns="0" rIns="0" bIns="0" rtlCol="0" anchor="ctr"/>
+          <a:bodyPr rtlCol="0" anchor="ctr" lIns="0" rIns="0" tIns="0" bIns="0"/>
           <a:lstStyle/>
           <a:p>
             <a:pPr algn="ctr"/>
-            <a:endParaRPr/>
           </a:p>
         </p:txBody>
       </p:sp>
@@ -16354,7 +16481,7 @@
           <a:noFill/>
         </p:spPr>
         <p:txBody>
-          <a:bodyPr wrap="square" lIns="45720" tIns="18288" rIns="45720" bIns="18288" anchor="t">
+          <a:bodyPr wrap="square" lIns="45720" rIns="45720" tIns="18288" bIns="18288" anchor="t">
             <a:spAutoFit/>
           </a:bodyPr>
           <a:lstStyle/>
@@ -16417,9 +16544,7 @@
         <p:txBody>
           <a:bodyPr rtlCol="0" anchor="ctr"/>
           <a:lstStyle/>
-          <a:p>
-            <a:endParaRPr/>
-          </a:p>
+          <a:p/>
         </p:txBody>
       </p:sp>
       <p:sp>
@@ -16439,7 +16564,7 @@
           <a:noFill/>
         </p:spPr>
         <p:txBody>
-          <a:bodyPr wrap="square" lIns="45720" tIns="18288" rIns="45720" bIns="18288" anchor="t">
+          <a:bodyPr wrap="square" lIns="45720" rIns="45720" tIns="18288" bIns="18288" anchor="t">
             <a:spAutoFit/>
           </a:bodyPr>
           <a:lstStyle/>
@@ -16478,7 +16603,7 @@
           <a:noFill/>
         </p:spPr>
         <p:txBody>
-          <a:bodyPr wrap="square" lIns="45720" tIns="18288" rIns="45720" bIns="18288" anchor="t">
+          <a:bodyPr wrap="square" lIns="45720" rIns="45720" tIns="18288" bIns="18288" anchor="t">
             <a:spAutoFit/>
           </a:bodyPr>
           <a:lstStyle/>
@@ -16541,9 +16666,7 @@
         <p:txBody>
           <a:bodyPr rtlCol="0" anchor="ctr"/>
           <a:lstStyle/>
-          <a:p>
-            <a:endParaRPr/>
-          </a:p>
+          <a:p/>
         </p:txBody>
       </p:sp>
       <p:sp>
@@ -16563,7 +16686,7 @@
           <a:noFill/>
         </p:spPr>
         <p:txBody>
-          <a:bodyPr wrap="square" lIns="45720" tIns="18288" rIns="45720" bIns="18288" anchor="t">
+          <a:bodyPr wrap="square" lIns="45720" rIns="45720" tIns="18288" bIns="18288" anchor="t">
             <a:spAutoFit/>
           </a:bodyPr>
           <a:lstStyle/>
@@ -16602,7 +16725,7 @@
           <a:noFill/>
         </p:spPr>
         <p:txBody>
-          <a:bodyPr wrap="square" lIns="45720" tIns="18288" rIns="45720" bIns="18288" anchor="t">
+          <a:bodyPr wrap="square" lIns="45720" rIns="45720" tIns="18288" bIns="18288" anchor="t">
             <a:spAutoFit/>
           </a:bodyPr>
           <a:lstStyle/>
@@ -16641,7 +16764,7 @@
           <a:noFill/>
         </p:spPr>
         <p:txBody>
-          <a:bodyPr wrap="square" lIns="45720" tIns="18288" rIns="45720" bIns="18288" anchor="t">
+          <a:bodyPr wrap="square" lIns="45720" rIns="45720" tIns="18288" bIns="18288" anchor="t">
             <a:spAutoFit/>
           </a:bodyPr>
           <a:lstStyle/>
@@ -16680,7 +16803,7 @@
           <a:noFill/>
         </p:spPr>
         <p:txBody>
-          <a:bodyPr wrap="square" lIns="45720" tIns="18288" rIns="45720" bIns="18288" anchor="t">
+          <a:bodyPr wrap="square" lIns="45720" rIns="45720" tIns="18288" bIns="18288" anchor="t">
             <a:spAutoFit/>
           </a:bodyPr>
           <a:lstStyle/>
@@ -16719,7 +16842,7 @@
           <a:noFill/>
         </p:spPr>
         <p:txBody>
-          <a:bodyPr wrap="square" lIns="45720" tIns="18288" rIns="45720" bIns="18288" anchor="t">
+          <a:bodyPr wrap="square" lIns="45720" rIns="45720" tIns="18288" bIns="18288" anchor="t">
             <a:spAutoFit/>
           </a:bodyPr>
           <a:lstStyle/>
@@ -16758,7 +16881,7 @@
           <a:noFill/>
         </p:spPr>
         <p:txBody>
-          <a:bodyPr wrap="square" lIns="45720" tIns="18288" rIns="45720" bIns="18288" anchor="t">
+          <a:bodyPr wrap="square" lIns="45720" rIns="45720" tIns="18288" bIns="18288" anchor="t">
             <a:spAutoFit/>
           </a:bodyPr>
           <a:lstStyle/>
@@ -16797,7 +16920,7 @@
           <a:noFill/>
         </p:spPr>
         <p:txBody>
-          <a:bodyPr wrap="square" lIns="45720" tIns="18288" rIns="45720" bIns="18288" anchor="t">
+          <a:bodyPr wrap="square" lIns="45720" rIns="45720" tIns="18288" bIns="18288" anchor="t">
             <a:spAutoFit/>
           </a:bodyPr>
           <a:lstStyle/>
@@ -16836,7 +16959,7 @@
           <a:noFill/>
         </p:spPr>
         <p:txBody>
-          <a:bodyPr wrap="square" lIns="45720" tIns="18288" rIns="45720" bIns="18288" anchor="t">
+          <a:bodyPr wrap="square" lIns="45720" rIns="45720" tIns="18288" bIns="18288" anchor="t">
             <a:spAutoFit/>
           </a:bodyPr>
           <a:lstStyle/>
@@ -16875,7 +16998,7 @@
           <a:noFill/>
         </p:spPr>
         <p:txBody>
-          <a:bodyPr wrap="square" lIns="45720" tIns="18288" rIns="45720" bIns="18288" anchor="t">
+          <a:bodyPr wrap="square" lIns="45720" rIns="45720" tIns="18288" bIns="18288" anchor="t">
             <a:spAutoFit/>
           </a:bodyPr>
           <a:lstStyle/>
@@ -16906,7 +17029,7 @@
 </file>
 
 <file path=ppt/slides/slide5.xml><?xml version="1.0" encoding="utf-8"?>
-<p:sld xmlns:a="http://schemas.openxmlformats.org/drawingml/2006/main" xmlns:r="http://schemas.openxmlformats.org/officeDocument/2006/relationships" xmlns:p="http://schemas.openxmlformats.org/presentationml/2006/main">
+<p:sld xmlns:a="http://schemas.openxmlformats.org/drawingml/2006/main" xmlns:p="http://schemas.openxmlformats.org/presentationml/2006/main" xmlns:r="http://schemas.openxmlformats.org/officeDocument/2006/relationships">
   <p:cSld>
     <p:spTree>
       <p:nvGrpSpPr>
@@ -16914,14 +17037,7 @@
         <p:cNvGrpSpPr/>
         <p:nvPr/>
       </p:nvGrpSpPr>
-      <p:grpSpPr>
-        <a:xfrm>
-          <a:off x="0" y="0"/>
-          <a:ext cx="0" cy="0"/>
-          <a:chOff x="0" y="0"/>
-          <a:chExt cx="0" cy="0"/>
-        </a:xfrm>
-      </p:grpSpPr>
+      <p:grpSpPr/>
       <p:sp>
         <p:nvSpPr>
           <p:cNvPr id="2" name="TextBox 1"/>
@@ -16939,7 +17055,7 @@
           <a:noFill/>
         </p:spPr>
         <p:txBody>
-          <a:bodyPr wrap="square" lIns="45720" tIns="18288" rIns="45720" bIns="18288" anchor="t">
+          <a:bodyPr wrap="square" lIns="45720" rIns="45720" tIns="18288" bIns="18288" anchor="t">
             <a:spAutoFit/>
           </a:bodyPr>
           <a:lstStyle/>
@@ -16978,7 +17094,7 @@
           <a:noFill/>
         </p:spPr>
         <p:txBody>
-          <a:bodyPr wrap="square" lIns="45720" tIns="18288" rIns="45720" bIns="18288" anchor="t">
+          <a:bodyPr wrap="square" lIns="45720" rIns="45720" tIns="18288" bIns="18288" anchor="t">
             <a:spAutoFit/>
           </a:bodyPr>
           <a:lstStyle/>
@@ -17041,9 +17157,7 @@
         <p:txBody>
           <a:bodyPr rtlCol="0" anchor="ctr"/>
           <a:lstStyle/>
-          <a:p>
-            <a:endParaRPr/>
-          </a:p>
+          <a:p/>
         </p:txBody>
       </p:sp>
       <p:sp>
@@ -17083,7 +17197,7 @@
           </a:fontRef>
         </p:style>
         <p:txBody>
-          <a:bodyPr lIns="0" tIns="0" rIns="0" bIns="0" rtlCol="0" anchor="ctr"/>
+          <a:bodyPr rtlCol="0" anchor="ctr" lIns="0" rIns="0" tIns="0" bIns="0"/>
           <a:lstStyle/>
           <a:p>
             <a:pPr algn="ctr"/>
@@ -17116,7 +17230,7 @@
           <a:noFill/>
         </p:spPr>
         <p:txBody>
-          <a:bodyPr wrap="square" lIns="45720" tIns="18288" rIns="45720" bIns="18288" anchor="t">
+          <a:bodyPr wrap="square" lIns="45720" rIns="45720" tIns="18288" bIns="18288" anchor="t">
             <a:spAutoFit/>
           </a:bodyPr>
           <a:lstStyle/>
@@ -17155,7 +17269,7 @@
           <a:noFill/>
         </p:spPr>
         <p:txBody>
-          <a:bodyPr wrap="square" lIns="45720" tIns="18288" rIns="45720" bIns="18288" anchor="t">
+          <a:bodyPr wrap="square" lIns="45720" rIns="45720" tIns="18288" bIns="18288" anchor="t">
             <a:spAutoFit/>
           </a:bodyPr>
           <a:lstStyle/>
@@ -17218,9 +17332,7 @@
         <p:txBody>
           <a:bodyPr rtlCol="0" anchor="ctr"/>
           <a:lstStyle/>
-          <a:p>
-            <a:endParaRPr/>
-          </a:p>
+          <a:p/>
         </p:txBody>
       </p:sp>
       <p:sp>
@@ -17260,7 +17372,7 @@
           </a:fontRef>
         </p:style>
         <p:txBody>
-          <a:bodyPr lIns="0" tIns="0" rIns="0" bIns="0" rtlCol="0" anchor="ctr"/>
+          <a:bodyPr rtlCol="0" anchor="ctr" lIns="0" rIns="0" tIns="0" bIns="0"/>
           <a:lstStyle/>
           <a:p>
             <a:pPr algn="ctr"/>
@@ -17293,7 +17405,7 @@
           <a:noFill/>
         </p:spPr>
         <p:txBody>
-          <a:bodyPr wrap="square" lIns="45720" tIns="18288" rIns="45720" bIns="18288" anchor="t">
+          <a:bodyPr wrap="square" lIns="45720" rIns="45720" tIns="18288" bIns="18288" anchor="t">
             <a:spAutoFit/>
           </a:bodyPr>
           <a:lstStyle/>
@@ -17332,7 +17444,7 @@
           <a:noFill/>
         </p:spPr>
         <p:txBody>
-          <a:bodyPr wrap="square" lIns="45720" tIns="18288" rIns="45720" bIns="18288" anchor="t">
+          <a:bodyPr wrap="square" lIns="45720" rIns="45720" tIns="18288" bIns="18288" anchor="t">
             <a:spAutoFit/>
           </a:bodyPr>
           <a:lstStyle/>
@@ -17395,9 +17507,7 @@
         <p:txBody>
           <a:bodyPr rtlCol="0" anchor="ctr"/>
           <a:lstStyle/>
-          <a:p>
-            <a:endParaRPr/>
-          </a:p>
+          <a:p/>
         </p:txBody>
       </p:sp>
       <p:sp>
@@ -17437,7 +17547,7 @@
           </a:fontRef>
         </p:style>
         <p:txBody>
-          <a:bodyPr lIns="0" tIns="0" rIns="0" bIns="0" rtlCol="0" anchor="ctr"/>
+          <a:bodyPr rtlCol="0" anchor="ctr" lIns="0" rIns="0" tIns="0" bIns="0"/>
           <a:lstStyle/>
           <a:p>
             <a:pPr algn="ctr"/>
@@ -17470,7 +17580,7 @@
           <a:noFill/>
         </p:spPr>
         <p:txBody>
-          <a:bodyPr wrap="square" lIns="45720" tIns="18288" rIns="45720" bIns="18288" anchor="t">
+          <a:bodyPr wrap="square" lIns="45720" rIns="45720" tIns="18288" bIns="18288" anchor="t">
             <a:spAutoFit/>
           </a:bodyPr>
           <a:lstStyle/>
@@ -17509,7 +17619,7 @@
           <a:noFill/>
         </p:spPr>
         <p:txBody>
-          <a:bodyPr wrap="square" lIns="45720" tIns="18288" rIns="45720" bIns="18288" anchor="t">
+          <a:bodyPr wrap="square" lIns="45720" rIns="45720" tIns="18288" bIns="18288" anchor="t">
             <a:spAutoFit/>
           </a:bodyPr>
           <a:lstStyle/>
@@ -17572,9 +17682,7 @@
         <p:txBody>
           <a:bodyPr rtlCol="0" anchor="ctr"/>
           <a:lstStyle/>
-          <a:p>
-            <a:endParaRPr/>
-          </a:p>
+          <a:p/>
         </p:txBody>
       </p:sp>
       <p:sp>
@@ -17594,7 +17702,7 @@
           <a:noFill/>
         </p:spPr>
         <p:txBody>
-          <a:bodyPr wrap="square" lIns="45720" tIns="18288" rIns="45720" bIns="18288" anchor="t">
+          <a:bodyPr wrap="square" lIns="45720" rIns="45720" tIns="18288" bIns="18288" anchor="t">
             <a:spAutoFit/>
           </a:bodyPr>
           <a:lstStyle/>
@@ -17633,7 +17741,7 @@
           <a:noFill/>
         </p:spPr>
         <p:txBody>
-          <a:bodyPr wrap="square" lIns="45720" tIns="18288" rIns="45720" bIns="18288" anchor="t">
+          <a:bodyPr wrap="square" lIns="45720" rIns="45720" tIns="18288" bIns="18288" anchor="t">
             <a:spAutoFit/>
           </a:bodyPr>
           <a:lstStyle/>
@@ -17672,7 +17780,7 @@
           <a:noFill/>
         </p:spPr>
         <p:txBody>
-          <a:bodyPr wrap="square" lIns="45720" tIns="18288" rIns="45720" bIns="18288" anchor="t">
+          <a:bodyPr wrap="square" lIns="45720" rIns="45720" tIns="18288" bIns="18288" anchor="t">
             <a:spAutoFit/>
           </a:bodyPr>
           <a:lstStyle/>
@@ -17703,7 +17811,7 @@
 </file>
 
 <file path=ppt/slides/slide6.xml><?xml version="1.0" encoding="utf-8"?>
-<p:sld xmlns:a="http://schemas.openxmlformats.org/drawingml/2006/main" xmlns:r="http://schemas.openxmlformats.org/officeDocument/2006/relationships" xmlns:p="http://schemas.openxmlformats.org/presentationml/2006/main">
+<p:sld xmlns:a="http://schemas.openxmlformats.org/drawingml/2006/main" xmlns:p="http://schemas.openxmlformats.org/presentationml/2006/main" xmlns:r="http://schemas.openxmlformats.org/officeDocument/2006/relationships">
   <p:cSld>
     <p:spTree>
       <p:nvGrpSpPr>
@@ -17711,14 +17819,7 @@
         <p:cNvGrpSpPr/>
         <p:nvPr/>
       </p:nvGrpSpPr>
-      <p:grpSpPr>
-        <a:xfrm>
-          <a:off x="0" y="0"/>
-          <a:ext cx="0" cy="0"/>
-          <a:chOff x="0" y="0"/>
-          <a:chExt cx="0" cy="0"/>
-        </a:xfrm>
-      </p:grpSpPr>
+      <p:grpSpPr/>
       <p:sp>
         <p:nvSpPr>
           <p:cNvPr id="2" name="TextBox 1"/>
@@ -17736,7 +17837,7 @@
           <a:noFill/>
         </p:spPr>
         <p:txBody>
-          <a:bodyPr wrap="square" lIns="45720" tIns="18288" rIns="45720" bIns="18288" anchor="t">
+          <a:bodyPr wrap="square" lIns="45720" rIns="45720" tIns="18288" bIns="18288" anchor="t">
             <a:spAutoFit/>
           </a:bodyPr>
           <a:lstStyle/>
@@ -17775,7 +17876,7 @@
           <a:noFill/>
         </p:spPr>
         <p:txBody>
-          <a:bodyPr wrap="square" lIns="45720" tIns="18288" rIns="45720" bIns="18288" anchor="t">
+          <a:bodyPr wrap="square" lIns="45720" rIns="45720" tIns="18288" bIns="18288" anchor="t">
             <a:spAutoFit/>
           </a:bodyPr>
           <a:lstStyle/>
@@ -17838,9 +17939,7 @@
         <p:txBody>
           <a:bodyPr rtlCol="0" anchor="ctr"/>
           <a:lstStyle/>
-          <a:p>
-            <a:endParaRPr/>
-          </a:p>
+          <a:p/>
         </p:txBody>
       </p:sp>
       <p:sp>
@@ -17860,7 +17959,7 @@
           <a:noFill/>
         </p:spPr>
         <p:txBody>
-          <a:bodyPr wrap="square" lIns="45720" tIns="18288" rIns="45720" bIns="18288" anchor="ctr">
+          <a:bodyPr wrap="square" lIns="45720" rIns="45720" tIns="18288" bIns="18288" anchor="ctr">
             <a:spAutoFit/>
           </a:bodyPr>
           <a:lstStyle/>
@@ -17899,7 +17998,7 @@
           <a:noFill/>
         </p:spPr>
         <p:txBody>
-          <a:bodyPr wrap="square" lIns="45720" tIns="18288" rIns="45720" bIns="18288" anchor="ctr">
+          <a:bodyPr wrap="square" lIns="45720" rIns="45720" tIns="18288" bIns="18288" anchor="ctr">
             <a:spAutoFit/>
           </a:bodyPr>
           <a:lstStyle/>
@@ -17938,7 +18037,7 @@
           <a:noFill/>
         </p:spPr>
         <p:txBody>
-          <a:bodyPr wrap="square" lIns="45720" tIns="18288" rIns="45720" bIns="18288" anchor="ctr">
+          <a:bodyPr wrap="square" lIns="45720" rIns="45720" tIns="18288" bIns="18288" anchor="ctr">
             <a:spAutoFit/>
           </a:bodyPr>
           <a:lstStyle/>
@@ -17977,7 +18076,7 @@
           <a:noFill/>
         </p:spPr>
         <p:txBody>
-          <a:bodyPr wrap="square" lIns="45720" tIns="18288" rIns="45720" bIns="18288" anchor="ctr">
+          <a:bodyPr wrap="square" lIns="45720" rIns="45720" tIns="18288" bIns="18288" anchor="ctr">
             <a:spAutoFit/>
           </a:bodyPr>
           <a:lstStyle/>
@@ -18016,7 +18115,7 @@
           <a:noFill/>
         </p:spPr>
         <p:txBody>
-          <a:bodyPr wrap="square" lIns="45720" tIns="18288" rIns="45720" bIns="18288" anchor="ctr">
+          <a:bodyPr wrap="square" lIns="45720" rIns="45720" tIns="18288" bIns="18288" anchor="ctr">
             <a:spAutoFit/>
           </a:bodyPr>
           <a:lstStyle/>
@@ -18077,9 +18176,7 @@
         <p:txBody>
           <a:bodyPr rtlCol="0" anchor="ctr"/>
           <a:lstStyle/>
-          <a:p>
-            <a:endParaRPr/>
-          </a:p>
+          <a:p/>
         </p:txBody>
       </p:sp>
       <p:sp>
@@ -18099,7 +18196,7 @@
           <a:noFill/>
         </p:spPr>
         <p:txBody>
-          <a:bodyPr wrap="square" lIns="45720" tIns="18288" rIns="45720" bIns="18288" anchor="ctr">
+          <a:bodyPr wrap="square" lIns="45720" rIns="45720" tIns="18288" bIns="18288" anchor="ctr">
             <a:spAutoFit/>
           </a:bodyPr>
           <a:lstStyle/>
@@ -18138,7 +18235,7 @@
           <a:noFill/>
         </p:spPr>
         <p:txBody>
-          <a:bodyPr wrap="square" lIns="45720" tIns="18288" rIns="45720" bIns="18288" anchor="ctr">
+          <a:bodyPr wrap="square" lIns="45720" rIns="45720" tIns="18288" bIns="18288" anchor="ctr">
             <a:spAutoFit/>
           </a:bodyPr>
           <a:lstStyle/>
@@ -18177,7 +18274,7 @@
           <a:noFill/>
         </p:spPr>
         <p:txBody>
-          <a:bodyPr wrap="square" lIns="45720" tIns="18288" rIns="45720" bIns="18288" anchor="ctr">
+          <a:bodyPr wrap="square" lIns="45720" rIns="45720" tIns="18288" bIns="18288" anchor="ctr">
             <a:spAutoFit/>
           </a:bodyPr>
           <a:lstStyle/>
@@ -18216,7 +18313,7 @@
           <a:noFill/>
         </p:spPr>
         <p:txBody>
-          <a:bodyPr wrap="square" lIns="45720" tIns="18288" rIns="45720" bIns="18288" anchor="ctr">
+          <a:bodyPr wrap="square" lIns="45720" rIns="45720" tIns="18288" bIns="18288" anchor="ctr">
             <a:spAutoFit/>
           </a:bodyPr>
           <a:lstStyle/>
@@ -18255,7 +18352,7 @@
           <a:noFill/>
         </p:spPr>
         <p:txBody>
-          <a:bodyPr wrap="square" lIns="45720" tIns="18288" rIns="45720" bIns="18288" anchor="ctr">
+          <a:bodyPr wrap="square" lIns="45720" rIns="45720" tIns="18288" bIns="18288" anchor="ctr">
             <a:spAutoFit/>
           </a:bodyPr>
           <a:lstStyle/>
@@ -18294,7 +18391,7 @@
           <a:noFill/>
         </p:spPr>
         <p:txBody>
-          <a:bodyPr wrap="square" lIns="45720" tIns="18288" rIns="45720" bIns="18288" anchor="ctr">
+          <a:bodyPr wrap="square" lIns="45720" rIns="45720" tIns="18288" bIns="18288" anchor="ctr">
             <a:spAutoFit/>
           </a:bodyPr>
           <a:lstStyle/>
@@ -18333,7 +18430,7 @@
           <a:noFill/>
         </p:spPr>
         <p:txBody>
-          <a:bodyPr wrap="square" lIns="45720" tIns="18288" rIns="45720" bIns="18288" anchor="ctr">
+          <a:bodyPr wrap="square" lIns="45720" rIns="45720" tIns="18288" bIns="18288" anchor="ctr">
             <a:spAutoFit/>
           </a:bodyPr>
           <a:lstStyle/>
@@ -18372,7 +18469,7 @@
           <a:noFill/>
         </p:spPr>
         <p:txBody>
-          <a:bodyPr wrap="square" lIns="45720" tIns="18288" rIns="45720" bIns="18288" anchor="ctr">
+          <a:bodyPr wrap="square" lIns="45720" rIns="45720" tIns="18288" bIns="18288" anchor="ctr">
             <a:spAutoFit/>
           </a:bodyPr>
           <a:lstStyle/>
@@ -18411,7 +18508,7 @@
           <a:noFill/>
         </p:spPr>
         <p:txBody>
-          <a:bodyPr wrap="square" lIns="45720" tIns="18288" rIns="45720" bIns="18288" anchor="ctr">
+          <a:bodyPr wrap="square" lIns="45720" rIns="45720" tIns="18288" bIns="18288" anchor="ctr">
             <a:spAutoFit/>
           </a:bodyPr>
           <a:lstStyle/>
@@ -18450,7 +18547,7 @@
           <a:noFill/>
         </p:spPr>
         <p:txBody>
-          <a:bodyPr wrap="square" lIns="45720" tIns="18288" rIns="45720" bIns="18288" anchor="ctr">
+          <a:bodyPr wrap="square" lIns="45720" rIns="45720" tIns="18288" bIns="18288" anchor="ctr">
             <a:spAutoFit/>
           </a:bodyPr>
           <a:lstStyle/>
@@ -18511,9 +18608,7 @@
         <p:txBody>
           <a:bodyPr rtlCol="0" anchor="ctr"/>
           <a:lstStyle/>
-          <a:p>
-            <a:endParaRPr/>
-          </a:p>
+          <a:p/>
         </p:txBody>
       </p:sp>
       <p:sp>
@@ -18533,7 +18628,7 @@
           <a:noFill/>
         </p:spPr>
         <p:txBody>
-          <a:bodyPr wrap="square" lIns="45720" tIns="18288" rIns="45720" bIns="18288" anchor="ctr">
+          <a:bodyPr wrap="square" lIns="45720" rIns="45720" tIns="18288" bIns="18288" anchor="ctr">
             <a:spAutoFit/>
           </a:bodyPr>
           <a:lstStyle/>
@@ -18572,7 +18667,7 @@
           <a:noFill/>
         </p:spPr>
         <p:txBody>
-          <a:bodyPr wrap="square" lIns="45720" tIns="18288" rIns="45720" bIns="18288" anchor="ctr">
+          <a:bodyPr wrap="square" lIns="45720" rIns="45720" tIns="18288" bIns="18288" anchor="ctr">
             <a:spAutoFit/>
           </a:bodyPr>
           <a:lstStyle/>
@@ -18611,7 +18706,7 @@
           <a:noFill/>
         </p:spPr>
         <p:txBody>
-          <a:bodyPr wrap="square" lIns="45720" tIns="18288" rIns="45720" bIns="18288" anchor="ctr">
+          <a:bodyPr wrap="square" lIns="45720" rIns="45720" tIns="18288" bIns="18288" anchor="ctr">
             <a:spAutoFit/>
           </a:bodyPr>
           <a:lstStyle/>
@@ -18650,7 +18745,7 @@
           <a:noFill/>
         </p:spPr>
         <p:txBody>
-          <a:bodyPr wrap="square" lIns="45720" tIns="18288" rIns="45720" bIns="18288" anchor="ctr">
+          <a:bodyPr wrap="square" lIns="45720" rIns="45720" tIns="18288" bIns="18288" anchor="ctr">
             <a:spAutoFit/>
           </a:bodyPr>
           <a:lstStyle/>
@@ -18689,7 +18784,7 @@
           <a:noFill/>
         </p:spPr>
         <p:txBody>
-          <a:bodyPr wrap="square" lIns="45720" tIns="18288" rIns="45720" bIns="18288" anchor="ctr">
+          <a:bodyPr wrap="square" lIns="45720" rIns="45720" tIns="18288" bIns="18288" anchor="ctr">
             <a:spAutoFit/>
           </a:bodyPr>
           <a:lstStyle/>
@@ -18728,7 +18823,7 @@
           <a:noFill/>
         </p:spPr>
         <p:txBody>
-          <a:bodyPr wrap="square" lIns="45720" tIns="18288" rIns="45720" bIns="18288" anchor="ctr">
+          <a:bodyPr wrap="square" lIns="45720" rIns="45720" tIns="18288" bIns="18288" anchor="ctr">
             <a:spAutoFit/>
           </a:bodyPr>
           <a:lstStyle/>
@@ -18767,7 +18862,7 @@
           <a:noFill/>
         </p:spPr>
         <p:txBody>
-          <a:bodyPr wrap="square" lIns="45720" tIns="18288" rIns="45720" bIns="18288" anchor="ctr">
+          <a:bodyPr wrap="square" lIns="45720" rIns="45720" tIns="18288" bIns="18288" anchor="ctr">
             <a:spAutoFit/>
           </a:bodyPr>
           <a:lstStyle/>
@@ -18806,7 +18901,7 @@
           <a:noFill/>
         </p:spPr>
         <p:txBody>
-          <a:bodyPr wrap="square" lIns="45720" tIns="18288" rIns="45720" bIns="18288" anchor="ctr">
+          <a:bodyPr wrap="square" lIns="45720" rIns="45720" tIns="18288" bIns="18288" anchor="ctr">
             <a:spAutoFit/>
           </a:bodyPr>
           <a:lstStyle/>
@@ -18845,7 +18940,7 @@
           <a:noFill/>
         </p:spPr>
         <p:txBody>
-          <a:bodyPr wrap="square" lIns="45720" tIns="18288" rIns="45720" bIns="18288" anchor="ctr">
+          <a:bodyPr wrap="square" lIns="45720" rIns="45720" tIns="18288" bIns="18288" anchor="ctr">
             <a:spAutoFit/>
           </a:bodyPr>
           <a:lstStyle/>
@@ -18884,7 +18979,7 @@
           <a:noFill/>
         </p:spPr>
         <p:txBody>
-          <a:bodyPr wrap="square" lIns="45720" tIns="18288" rIns="45720" bIns="18288" anchor="ctr">
+          <a:bodyPr wrap="square" lIns="45720" rIns="45720" tIns="18288" bIns="18288" anchor="ctr">
             <a:spAutoFit/>
           </a:bodyPr>
           <a:lstStyle/>
@@ -18945,9 +19040,7 @@
         <p:txBody>
           <a:bodyPr rtlCol="0" anchor="ctr"/>
           <a:lstStyle/>
-          <a:p>
-            <a:endParaRPr/>
-          </a:p>
+          <a:p/>
         </p:txBody>
       </p:sp>
       <p:sp>
@@ -18967,7 +19060,7 @@
           <a:noFill/>
         </p:spPr>
         <p:txBody>
-          <a:bodyPr wrap="square" lIns="45720" tIns="18288" rIns="45720" bIns="18288" anchor="ctr">
+          <a:bodyPr wrap="square" lIns="45720" rIns="45720" tIns="18288" bIns="18288" anchor="ctr">
             <a:spAutoFit/>
           </a:bodyPr>
           <a:lstStyle/>
@@ -19006,7 +19099,7 @@
           <a:noFill/>
         </p:spPr>
         <p:txBody>
-          <a:bodyPr wrap="square" lIns="45720" tIns="18288" rIns="45720" bIns="18288" anchor="ctr">
+          <a:bodyPr wrap="square" lIns="45720" rIns="45720" tIns="18288" bIns="18288" anchor="ctr">
             <a:spAutoFit/>
           </a:bodyPr>
           <a:lstStyle/>
@@ -19045,7 +19138,7 @@
           <a:noFill/>
         </p:spPr>
         <p:txBody>
-          <a:bodyPr wrap="square" lIns="45720" tIns="18288" rIns="45720" bIns="18288" anchor="ctr">
+          <a:bodyPr wrap="square" lIns="45720" rIns="45720" tIns="18288" bIns="18288" anchor="ctr">
             <a:spAutoFit/>
           </a:bodyPr>
           <a:lstStyle/>
@@ -19084,7 +19177,7 @@
           <a:noFill/>
         </p:spPr>
         <p:txBody>
-          <a:bodyPr wrap="square" lIns="45720" tIns="18288" rIns="45720" bIns="18288" anchor="ctr">
+          <a:bodyPr wrap="square" lIns="45720" rIns="45720" tIns="18288" bIns="18288" anchor="ctr">
             <a:spAutoFit/>
           </a:bodyPr>
           <a:lstStyle/>
@@ -19123,7 +19216,7 @@
           <a:noFill/>
         </p:spPr>
         <p:txBody>
-          <a:bodyPr wrap="square" lIns="45720" tIns="18288" rIns="45720" bIns="18288" anchor="ctr">
+          <a:bodyPr wrap="square" lIns="45720" rIns="45720" tIns="18288" bIns="18288" anchor="ctr">
             <a:spAutoFit/>
           </a:bodyPr>
           <a:lstStyle/>
@@ -19162,7 +19255,7 @@
           <a:noFill/>
         </p:spPr>
         <p:txBody>
-          <a:bodyPr wrap="square" lIns="45720" tIns="18288" rIns="45720" bIns="18288" anchor="ctr">
+          <a:bodyPr wrap="square" lIns="45720" rIns="45720" tIns="18288" bIns="18288" anchor="ctr">
             <a:spAutoFit/>
           </a:bodyPr>
           <a:lstStyle/>
@@ -19201,7 +19294,7 @@
           <a:noFill/>
         </p:spPr>
         <p:txBody>
-          <a:bodyPr wrap="square" lIns="45720" tIns="18288" rIns="45720" bIns="18288" anchor="ctr">
+          <a:bodyPr wrap="square" lIns="45720" rIns="45720" tIns="18288" bIns="18288" anchor="ctr">
             <a:spAutoFit/>
           </a:bodyPr>
           <a:lstStyle/>
@@ -19240,7 +19333,7 @@
           <a:noFill/>
         </p:spPr>
         <p:txBody>
-          <a:bodyPr wrap="square" lIns="45720" tIns="18288" rIns="45720" bIns="18288" anchor="ctr">
+          <a:bodyPr wrap="square" lIns="45720" rIns="45720" tIns="18288" bIns="18288" anchor="ctr">
             <a:spAutoFit/>
           </a:bodyPr>
           <a:lstStyle/>
@@ -19279,7 +19372,7 @@
           <a:noFill/>
         </p:spPr>
         <p:txBody>
-          <a:bodyPr wrap="square" lIns="45720" tIns="18288" rIns="45720" bIns="18288" anchor="ctr">
+          <a:bodyPr wrap="square" lIns="45720" rIns="45720" tIns="18288" bIns="18288" anchor="ctr">
             <a:spAutoFit/>
           </a:bodyPr>
           <a:lstStyle/>
@@ -19318,7 +19411,7 @@
           <a:noFill/>
         </p:spPr>
         <p:txBody>
-          <a:bodyPr wrap="square" lIns="45720" tIns="18288" rIns="45720" bIns="18288" anchor="ctr">
+          <a:bodyPr wrap="square" lIns="45720" rIns="45720" tIns="18288" bIns="18288" anchor="ctr">
             <a:spAutoFit/>
           </a:bodyPr>
           <a:lstStyle/>
@@ -19379,9 +19472,7 @@
         <p:txBody>
           <a:bodyPr rtlCol="0" anchor="ctr"/>
           <a:lstStyle/>
-          <a:p>
-            <a:endParaRPr/>
-          </a:p>
+          <a:p/>
         </p:txBody>
       </p:sp>
       <p:sp>
@@ -19401,7 +19492,7 @@
           <a:noFill/>
         </p:spPr>
         <p:txBody>
-          <a:bodyPr wrap="square" lIns="45720" tIns="18288" rIns="45720" bIns="18288" anchor="ctr">
+          <a:bodyPr wrap="square" lIns="45720" rIns="45720" tIns="18288" bIns="18288" anchor="ctr">
             <a:spAutoFit/>
           </a:bodyPr>
           <a:lstStyle/>
@@ -19440,7 +19531,7 @@
           <a:noFill/>
         </p:spPr>
         <p:txBody>
-          <a:bodyPr wrap="square" lIns="45720" tIns="18288" rIns="45720" bIns="18288" anchor="ctr">
+          <a:bodyPr wrap="square" lIns="45720" rIns="45720" tIns="18288" bIns="18288" anchor="ctr">
             <a:spAutoFit/>
           </a:bodyPr>
           <a:lstStyle/>
@@ -19479,7 +19570,7 @@
           <a:noFill/>
         </p:spPr>
         <p:txBody>
-          <a:bodyPr wrap="square" lIns="45720" tIns="18288" rIns="45720" bIns="18288" anchor="ctr">
+          <a:bodyPr wrap="square" lIns="45720" rIns="45720" tIns="18288" bIns="18288" anchor="ctr">
             <a:spAutoFit/>
           </a:bodyPr>
           <a:lstStyle/>
@@ -19518,7 +19609,7 @@
           <a:noFill/>
         </p:spPr>
         <p:txBody>
-          <a:bodyPr wrap="square" lIns="45720" tIns="18288" rIns="45720" bIns="18288" anchor="ctr">
+          <a:bodyPr wrap="square" lIns="45720" rIns="45720" tIns="18288" bIns="18288" anchor="ctr">
             <a:spAutoFit/>
           </a:bodyPr>
           <a:lstStyle/>
@@ -19557,7 +19648,7 @@
           <a:noFill/>
         </p:spPr>
         <p:txBody>
-          <a:bodyPr wrap="square" lIns="45720" tIns="18288" rIns="45720" bIns="18288" anchor="ctr">
+          <a:bodyPr wrap="square" lIns="45720" rIns="45720" tIns="18288" bIns="18288" anchor="ctr">
             <a:spAutoFit/>
           </a:bodyPr>
           <a:lstStyle/>
@@ -19620,9 +19711,7 @@
         <p:txBody>
           <a:bodyPr rtlCol="0" anchor="ctr"/>
           <a:lstStyle/>
-          <a:p>
-            <a:endParaRPr/>
-          </a:p>
+          <a:p/>
         </p:txBody>
       </p:sp>
       <p:sp>
@@ -19642,7 +19731,7 @@
           <a:noFill/>
         </p:spPr>
         <p:txBody>
-          <a:bodyPr wrap="square" lIns="45720" tIns="18288" rIns="45720" bIns="18288" anchor="t">
+          <a:bodyPr wrap="square" lIns="45720" rIns="45720" tIns="18288" bIns="18288" anchor="t">
             <a:spAutoFit/>
           </a:bodyPr>
           <a:lstStyle/>
@@ -19681,7 +19770,7 @@
           <a:noFill/>
         </p:spPr>
         <p:txBody>
-          <a:bodyPr wrap="square" lIns="45720" tIns="18288" rIns="45720" bIns="18288" anchor="t">
+          <a:bodyPr wrap="square" lIns="45720" rIns="45720" tIns="18288" bIns="18288" anchor="t">
             <a:spAutoFit/>
           </a:bodyPr>
           <a:lstStyle/>
@@ -19720,7 +19809,7 @@
           <a:noFill/>
         </p:spPr>
         <p:txBody>
-          <a:bodyPr wrap="square" lIns="45720" tIns="18288" rIns="45720" bIns="18288" anchor="t">
+          <a:bodyPr wrap="square" lIns="45720" rIns="45720" tIns="18288" bIns="18288" anchor="t">
             <a:spAutoFit/>
           </a:bodyPr>
           <a:lstStyle/>
@@ -19751,7 +19840,7 @@
 </file>
 
 <file path=ppt/slides/slide7.xml><?xml version="1.0" encoding="utf-8"?>
-<p:sld xmlns:a="http://schemas.openxmlformats.org/drawingml/2006/main" xmlns:r="http://schemas.openxmlformats.org/officeDocument/2006/relationships" xmlns:p="http://schemas.openxmlformats.org/presentationml/2006/main">
+<p:sld xmlns:a="http://schemas.openxmlformats.org/drawingml/2006/main" xmlns:p="http://schemas.openxmlformats.org/presentationml/2006/main" xmlns:r="http://schemas.openxmlformats.org/officeDocument/2006/relationships">
   <p:cSld>
     <p:spTree>
       <p:nvGrpSpPr>
@@ -19759,14 +19848,7 @@
         <p:cNvGrpSpPr/>
         <p:nvPr/>
       </p:nvGrpSpPr>
-      <p:grpSpPr>
-        <a:xfrm>
-          <a:off x="0" y="0"/>
-          <a:ext cx="0" cy="0"/>
-          <a:chOff x="0" y="0"/>
-          <a:chExt cx="0" cy="0"/>
-        </a:xfrm>
-      </p:grpSpPr>
+      <p:grpSpPr/>
       <p:sp>
         <p:nvSpPr>
           <p:cNvPr id="2" name="TextBox 1"/>
@@ -19784,7 +19866,7 @@
           <a:noFill/>
         </p:spPr>
         <p:txBody>
-          <a:bodyPr wrap="square" lIns="45720" tIns="18288" rIns="45720" bIns="18288" anchor="t">
+          <a:bodyPr wrap="square" lIns="45720" rIns="45720" tIns="18288" bIns="18288" anchor="t">
             <a:spAutoFit/>
           </a:bodyPr>
           <a:lstStyle/>
@@ -19823,7 +19905,7 @@
           <a:noFill/>
         </p:spPr>
         <p:txBody>
-          <a:bodyPr wrap="square" lIns="45720" tIns="18288" rIns="45720" bIns="18288" anchor="t">
+          <a:bodyPr wrap="square" lIns="45720" rIns="45720" tIns="18288" bIns="18288" anchor="t">
             <a:spAutoFit/>
           </a:bodyPr>
           <a:lstStyle/>
@@ -19886,9 +19968,7 @@
         <p:txBody>
           <a:bodyPr rtlCol="0" anchor="ctr"/>
           <a:lstStyle/>
-          <a:p>
-            <a:endParaRPr/>
-          </a:p>
+          <a:p/>
         </p:txBody>
       </p:sp>
       <p:sp>
@@ -19908,7 +19988,7 @@
           <a:noFill/>
         </p:spPr>
         <p:txBody>
-          <a:bodyPr wrap="square" lIns="45720" tIns="18288" rIns="45720" bIns="18288" anchor="ctr">
+          <a:bodyPr wrap="square" lIns="45720" rIns="45720" tIns="18288" bIns="18288" anchor="ctr">
             <a:spAutoFit/>
           </a:bodyPr>
           <a:lstStyle/>
@@ -19947,7 +20027,7 @@
           <a:noFill/>
         </p:spPr>
         <p:txBody>
-          <a:bodyPr wrap="square" lIns="45720" tIns="18288" rIns="45720" bIns="18288" anchor="ctr">
+          <a:bodyPr wrap="square" lIns="45720" rIns="45720" tIns="18288" bIns="18288" anchor="ctr">
             <a:spAutoFit/>
           </a:bodyPr>
           <a:lstStyle/>
@@ -19986,7 +20066,7 @@
           <a:noFill/>
         </p:spPr>
         <p:txBody>
-          <a:bodyPr wrap="square" lIns="45720" tIns="18288" rIns="45720" bIns="18288" anchor="ctr">
+          <a:bodyPr wrap="square" lIns="45720" rIns="45720" tIns="18288" bIns="18288" anchor="ctr">
             <a:spAutoFit/>
           </a:bodyPr>
           <a:lstStyle/>
@@ -20025,7 +20105,7 @@
           <a:noFill/>
         </p:spPr>
         <p:txBody>
-          <a:bodyPr wrap="square" lIns="45720" tIns="18288" rIns="45720" bIns="18288" anchor="ctr">
+          <a:bodyPr wrap="square" lIns="45720" rIns="45720" tIns="18288" bIns="18288" anchor="ctr">
             <a:spAutoFit/>
           </a:bodyPr>
           <a:lstStyle/>
@@ -20086,9 +20166,7 @@
         <p:txBody>
           <a:bodyPr rtlCol="0" anchor="ctr"/>
           <a:lstStyle/>
-          <a:p>
-            <a:endParaRPr/>
-          </a:p>
+          <a:p/>
         </p:txBody>
       </p:sp>
       <p:sp>
@@ -20108,7 +20186,7 @@
           <a:noFill/>
         </p:spPr>
         <p:txBody>
-          <a:bodyPr wrap="square" lIns="45720" tIns="18288" rIns="45720" bIns="18288" anchor="ctr">
+          <a:bodyPr wrap="square" lIns="45720" rIns="45720" tIns="18288" bIns="18288" anchor="ctr">
             <a:spAutoFit/>
           </a:bodyPr>
           <a:lstStyle/>
@@ -20147,7 +20225,7 @@
           <a:noFill/>
         </p:spPr>
         <p:txBody>
-          <a:bodyPr wrap="square" lIns="45720" tIns="18288" rIns="45720" bIns="18288" anchor="ctr">
+          <a:bodyPr wrap="square" lIns="45720" rIns="45720" tIns="18288" bIns="18288" anchor="ctr">
             <a:spAutoFit/>
           </a:bodyPr>
           <a:lstStyle/>
@@ -20186,7 +20264,7 @@
           <a:noFill/>
         </p:spPr>
         <p:txBody>
-          <a:bodyPr wrap="square" lIns="45720" tIns="18288" rIns="45720" bIns="18288" anchor="ctr">
+          <a:bodyPr wrap="square" lIns="45720" rIns="45720" tIns="18288" bIns="18288" anchor="ctr">
             <a:spAutoFit/>
           </a:bodyPr>
           <a:lstStyle/>
@@ -20225,7 +20303,7 @@
           <a:noFill/>
         </p:spPr>
         <p:txBody>
-          <a:bodyPr wrap="square" lIns="45720" tIns="18288" rIns="45720" bIns="18288" anchor="ctr">
+          <a:bodyPr wrap="square" lIns="45720" rIns="45720" tIns="18288" bIns="18288" anchor="ctr">
             <a:spAutoFit/>
           </a:bodyPr>
           <a:lstStyle/>
@@ -20264,7 +20342,7 @@
           <a:noFill/>
         </p:spPr>
         <p:txBody>
-          <a:bodyPr wrap="square" lIns="45720" tIns="18288" rIns="45720" bIns="18288" anchor="ctr">
+          <a:bodyPr wrap="square" lIns="45720" rIns="45720" tIns="18288" bIns="18288" anchor="ctr">
             <a:spAutoFit/>
           </a:bodyPr>
           <a:lstStyle/>
@@ -20303,7 +20381,7 @@
           <a:noFill/>
         </p:spPr>
         <p:txBody>
-          <a:bodyPr wrap="square" lIns="45720" tIns="18288" rIns="45720" bIns="18288" anchor="ctr">
+          <a:bodyPr wrap="square" lIns="45720" rIns="45720" tIns="18288" bIns="18288" anchor="ctr">
             <a:spAutoFit/>
           </a:bodyPr>
           <a:lstStyle/>
@@ -20342,7 +20420,7 @@
           <a:noFill/>
         </p:spPr>
         <p:txBody>
-          <a:bodyPr wrap="square" lIns="45720" tIns="18288" rIns="45720" bIns="18288" anchor="ctr">
+          <a:bodyPr wrap="square" lIns="45720" rIns="45720" tIns="18288" bIns="18288" anchor="ctr">
             <a:spAutoFit/>
           </a:bodyPr>
           <a:lstStyle/>
@@ -20381,7 +20459,7 @@
           <a:noFill/>
         </p:spPr>
         <p:txBody>
-          <a:bodyPr wrap="square" lIns="45720" tIns="18288" rIns="45720" bIns="18288" anchor="ctr">
+          <a:bodyPr wrap="square" lIns="45720" rIns="45720" tIns="18288" bIns="18288" anchor="ctr">
             <a:spAutoFit/>
           </a:bodyPr>
           <a:lstStyle/>
@@ -20442,9 +20520,7 @@
         <p:txBody>
           <a:bodyPr rtlCol="0" anchor="ctr"/>
           <a:lstStyle/>
-          <a:p>
-            <a:endParaRPr/>
-          </a:p>
+          <a:p/>
         </p:txBody>
       </p:sp>
       <p:sp>
@@ -20464,7 +20540,7 @@
           <a:noFill/>
         </p:spPr>
         <p:txBody>
-          <a:bodyPr wrap="square" lIns="45720" tIns="18288" rIns="45720" bIns="18288" anchor="ctr">
+          <a:bodyPr wrap="square" lIns="45720" rIns="45720" tIns="18288" bIns="18288" anchor="ctr">
             <a:spAutoFit/>
           </a:bodyPr>
           <a:lstStyle/>
@@ -20503,7 +20579,7 @@
           <a:noFill/>
         </p:spPr>
         <p:txBody>
-          <a:bodyPr wrap="square" lIns="45720" tIns="18288" rIns="45720" bIns="18288" anchor="ctr">
+          <a:bodyPr wrap="square" lIns="45720" rIns="45720" tIns="18288" bIns="18288" anchor="ctr">
             <a:spAutoFit/>
           </a:bodyPr>
           <a:lstStyle/>
@@ -20542,7 +20618,7 @@
           <a:noFill/>
         </p:spPr>
         <p:txBody>
-          <a:bodyPr wrap="square" lIns="45720" tIns="18288" rIns="45720" bIns="18288" anchor="ctr">
+          <a:bodyPr wrap="square" lIns="45720" rIns="45720" tIns="18288" bIns="18288" anchor="ctr">
             <a:spAutoFit/>
           </a:bodyPr>
           <a:lstStyle/>
@@ -20581,7 +20657,7 @@
           <a:noFill/>
         </p:spPr>
         <p:txBody>
-          <a:bodyPr wrap="square" lIns="45720" tIns="18288" rIns="45720" bIns="18288" anchor="ctr">
+          <a:bodyPr wrap="square" lIns="45720" rIns="45720" tIns="18288" bIns="18288" anchor="ctr">
             <a:spAutoFit/>
           </a:bodyPr>
           <a:lstStyle/>
@@ -20644,9 +20720,7 @@
         <p:txBody>
           <a:bodyPr rtlCol="0" anchor="ctr"/>
           <a:lstStyle/>
-          <a:p>
-            <a:endParaRPr/>
-          </a:p>
+          <a:p/>
         </p:txBody>
       </p:sp>
       <p:sp>
@@ -20666,7 +20740,7 @@
           <a:noFill/>
         </p:spPr>
         <p:txBody>
-          <a:bodyPr wrap="square" lIns="45720" tIns="18288" rIns="45720" bIns="18288" anchor="t">
+          <a:bodyPr wrap="square" lIns="45720" rIns="45720" tIns="18288" bIns="18288" anchor="t">
             <a:spAutoFit/>
           </a:bodyPr>
           <a:lstStyle/>
@@ -20705,7 +20779,7 @@
           <a:noFill/>
         </p:spPr>
         <p:txBody>
-          <a:bodyPr wrap="square" lIns="45720" tIns="18288" rIns="45720" bIns="18288" anchor="t">
+          <a:bodyPr wrap="square" lIns="45720" rIns="45720" tIns="18288" bIns="18288" anchor="t">
             <a:spAutoFit/>
           </a:bodyPr>
           <a:lstStyle/>
@@ -20768,9 +20842,7 @@
         <p:txBody>
           <a:bodyPr rtlCol="0" anchor="ctr"/>
           <a:lstStyle/>
-          <a:p>
-            <a:endParaRPr/>
-          </a:p>
+          <a:p/>
         </p:txBody>
       </p:sp>
       <p:sp>
@@ -20790,7 +20862,7 @@
           <a:noFill/>
         </p:spPr>
         <p:txBody>
-          <a:bodyPr wrap="square" lIns="45720" tIns="18288" rIns="45720" bIns="18288" anchor="t">
+          <a:bodyPr wrap="square" lIns="45720" rIns="45720" tIns="18288" bIns="18288" anchor="t">
             <a:spAutoFit/>
           </a:bodyPr>
           <a:lstStyle/>
@@ -20829,7 +20901,7 @@
           <a:noFill/>
         </p:spPr>
         <p:txBody>
-          <a:bodyPr wrap="square" lIns="45720" tIns="18288" rIns="45720" bIns="18288" anchor="t">
+          <a:bodyPr wrap="square" lIns="45720" rIns="45720" tIns="18288" bIns="18288" anchor="t">
             <a:spAutoFit/>
           </a:bodyPr>
           <a:lstStyle/>
@@ -20868,7 +20940,7 @@
           <a:noFill/>
         </p:spPr>
         <p:txBody>
-          <a:bodyPr wrap="square" lIns="45720" tIns="18288" rIns="45720" bIns="18288" anchor="t">
+          <a:bodyPr wrap="square" lIns="45720" rIns="45720" tIns="18288" bIns="18288" anchor="t">
             <a:spAutoFit/>
           </a:bodyPr>
           <a:lstStyle/>
@@ -20907,7 +20979,7 @@
           <a:noFill/>
         </p:spPr>
         <p:txBody>
-          <a:bodyPr wrap="square" lIns="45720" tIns="18288" rIns="45720" bIns="18288" anchor="t">
+          <a:bodyPr wrap="square" lIns="45720" rIns="45720" tIns="18288" bIns="18288" anchor="t">
             <a:spAutoFit/>
           </a:bodyPr>
           <a:lstStyle/>
@@ -20938,7 +21010,7 @@
 </file>
 
 <file path=ppt/slides/slide8.xml><?xml version="1.0" encoding="utf-8"?>
-<p:sld xmlns:a="http://schemas.openxmlformats.org/drawingml/2006/main" xmlns:r="http://schemas.openxmlformats.org/officeDocument/2006/relationships" xmlns:p="http://schemas.openxmlformats.org/presentationml/2006/main">
+<p:sld xmlns:a="http://schemas.openxmlformats.org/drawingml/2006/main" xmlns:p="http://schemas.openxmlformats.org/presentationml/2006/main" xmlns:r="http://schemas.openxmlformats.org/officeDocument/2006/relationships">
   <p:cSld>
     <p:spTree>
       <p:nvGrpSpPr>
@@ -20946,14 +21018,7 @@
         <p:cNvGrpSpPr/>
         <p:nvPr/>
       </p:nvGrpSpPr>
-      <p:grpSpPr>
-        <a:xfrm>
-          <a:off x="0" y="0"/>
-          <a:ext cx="0" cy="0"/>
-          <a:chOff x="0" y="0"/>
-          <a:chExt cx="0" cy="0"/>
-        </a:xfrm>
-      </p:grpSpPr>
+      <p:grpSpPr/>
       <p:sp>
         <p:nvSpPr>
           <p:cNvPr id="2" name="TextBox 1"/>
@@ -20971,7 +21036,7 @@
           <a:noFill/>
         </p:spPr>
         <p:txBody>
-          <a:bodyPr wrap="square" lIns="45720" tIns="18288" rIns="45720" bIns="18288" anchor="t">
+          <a:bodyPr wrap="square" lIns="45720" rIns="45720" tIns="18288" bIns="18288" anchor="t">
             <a:spAutoFit/>
           </a:bodyPr>
           <a:lstStyle/>
@@ -21010,7 +21075,7 @@
           <a:noFill/>
         </p:spPr>
         <p:txBody>
-          <a:bodyPr wrap="square" lIns="45720" tIns="18288" rIns="45720" bIns="18288" anchor="t">
+          <a:bodyPr wrap="square" lIns="45720" rIns="45720" tIns="18288" bIns="18288" anchor="t">
             <a:spAutoFit/>
           </a:bodyPr>
           <a:lstStyle/>
@@ -21073,9 +21138,7 @@
         <p:txBody>
           <a:bodyPr rtlCol="0" anchor="ctr"/>
           <a:lstStyle/>
-          <a:p>
-            <a:endParaRPr/>
-          </a:p>
+          <a:p/>
         </p:txBody>
       </p:sp>
       <p:sp>
@@ -21095,7 +21158,7 @@
           <a:noFill/>
         </p:spPr>
         <p:txBody>
-          <a:bodyPr wrap="square" lIns="45720" tIns="18288" rIns="45720" bIns="18288" anchor="ctr">
+          <a:bodyPr wrap="square" lIns="45720" rIns="45720" tIns="18288" bIns="18288" anchor="ctr">
             <a:spAutoFit/>
           </a:bodyPr>
           <a:lstStyle/>
@@ -21134,7 +21197,7 @@
           <a:noFill/>
         </p:spPr>
         <p:txBody>
-          <a:bodyPr wrap="square" lIns="45720" tIns="18288" rIns="45720" bIns="18288" anchor="ctr">
+          <a:bodyPr wrap="square" lIns="45720" rIns="45720" tIns="18288" bIns="18288" anchor="ctr">
             <a:spAutoFit/>
           </a:bodyPr>
           <a:lstStyle/>
@@ -21173,7 +21236,7 @@
           <a:noFill/>
         </p:spPr>
         <p:txBody>
-          <a:bodyPr wrap="square" lIns="45720" tIns="18288" rIns="45720" bIns="18288" anchor="ctr">
+          <a:bodyPr wrap="square" lIns="45720" rIns="45720" tIns="18288" bIns="18288" anchor="ctr">
             <a:spAutoFit/>
           </a:bodyPr>
           <a:lstStyle/>
@@ -21212,7 +21275,7 @@
           <a:noFill/>
         </p:spPr>
         <p:txBody>
-          <a:bodyPr wrap="square" lIns="45720" tIns="18288" rIns="45720" bIns="18288" anchor="ctr">
+          <a:bodyPr wrap="square" lIns="45720" rIns="45720" tIns="18288" bIns="18288" anchor="ctr">
             <a:spAutoFit/>
           </a:bodyPr>
           <a:lstStyle/>
@@ -21251,7 +21314,7 @@
           <a:noFill/>
         </p:spPr>
         <p:txBody>
-          <a:bodyPr wrap="square" lIns="45720" tIns="18288" rIns="45720" bIns="18288" anchor="ctr">
+          <a:bodyPr wrap="square" lIns="45720" rIns="45720" tIns="18288" bIns="18288" anchor="ctr">
             <a:spAutoFit/>
           </a:bodyPr>
           <a:lstStyle/>
@@ -21290,7 +21353,7 @@
           <a:noFill/>
         </p:spPr>
         <p:txBody>
-          <a:bodyPr wrap="square" lIns="45720" tIns="18288" rIns="45720" bIns="18288" anchor="ctr">
+          <a:bodyPr wrap="square" lIns="45720" rIns="45720" tIns="18288" bIns="18288" anchor="ctr">
             <a:spAutoFit/>
           </a:bodyPr>
           <a:lstStyle/>
@@ -21329,7 +21392,7 @@
           <a:noFill/>
         </p:spPr>
         <p:txBody>
-          <a:bodyPr wrap="square" lIns="45720" tIns="18288" rIns="45720" bIns="18288" anchor="ctr">
+          <a:bodyPr wrap="square" lIns="45720" rIns="45720" tIns="18288" bIns="18288" anchor="ctr">
             <a:spAutoFit/>
           </a:bodyPr>
           <a:lstStyle/>
@@ -21368,7 +21431,7 @@
           <a:noFill/>
         </p:spPr>
         <p:txBody>
-          <a:bodyPr wrap="square" lIns="45720" tIns="18288" rIns="45720" bIns="18288" anchor="ctr">
+          <a:bodyPr wrap="square" lIns="45720" rIns="45720" tIns="18288" bIns="18288" anchor="ctr">
             <a:spAutoFit/>
           </a:bodyPr>
           <a:lstStyle/>
@@ -21429,9 +21492,7 @@
         <p:txBody>
           <a:bodyPr rtlCol="0" anchor="ctr"/>
           <a:lstStyle/>
-          <a:p>
-            <a:endParaRPr/>
-          </a:p>
+          <a:p/>
         </p:txBody>
       </p:sp>
       <p:sp>
@@ -21451,7 +21512,7 @@
           <a:noFill/>
         </p:spPr>
         <p:txBody>
-          <a:bodyPr wrap="square" lIns="45720" tIns="18288" rIns="45720" bIns="18288" anchor="ctr">
+          <a:bodyPr wrap="square" lIns="45720" rIns="45720" tIns="18288" bIns="18288" anchor="ctr">
             <a:spAutoFit/>
           </a:bodyPr>
           <a:lstStyle/>
@@ -21490,7 +21551,7 @@
           <a:noFill/>
         </p:spPr>
         <p:txBody>
-          <a:bodyPr wrap="square" lIns="45720" tIns="18288" rIns="45720" bIns="18288" anchor="ctr">
+          <a:bodyPr wrap="square" lIns="45720" rIns="45720" tIns="18288" bIns="18288" anchor="ctr">
             <a:spAutoFit/>
           </a:bodyPr>
           <a:lstStyle/>
@@ -21529,7 +21590,7 @@
           <a:noFill/>
         </p:spPr>
         <p:txBody>
-          <a:bodyPr wrap="square" lIns="45720" tIns="18288" rIns="45720" bIns="18288" anchor="ctr">
+          <a:bodyPr wrap="square" lIns="45720" rIns="45720" tIns="18288" bIns="18288" anchor="ctr">
             <a:spAutoFit/>
           </a:bodyPr>
           <a:lstStyle/>
@@ -21568,7 +21629,7 @@
           <a:noFill/>
         </p:spPr>
         <p:txBody>
-          <a:bodyPr wrap="square" lIns="45720" tIns="18288" rIns="45720" bIns="18288" anchor="ctr">
+          <a:bodyPr wrap="square" lIns="45720" rIns="45720" tIns="18288" bIns="18288" anchor="ctr">
             <a:spAutoFit/>
           </a:bodyPr>
           <a:lstStyle/>
@@ -21607,7 +21668,7 @@
           <a:noFill/>
         </p:spPr>
         <p:txBody>
-          <a:bodyPr wrap="square" lIns="45720" tIns="18288" rIns="45720" bIns="18288" anchor="ctr">
+          <a:bodyPr wrap="square" lIns="45720" rIns="45720" tIns="18288" bIns="18288" anchor="ctr">
             <a:spAutoFit/>
           </a:bodyPr>
           <a:lstStyle/>
@@ -21646,7 +21707,7 @@
           <a:noFill/>
         </p:spPr>
         <p:txBody>
-          <a:bodyPr wrap="square" lIns="45720" tIns="18288" rIns="45720" bIns="18288" anchor="ctr">
+          <a:bodyPr wrap="square" lIns="45720" rIns="45720" tIns="18288" bIns="18288" anchor="ctr">
             <a:spAutoFit/>
           </a:bodyPr>
           <a:lstStyle/>
@@ -21685,7 +21746,7 @@
           <a:noFill/>
         </p:spPr>
         <p:txBody>
-          <a:bodyPr wrap="square" lIns="45720" tIns="18288" rIns="45720" bIns="18288" anchor="ctr">
+          <a:bodyPr wrap="square" lIns="45720" rIns="45720" tIns="18288" bIns="18288" anchor="ctr">
             <a:spAutoFit/>
           </a:bodyPr>
           <a:lstStyle/>
@@ -21724,7 +21785,7 @@
           <a:noFill/>
         </p:spPr>
         <p:txBody>
-          <a:bodyPr wrap="square" lIns="45720" tIns="18288" rIns="45720" bIns="18288" anchor="ctr">
+          <a:bodyPr wrap="square" lIns="45720" rIns="45720" tIns="18288" bIns="18288" anchor="ctr">
             <a:spAutoFit/>
           </a:bodyPr>
           <a:lstStyle/>
@@ -21763,7 +21824,7 @@
           <a:noFill/>
         </p:spPr>
         <p:txBody>
-          <a:bodyPr wrap="square" lIns="45720" tIns="18288" rIns="45720" bIns="18288" anchor="ctr">
+          <a:bodyPr wrap="square" lIns="45720" rIns="45720" tIns="18288" bIns="18288" anchor="ctr">
             <a:spAutoFit/>
           </a:bodyPr>
           <a:lstStyle/>
@@ -21802,7 +21863,7 @@
           <a:noFill/>
         </p:spPr>
         <p:txBody>
-          <a:bodyPr wrap="square" lIns="45720" tIns="18288" rIns="45720" bIns="18288" anchor="ctr">
+          <a:bodyPr wrap="square" lIns="45720" rIns="45720" tIns="18288" bIns="18288" anchor="ctr">
             <a:spAutoFit/>
           </a:bodyPr>
           <a:lstStyle/>
@@ -21841,7 +21902,7 @@
           <a:noFill/>
         </p:spPr>
         <p:txBody>
-          <a:bodyPr wrap="square" lIns="45720" tIns="18288" rIns="45720" bIns="18288" anchor="ctr">
+          <a:bodyPr wrap="square" lIns="45720" rIns="45720" tIns="18288" bIns="18288" anchor="ctr">
             <a:spAutoFit/>
           </a:bodyPr>
           <a:lstStyle/>
@@ -21880,7 +21941,7 @@
           <a:noFill/>
         </p:spPr>
         <p:txBody>
-          <a:bodyPr wrap="square" lIns="45720" tIns="18288" rIns="45720" bIns="18288" anchor="ctr">
+          <a:bodyPr wrap="square" lIns="45720" rIns="45720" tIns="18288" bIns="18288" anchor="ctr">
             <a:spAutoFit/>
           </a:bodyPr>
           <a:lstStyle/>
@@ -21919,7 +21980,7 @@
           <a:noFill/>
         </p:spPr>
         <p:txBody>
-          <a:bodyPr wrap="square" lIns="45720" tIns="18288" rIns="45720" bIns="18288" anchor="ctr">
+          <a:bodyPr wrap="square" lIns="45720" rIns="45720" tIns="18288" bIns="18288" anchor="ctr">
             <a:spAutoFit/>
           </a:bodyPr>
           <a:lstStyle/>
@@ -21958,7 +22019,7 @@
           <a:noFill/>
         </p:spPr>
         <p:txBody>
-          <a:bodyPr wrap="square" lIns="45720" tIns="18288" rIns="45720" bIns="18288" anchor="ctr">
+          <a:bodyPr wrap="square" lIns="45720" rIns="45720" tIns="18288" bIns="18288" anchor="ctr">
             <a:spAutoFit/>
           </a:bodyPr>
           <a:lstStyle/>
@@ -21997,7 +22058,7 @@
           <a:noFill/>
         </p:spPr>
         <p:txBody>
-          <a:bodyPr wrap="square" lIns="45720" tIns="18288" rIns="45720" bIns="18288" anchor="ctr">
+          <a:bodyPr wrap="square" lIns="45720" rIns="45720" tIns="18288" bIns="18288" anchor="ctr">
             <a:spAutoFit/>
           </a:bodyPr>
           <a:lstStyle/>
@@ -22036,7 +22097,7 @@
           <a:noFill/>
         </p:spPr>
         <p:txBody>
-          <a:bodyPr wrap="square" lIns="45720" tIns="18288" rIns="45720" bIns="18288" anchor="ctr">
+          <a:bodyPr wrap="square" lIns="45720" rIns="45720" tIns="18288" bIns="18288" anchor="ctr">
             <a:spAutoFit/>
           </a:bodyPr>
           <a:lstStyle/>
@@ -22097,9 +22158,7 @@
         <p:txBody>
           <a:bodyPr rtlCol="0" anchor="ctr"/>
           <a:lstStyle/>
-          <a:p>
-            <a:endParaRPr/>
-          </a:p>
+          <a:p/>
         </p:txBody>
       </p:sp>
       <p:sp>
@@ -22119,7 +22178,7 @@
           <a:noFill/>
         </p:spPr>
         <p:txBody>
-          <a:bodyPr wrap="square" lIns="45720" tIns="18288" rIns="45720" bIns="18288" anchor="ctr">
+          <a:bodyPr wrap="square" lIns="45720" rIns="45720" tIns="18288" bIns="18288" anchor="ctr">
             <a:spAutoFit/>
           </a:bodyPr>
           <a:lstStyle/>
@@ -22158,7 +22217,7 @@
           <a:noFill/>
         </p:spPr>
         <p:txBody>
-          <a:bodyPr wrap="square" lIns="45720" tIns="18288" rIns="45720" bIns="18288" anchor="ctr">
+          <a:bodyPr wrap="square" lIns="45720" rIns="45720" tIns="18288" bIns="18288" anchor="ctr">
             <a:spAutoFit/>
           </a:bodyPr>
           <a:lstStyle/>
@@ -22197,7 +22256,7 @@
           <a:noFill/>
         </p:spPr>
         <p:txBody>
-          <a:bodyPr wrap="square" lIns="45720" tIns="18288" rIns="45720" bIns="18288" anchor="ctr">
+          <a:bodyPr wrap="square" lIns="45720" rIns="45720" tIns="18288" bIns="18288" anchor="ctr">
             <a:spAutoFit/>
           </a:bodyPr>
           <a:lstStyle/>
@@ -22236,7 +22295,7 @@
           <a:noFill/>
         </p:spPr>
         <p:txBody>
-          <a:bodyPr wrap="square" lIns="45720" tIns="18288" rIns="45720" bIns="18288" anchor="ctr">
+          <a:bodyPr wrap="square" lIns="45720" rIns="45720" tIns="18288" bIns="18288" anchor="ctr">
             <a:spAutoFit/>
           </a:bodyPr>
           <a:lstStyle/>
@@ -22275,7 +22334,7 @@
           <a:noFill/>
         </p:spPr>
         <p:txBody>
-          <a:bodyPr wrap="square" lIns="45720" tIns="18288" rIns="45720" bIns="18288" anchor="ctr">
+          <a:bodyPr wrap="square" lIns="45720" rIns="45720" tIns="18288" bIns="18288" anchor="ctr">
             <a:spAutoFit/>
           </a:bodyPr>
           <a:lstStyle/>
@@ -22314,7 +22373,7 @@
           <a:noFill/>
         </p:spPr>
         <p:txBody>
-          <a:bodyPr wrap="square" lIns="45720" tIns="18288" rIns="45720" bIns="18288" anchor="ctr">
+          <a:bodyPr wrap="square" lIns="45720" rIns="45720" tIns="18288" bIns="18288" anchor="ctr">
             <a:spAutoFit/>
           </a:bodyPr>
           <a:lstStyle/>
@@ -22353,7 +22412,7 @@
           <a:noFill/>
         </p:spPr>
         <p:txBody>
-          <a:bodyPr wrap="square" lIns="45720" tIns="18288" rIns="45720" bIns="18288" anchor="ctr">
+          <a:bodyPr wrap="square" lIns="45720" rIns="45720" tIns="18288" bIns="18288" anchor="ctr">
             <a:spAutoFit/>
           </a:bodyPr>
           <a:lstStyle/>
@@ -22392,7 +22451,7 @@
           <a:noFill/>
         </p:spPr>
         <p:txBody>
-          <a:bodyPr wrap="square" lIns="45720" tIns="18288" rIns="45720" bIns="18288" anchor="ctr">
+          <a:bodyPr wrap="square" lIns="45720" rIns="45720" tIns="18288" bIns="18288" anchor="ctr">
             <a:spAutoFit/>
           </a:bodyPr>
           <a:lstStyle/>
@@ -22431,7 +22490,7 @@
           <a:noFill/>
         </p:spPr>
         <p:txBody>
-          <a:bodyPr wrap="square" lIns="45720" tIns="18288" rIns="45720" bIns="18288" anchor="ctr">
+          <a:bodyPr wrap="square" lIns="45720" rIns="45720" tIns="18288" bIns="18288" anchor="ctr">
             <a:spAutoFit/>
           </a:bodyPr>
           <a:lstStyle/>
@@ -22470,7 +22529,7 @@
           <a:noFill/>
         </p:spPr>
         <p:txBody>
-          <a:bodyPr wrap="square" lIns="45720" tIns="18288" rIns="45720" bIns="18288" anchor="ctr">
+          <a:bodyPr wrap="square" lIns="45720" rIns="45720" tIns="18288" bIns="18288" anchor="ctr">
             <a:spAutoFit/>
           </a:bodyPr>
           <a:lstStyle/>
@@ -22509,7 +22568,7 @@
           <a:noFill/>
         </p:spPr>
         <p:txBody>
-          <a:bodyPr wrap="square" lIns="45720" tIns="18288" rIns="45720" bIns="18288" anchor="ctr">
+          <a:bodyPr wrap="square" lIns="45720" rIns="45720" tIns="18288" bIns="18288" anchor="ctr">
             <a:spAutoFit/>
           </a:bodyPr>
           <a:lstStyle/>
@@ -22548,7 +22607,7 @@
           <a:noFill/>
         </p:spPr>
         <p:txBody>
-          <a:bodyPr wrap="square" lIns="45720" tIns="18288" rIns="45720" bIns="18288" anchor="ctr">
+          <a:bodyPr wrap="square" lIns="45720" rIns="45720" tIns="18288" bIns="18288" anchor="ctr">
             <a:spAutoFit/>
           </a:bodyPr>
           <a:lstStyle/>
@@ -22587,7 +22646,7 @@
           <a:noFill/>
         </p:spPr>
         <p:txBody>
-          <a:bodyPr wrap="square" lIns="45720" tIns="18288" rIns="45720" bIns="18288" anchor="ctr">
+          <a:bodyPr wrap="square" lIns="45720" rIns="45720" tIns="18288" bIns="18288" anchor="ctr">
             <a:spAutoFit/>
           </a:bodyPr>
           <a:lstStyle/>
@@ -22626,7 +22685,7 @@
           <a:noFill/>
         </p:spPr>
         <p:txBody>
-          <a:bodyPr wrap="square" lIns="45720" tIns="18288" rIns="45720" bIns="18288" anchor="ctr">
+          <a:bodyPr wrap="square" lIns="45720" rIns="45720" tIns="18288" bIns="18288" anchor="ctr">
             <a:spAutoFit/>
           </a:bodyPr>
           <a:lstStyle/>
@@ -22665,7 +22724,7 @@
           <a:noFill/>
         </p:spPr>
         <p:txBody>
-          <a:bodyPr wrap="square" lIns="45720" tIns="18288" rIns="45720" bIns="18288" anchor="ctr">
+          <a:bodyPr wrap="square" lIns="45720" rIns="45720" tIns="18288" bIns="18288" anchor="ctr">
             <a:spAutoFit/>
           </a:bodyPr>
           <a:lstStyle/>
@@ -22704,7 +22763,7 @@
           <a:noFill/>
         </p:spPr>
         <p:txBody>
-          <a:bodyPr wrap="square" lIns="45720" tIns="18288" rIns="45720" bIns="18288" anchor="ctr">
+          <a:bodyPr wrap="square" lIns="45720" rIns="45720" tIns="18288" bIns="18288" anchor="ctr">
             <a:spAutoFit/>
           </a:bodyPr>
           <a:lstStyle/>
@@ -22734,7 +22793,7 @@
         </p:nvSpPr>
         <p:spPr>
           <a:xfrm>
-            <a:off x="566928" y="3662690"/>
+            <a:off x="566928" y="3072384"/>
             <a:ext cx="5364327" cy="1316736"/>
           </a:xfrm>
           <a:prstGeom prst="roundRect">
@@ -22767,9 +22826,7 @@
         <p:txBody>
           <a:bodyPr rtlCol="0" anchor="ctr"/>
           <a:lstStyle/>
-          <a:p>
-            <a:endParaRPr/>
-          </a:p>
+          <a:p/>
         </p:txBody>
       </p:sp>
       <p:sp>
@@ -22780,7 +22837,7 @@
         </p:nvSpPr>
         <p:spPr>
           <a:xfrm>
-            <a:off x="822960" y="3772418"/>
+            <a:off x="822960" y="3182112"/>
             <a:ext cx="4852263" cy="274320"/>
           </a:xfrm>
           <a:prstGeom prst="rect">
@@ -22789,7 +22846,7 @@
           <a:noFill/>
         </p:spPr>
         <p:txBody>
-          <a:bodyPr wrap="square" lIns="45720" tIns="18288" rIns="45720" bIns="18288" anchor="t">
+          <a:bodyPr wrap="square" lIns="45720" rIns="45720" tIns="18288" bIns="18288" anchor="t">
             <a:spAutoFit/>
           </a:bodyPr>
           <a:lstStyle/>
@@ -22819,7 +22876,7 @@
         </p:nvSpPr>
         <p:spPr>
           <a:xfrm>
-            <a:off x="822960" y="4083314"/>
+            <a:off x="822960" y="3493008"/>
             <a:ext cx="4852263" cy="786384"/>
           </a:xfrm>
           <a:prstGeom prst="rect">
@@ -22828,7 +22885,7 @@
           <a:noFill/>
         </p:spPr>
         <p:txBody>
-          <a:bodyPr wrap="square" lIns="45720" tIns="18288" rIns="45720" bIns="18288" anchor="t">
+          <a:bodyPr wrap="square" lIns="45720" rIns="45720" tIns="18288" bIns="18288" anchor="t">
             <a:spAutoFit/>
           </a:bodyPr>
           <a:lstStyle/>
@@ -22858,7 +22915,7 @@
         </p:nvSpPr>
         <p:spPr>
           <a:xfrm>
-            <a:off x="6260439" y="3662690"/>
+            <a:off x="6260439" y="3072384"/>
             <a:ext cx="5364327" cy="1316736"/>
           </a:xfrm>
           <a:prstGeom prst="roundRect">
@@ -22891,9 +22948,7 @@
         <p:txBody>
           <a:bodyPr rtlCol="0" anchor="ctr"/>
           <a:lstStyle/>
-          <a:p>
-            <a:endParaRPr/>
-          </a:p>
+          <a:p/>
         </p:txBody>
       </p:sp>
       <p:sp>
@@ -22904,7 +22959,7 @@
         </p:nvSpPr>
         <p:spPr>
           <a:xfrm>
-            <a:off x="6516471" y="3772418"/>
+            <a:off x="6516471" y="3182112"/>
             <a:ext cx="4852263" cy="274320"/>
           </a:xfrm>
           <a:prstGeom prst="rect">
@@ -22913,7 +22968,7 @@
           <a:noFill/>
         </p:spPr>
         <p:txBody>
-          <a:bodyPr wrap="square" lIns="45720" tIns="18288" rIns="45720" bIns="18288" anchor="t">
+          <a:bodyPr wrap="square" lIns="45720" rIns="45720" tIns="18288" bIns="18288" anchor="t">
             <a:spAutoFit/>
           </a:bodyPr>
           <a:lstStyle/>
@@ -22943,7 +22998,7 @@
         </p:nvSpPr>
         <p:spPr>
           <a:xfrm>
-            <a:off x="6516471" y="4083314"/>
+            <a:off x="6516471" y="3493008"/>
             <a:ext cx="4852263" cy="786384"/>
           </a:xfrm>
           <a:prstGeom prst="rect">
@@ -22952,7 +23007,7 @@
           <a:noFill/>
         </p:spPr>
         <p:txBody>
-          <a:bodyPr wrap="square" lIns="45720" tIns="18288" rIns="45720" bIns="18288" anchor="t">
+          <a:bodyPr wrap="square" lIns="45720" rIns="45720" tIns="18288" bIns="18288" anchor="t">
             <a:spAutoFit/>
           </a:bodyPr>
           <a:lstStyle/>
@@ -22982,7 +23037,7 @@
         </p:nvSpPr>
         <p:spPr>
           <a:xfrm>
-            <a:off x="566928" y="5162306"/>
+            <a:off x="566928" y="4572000"/>
             <a:ext cx="11057839" cy="1005840"/>
           </a:xfrm>
           <a:prstGeom prst="roundRect">
@@ -23015,9 +23070,7 @@
         <p:txBody>
           <a:bodyPr rtlCol="0" anchor="ctr"/>
           <a:lstStyle/>
-          <a:p>
-            <a:endParaRPr/>
-          </a:p>
+          <a:p/>
         </p:txBody>
       </p:sp>
       <p:sp>
@@ -23028,7 +23081,7 @@
         </p:nvSpPr>
         <p:spPr>
           <a:xfrm>
-            <a:off x="841247" y="5272034"/>
+            <a:off x="841247" y="4681728"/>
             <a:ext cx="6949440" cy="274320"/>
           </a:xfrm>
           <a:prstGeom prst="rect">
@@ -23037,7 +23090,7 @@
           <a:noFill/>
         </p:spPr>
         <p:txBody>
-          <a:bodyPr wrap="square" lIns="45720" tIns="18288" rIns="45720" bIns="18288" anchor="t">
+          <a:bodyPr wrap="square" lIns="45720" rIns="45720" tIns="18288" bIns="18288" anchor="t">
             <a:spAutoFit/>
           </a:bodyPr>
           <a:lstStyle/>
@@ -23067,7 +23120,7 @@
         </p:nvSpPr>
         <p:spPr>
           <a:xfrm>
-            <a:off x="841247" y="5564642"/>
+            <a:off x="841247" y="4974336"/>
             <a:ext cx="10509199" cy="530352"/>
           </a:xfrm>
           <a:prstGeom prst="rect">
@@ -23076,7 +23129,7 @@
           <a:noFill/>
         </p:spPr>
         <p:txBody>
-          <a:bodyPr wrap="square" lIns="45720" tIns="18288" rIns="45720" bIns="18288" anchor="t">
+          <a:bodyPr wrap="square" lIns="45720" rIns="45720" tIns="18288" bIns="18288" anchor="t">
             <a:spAutoFit/>
           </a:bodyPr>
           <a:lstStyle/>
@@ -23107,7 +23160,7 @@
 </file>
 
 <file path=ppt/slides/slide9.xml><?xml version="1.0" encoding="utf-8"?>
-<p:sld xmlns:a="http://schemas.openxmlformats.org/drawingml/2006/main" xmlns:r="http://schemas.openxmlformats.org/officeDocument/2006/relationships" xmlns:p="http://schemas.openxmlformats.org/presentationml/2006/main">
+<p:sld xmlns:a="http://schemas.openxmlformats.org/drawingml/2006/main" xmlns:p="http://schemas.openxmlformats.org/presentationml/2006/main" xmlns:r="http://schemas.openxmlformats.org/officeDocument/2006/relationships">
   <p:cSld>
     <p:spTree>
       <p:nvGrpSpPr>
@@ -23115,14 +23168,7 @@
         <p:cNvGrpSpPr/>
         <p:nvPr/>
       </p:nvGrpSpPr>
-      <p:grpSpPr>
-        <a:xfrm>
-          <a:off x="0" y="0"/>
-          <a:ext cx="0" cy="0"/>
-          <a:chOff x="0" y="0"/>
-          <a:chExt cx="0" cy="0"/>
-        </a:xfrm>
-      </p:grpSpPr>
+      <p:grpSpPr/>
       <p:sp>
         <p:nvSpPr>
           <p:cNvPr id="2" name="TextBox 1"/>
@@ -23140,7 +23186,7 @@
           <a:noFill/>
         </p:spPr>
         <p:txBody>
-          <a:bodyPr wrap="square" lIns="45720" tIns="18288" rIns="45720" bIns="18288" anchor="t">
+          <a:bodyPr wrap="square" lIns="45720" rIns="45720" tIns="18288" bIns="18288" anchor="t">
             <a:spAutoFit/>
           </a:bodyPr>
           <a:lstStyle/>
@@ -23179,7 +23225,7 @@
           <a:noFill/>
         </p:spPr>
         <p:txBody>
-          <a:bodyPr wrap="square" lIns="45720" tIns="18288" rIns="45720" bIns="18288" anchor="t">
+          <a:bodyPr wrap="square" lIns="45720" rIns="45720" tIns="18288" bIns="18288" anchor="t">
             <a:spAutoFit/>
           </a:bodyPr>
           <a:lstStyle/>
@@ -23242,9 +23288,7 @@
         <p:txBody>
           <a:bodyPr rtlCol="0" anchor="ctr"/>
           <a:lstStyle/>
-          <a:p>
-            <a:endParaRPr/>
-          </a:p>
+          <a:p/>
         </p:txBody>
       </p:sp>
       <p:sp>
@@ -23264,7 +23308,7 @@
           <a:noFill/>
         </p:spPr>
         <p:txBody>
-          <a:bodyPr wrap="square" lIns="45720" tIns="18288" rIns="45720" bIns="18288" anchor="ctr">
+          <a:bodyPr wrap="square" lIns="45720" rIns="45720" tIns="18288" bIns="18288" anchor="ctr">
             <a:spAutoFit/>
           </a:bodyPr>
           <a:lstStyle/>
@@ -23303,7 +23347,7 @@
           <a:noFill/>
         </p:spPr>
         <p:txBody>
-          <a:bodyPr wrap="square" lIns="45720" tIns="18288" rIns="45720" bIns="18288" anchor="ctr">
+          <a:bodyPr wrap="square" lIns="45720" rIns="45720" tIns="18288" bIns="18288" anchor="ctr">
             <a:spAutoFit/>
           </a:bodyPr>
           <a:lstStyle/>
@@ -23342,7 +23386,7 @@
           <a:noFill/>
         </p:spPr>
         <p:txBody>
-          <a:bodyPr wrap="square" lIns="45720" tIns="18288" rIns="45720" bIns="18288" anchor="ctr">
+          <a:bodyPr wrap="square" lIns="45720" rIns="45720" tIns="18288" bIns="18288" anchor="ctr">
             <a:spAutoFit/>
           </a:bodyPr>
           <a:lstStyle/>
@@ -23381,7 +23425,7 @@
           <a:noFill/>
         </p:spPr>
         <p:txBody>
-          <a:bodyPr wrap="square" lIns="45720" tIns="18288" rIns="45720" bIns="18288" anchor="ctr">
+          <a:bodyPr wrap="square" lIns="45720" rIns="45720" tIns="18288" bIns="18288" anchor="ctr">
             <a:spAutoFit/>
           </a:bodyPr>
           <a:lstStyle/>
@@ -23420,7 +23464,7 @@
           <a:noFill/>
         </p:spPr>
         <p:txBody>
-          <a:bodyPr wrap="square" lIns="45720" tIns="18288" rIns="45720" bIns="18288" anchor="ctr">
+          <a:bodyPr wrap="square" lIns="45720" rIns="45720" tIns="18288" bIns="18288" anchor="ctr">
             <a:spAutoFit/>
           </a:bodyPr>
           <a:lstStyle/>
@@ -23481,9 +23525,7 @@
         <p:txBody>
           <a:bodyPr rtlCol="0" anchor="ctr"/>
           <a:lstStyle/>
-          <a:p>
-            <a:endParaRPr/>
-          </a:p>
+          <a:p/>
         </p:txBody>
       </p:sp>
       <p:sp>
@@ -23503,7 +23545,7 @@
           <a:noFill/>
         </p:spPr>
         <p:txBody>
-          <a:bodyPr wrap="square" lIns="45720" tIns="18288" rIns="45720" bIns="18288" anchor="ctr">
+          <a:bodyPr wrap="square" lIns="45720" rIns="45720" tIns="18288" bIns="18288" anchor="ctr">
             <a:spAutoFit/>
           </a:bodyPr>
           <a:lstStyle/>
@@ -23542,7 +23584,7 @@
           <a:noFill/>
         </p:spPr>
         <p:txBody>
-          <a:bodyPr wrap="square" lIns="45720" tIns="18288" rIns="45720" bIns="18288" anchor="ctr">
+          <a:bodyPr wrap="square" lIns="45720" rIns="45720" tIns="18288" bIns="18288" anchor="ctr">
             <a:spAutoFit/>
           </a:bodyPr>
           <a:lstStyle/>
@@ -23581,7 +23623,7 @@
           <a:noFill/>
         </p:spPr>
         <p:txBody>
-          <a:bodyPr wrap="square" lIns="45720" tIns="18288" rIns="45720" bIns="18288" anchor="ctr">
+          <a:bodyPr wrap="square" lIns="45720" rIns="45720" tIns="18288" bIns="18288" anchor="ctr">
             <a:spAutoFit/>
           </a:bodyPr>
           <a:lstStyle/>
@@ -23620,7 +23662,7 @@
           <a:noFill/>
         </p:spPr>
         <p:txBody>
-          <a:bodyPr wrap="square" lIns="45720" tIns="18288" rIns="45720" bIns="18288" anchor="ctr">
+          <a:bodyPr wrap="square" lIns="45720" rIns="45720" tIns="18288" bIns="18288" anchor="ctr">
             <a:spAutoFit/>
           </a:bodyPr>
           <a:lstStyle/>
@@ -23659,7 +23701,7 @@
           <a:noFill/>
         </p:spPr>
         <p:txBody>
-          <a:bodyPr wrap="square" lIns="45720" tIns="18288" rIns="45720" bIns="18288" anchor="ctr">
+          <a:bodyPr wrap="square" lIns="45720" rIns="45720" tIns="18288" bIns="18288" anchor="ctr">
             <a:spAutoFit/>
           </a:bodyPr>
           <a:lstStyle/>
@@ -23698,7 +23740,7 @@
           <a:noFill/>
         </p:spPr>
         <p:txBody>
-          <a:bodyPr wrap="square" lIns="45720" tIns="18288" rIns="45720" bIns="18288" anchor="ctr">
+          <a:bodyPr wrap="square" lIns="45720" rIns="45720" tIns="18288" bIns="18288" anchor="ctr">
             <a:spAutoFit/>
           </a:bodyPr>
           <a:lstStyle/>
@@ -23737,7 +23779,7 @@
           <a:noFill/>
         </p:spPr>
         <p:txBody>
-          <a:bodyPr wrap="square" lIns="45720" tIns="18288" rIns="45720" bIns="18288" anchor="ctr">
+          <a:bodyPr wrap="square" lIns="45720" rIns="45720" tIns="18288" bIns="18288" anchor="ctr">
             <a:spAutoFit/>
           </a:bodyPr>
           <a:lstStyle/>
@@ -23776,7 +23818,7 @@
           <a:noFill/>
         </p:spPr>
         <p:txBody>
-          <a:bodyPr wrap="square" lIns="45720" tIns="18288" rIns="45720" bIns="18288" anchor="ctr">
+          <a:bodyPr wrap="square" lIns="45720" rIns="45720" tIns="18288" bIns="18288" anchor="ctr">
             <a:spAutoFit/>
           </a:bodyPr>
           <a:lstStyle/>
@@ -23815,7 +23857,7 @@
           <a:noFill/>
         </p:spPr>
         <p:txBody>
-          <a:bodyPr wrap="square" lIns="45720" tIns="18288" rIns="45720" bIns="18288" anchor="ctr">
+          <a:bodyPr wrap="square" lIns="45720" rIns="45720" tIns="18288" bIns="18288" anchor="ctr">
             <a:spAutoFit/>
           </a:bodyPr>
           <a:lstStyle/>
@@ -23854,7 +23896,7 @@
           <a:noFill/>
         </p:spPr>
         <p:txBody>
-          <a:bodyPr wrap="square" lIns="45720" tIns="18288" rIns="45720" bIns="18288" anchor="ctr">
+          <a:bodyPr wrap="square" lIns="45720" rIns="45720" tIns="18288" bIns="18288" anchor="ctr">
             <a:spAutoFit/>
           </a:bodyPr>
           <a:lstStyle/>
@@ -23915,9 +23957,7 @@
         <p:txBody>
           <a:bodyPr rtlCol="0" anchor="ctr"/>
           <a:lstStyle/>
-          <a:p>
-            <a:endParaRPr/>
-          </a:p>
+          <a:p/>
         </p:txBody>
       </p:sp>
       <p:sp>
@@ -23937,7 +23977,7 @@
           <a:noFill/>
         </p:spPr>
         <p:txBody>
-          <a:bodyPr wrap="square" lIns="45720" tIns="18288" rIns="45720" bIns="18288" anchor="ctr">
+          <a:bodyPr wrap="square" lIns="45720" rIns="45720" tIns="18288" bIns="18288" anchor="ctr">
             <a:spAutoFit/>
           </a:bodyPr>
           <a:lstStyle/>
@@ -23976,7 +24016,7 @@
           <a:noFill/>
         </p:spPr>
         <p:txBody>
-          <a:bodyPr wrap="square" lIns="45720" tIns="18288" rIns="45720" bIns="18288" anchor="ctr">
+          <a:bodyPr wrap="square" lIns="45720" rIns="45720" tIns="18288" bIns="18288" anchor="ctr">
             <a:spAutoFit/>
           </a:bodyPr>
           <a:lstStyle/>
@@ -24015,7 +24055,7 @@
           <a:noFill/>
         </p:spPr>
         <p:txBody>
-          <a:bodyPr wrap="square" lIns="45720" tIns="18288" rIns="45720" bIns="18288" anchor="ctr">
+          <a:bodyPr wrap="square" lIns="45720" rIns="45720" tIns="18288" bIns="18288" anchor="ctr">
             <a:spAutoFit/>
           </a:bodyPr>
           <a:lstStyle/>
@@ -24054,7 +24094,7 @@
           <a:noFill/>
         </p:spPr>
         <p:txBody>
-          <a:bodyPr wrap="square" lIns="45720" tIns="18288" rIns="45720" bIns="18288" anchor="ctr">
+          <a:bodyPr wrap="square" lIns="45720" rIns="45720" tIns="18288" bIns="18288" anchor="ctr">
             <a:spAutoFit/>
           </a:bodyPr>
           <a:lstStyle/>
@@ -24093,7 +24133,7 @@
           <a:noFill/>
         </p:spPr>
         <p:txBody>
-          <a:bodyPr wrap="square" lIns="45720" tIns="18288" rIns="45720" bIns="18288" anchor="ctr">
+          <a:bodyPr wrap="square" lIns="45720" rIns="45720" tIns="18288" bIns="18288" anchor="ctr">
             <a:spAutoFit/>
           </a:bodyPr>
           <a:lstStyle/>
@@ -24132,7 +24172,7 @@
           <a:noFill/>
         </p:spPr>
         <p:txBody>
-          <a:bodyPr wrap="square" lIns="45720" tIns="18288" rIns="45720" bIns="18288" anchor="ctr">
+          <a:bodyPr wrap="square" lIns="45720" rIns="45720" tIns="18288" bIns="18288" anchor="ctr">
             <a:spAutoFit/>
           </a:bodyPr>
           <a:lstStyle/>
@@ -24171,7 +24211,7 @@
           <a:noFill/>
         </p:spPr>
         <p:txBody>
-          <a:bodyPr wrap="square" lIns="45720" tIns="18288" rIns="45720" bIns="18288" anchor="ctr">
+          <a:bodyPr wrap="square" lIns="45720" rIns="45720" tIns="18288" bIns="18288" anchor="ctr">
             <a:spAutoFit/>
           </a:bodyPr>
           <a:lstStyle/>
@@ -24210,7 +24250,7 @@
           <a:noFill/>
         </p:spPr>
         <p:txBody>
-          <a:bodyPr wrap="square" lIns="45720" tIns="18288" rIns="45720" bIns="18288" anchor="ctr">
+          <a:bodyPr wrap="square" lIns="45720" rIns="45720" tIns="18288" bIns="18288" anchor="ctr">
             <a:spAutoFit/>
           </a:bodyPr>
           <a:lstStyle/>
@@ -24249,7 +24289,7 @@
           <a:noFill/>
         </p:spPr>
         <p:txBody>
-          <a:bodyPr wrap="square" lIns="45720" tIns="18288" rIns="45720" bIns="18288" anchor="ctr">
+          <a:bodyPr wrap="square" lIns="45720" rIns="45720" tIns="18288" bIns="18288" anchor="ctr">
             <a:spAutoFit/>
           </a:bodyPr>
           <a:lstStyle/>
@@ -24288,7 +24328,7 @@
           <a:noFill/>
         </p:spPr>
         <p:txBody>
-          <a:bodyPr wrap="square" lIns="45720" tIns="18288" rIns="45720" bIns="18288" anchor="ctr">
+          <a:bodyPr wrap="square" lIns="45720" rIns="45720" tIns="18288" bIns="18288" anchor="ctr">
             <a:spAutoFit/>
           </a:bodyPr>
           <a:lstStyle/>
@@ -24351,9 +24391,7 @@
         <p:txBody>
           <a:bodyPr rtlCol="0" anchor="ctr"/>
           <a:lstStyle/>
-          <a:p>
-            <a:endParaRPr/>
-          </a:p>
+          <a:p/>
         </p:txBody>
       </p:sp>
       <p:sp>
@@ -24373,7 +24411,7 @@
           <a:noFill/>
         </p:spPr>
         <p:txBody>
-          <a:bodyPr wrap="square" lIns="45720" tIns="18288" rIns="45720" bIns="18288" anchor="t">
+          <a:bodyPr wrap="square" lIns="45720" rIns="45720" tIns="18288" bIns="18288" anchor="t">
             <a:spAutoFit/>
           </a:bodyPr>
           <a:lstStyle/>
@@ -24412,7 +24450,7 @@
           <a:noFill/>
         </p:spPr>
         <p:txBody>
-          <a:bodyPr wrap="square" lIns="45720" tIns="18288" rIns="45720" bIns="18288" anchor="t">
+          <a:bodyPr wrap="square" lIns="45720" rIns="45720" tIns="18288" bIns="18288" anchor="t">
             <a:spAutoFit/>
           </a:bodyPr>
           <a:lstStyle/>
@@ -24475,9 +24513,7 @@
         <p:txBody>
           <a:bodyPr rtlCol="0" anchor="ctr"/>
           <a:lstStyle/>
-          <a:p>
-            <a:endParaRPr/>
-          </a:p>
+          <a:p/>
         </p:txBody>
       </p:sp>
       <p:sp>
@@ -24497,7 +24533,7 @@
           <a:noFill/>
         </p:spPr>
         <p:txBody>
-          <a:bodyPr wrap="square" lIns="45720" tIns="18288" rIns="45720" bIns="18288" anchor="t">
+          <a:bodyPr wrap="square" lIns="45720" rIns="45720" tIns="18288" bIns="18288" anchor="t">
             <a:spAutoFit/>
           </a:bodyPr>
           <a:lstStyle/>
@@ -24536,7 +24572,7 @@
           <a:noFill/>
         </p:spPr>
         <p:txBody>
-          <a:bodyPr wrap="square" lIns="45720" tIns="18288" rIns="45720" bIns="18288" anchor="t">
+          <a:bodyPr wrap="square" lIns="45720" rIns="45720" tIns="18288" bIns="18288" anchor="t">
             <a:spAutoFit/>
           </a:bodyPr>
           <a:lstStyle/>
@@ -24599,9 +24635,7 @@
         <p:txBody>
           <a:bodyPr rtlCol="0" anchor="ctr"/>
           <a:lstStyle/>
-          <a:p>
-            <a:endParaRPr/>
-          </a:p>
+          <a:p/>
         </p:txBody>
       </p:sp>
       <p:sp>
@@ -24621,7 +24655,7 @@
           <a:noFill/>
         </p:spPr>
         <p:txBody>
-          <a:bodyPr wrap="square" lIns="45720" tIns="18288" rIns="45720" bIns="18288" anchor="t">
+          <a:bodyPr wrap="square" lIns="45720" rIns="45720" tIns="18288" bIns="18288" anchor="t">
             <a:spAutoFit/>
           </a:bodyPr>
           <a:lstStyle/>
@@ -24660,7 +24694,7 @@
           <a:noFill/>
         </p:spPr>
         <p:txBody>
-          <a:bodyPr wrap="square" lIns="45720" tIns="18288" rIns="45720" bIns="18288" anchor="t">
+          <a:bodyPr wrap="square" lIns="45720" rIns="45720" tIns="18288" bIns="18288" anchor="t">
             <a:spAutoFit/>
           </a:bodyPr>
           <a:lstStyle/>
@@ -24715,7 +24749,7 @@
           <a:noFill/>
         </p:spPr>
         <p:txBody>
-          <a:bodyPr wrap="square" lIns="45720" tIns="18288" rIns="45720" bIns="18288" anchor="t">
+          <a:bodyPr wrap="square" lIns="45720" rIns="45720" tIns="18288" bIns="18288" anchor="t">
             <a:spAutoFit/>
           </a:bodyPr>
           <a:lstStyle/>
@@ -24745,8 +24779,8 @@
         </p:nvSpPr>
         <p:spPr>
           <a:xfrm>
-            <a:off x="566928" y="5010912"/>
-            <a:ext cx="11057839" cy="932688"/>
+            <a:off x="566928" y="4974336"/>
+            <a:ext cx="11057839" cy="1024128"/>
           </a:xfrm>
           <a:prstGeom prst="roundRect">
             <a:avLst>
@@ -24778,9 +24812,7 @@
         <p:txBody>
           <a:bodyPr rtlCol="0" anchor="ctr"/>
           <a:lstStyle/>
-          <a:p>
-            <a:endParaRPr/>
-          </a:p>
+          <a:p/>
         </p:txBody>
       </p:sp>
       <p:sp>
@@ -24791,16 +24823,16 @@
         </p:nvSpPr>
         <p:spPr>
           <a:xfrm>
-            <a:off x="841247" y="5120640"/>
-            <a:ext cx="1371600" cy="256032"/>
-          </a:xfrm>
-          <a:prstGeom prst="rect">
-            <a:avLst/>
-          </a:prstGeom>
-          <a:noFill/>
-        </p:spPr>
-        <p:txBody>
-          <a:bodyPr wrap="square" lIns="45720" tIns="18288" rIns="45720" bIns="18288" anchor="t">
+            <a:off x="841247" y="5084064"/>
+            <a:ext cx="1554480" cy="256032"/>
+          </a:xfrm>
+          <a:prstGeom prst="rect">
+            <a:avLst/>
+          </a:prstGeom>
+          <a:noFill/>
+        </p:spPr>
+        <p:txBody>
+          <a:bodyPr wrap="square" lIns="45720" rIns="45720" tIns="18288" bIns="18288" anchor="t">
             <a:spAutoFit/>
           </a:bodyPr>
           <a:lstStyle/>
@@ -24817,7 +24849,7 @@
                 </a:solidFill>
                 <a:latin typeface="Calibri"/>
               </a:rPr>
-              <a:t>Not merged</a:t>
+              <a:t>Now on main</a:t>
             </a:r>
           </a:p>
         </p:txBody>
@@ -24830,33 +24862,33 @@
         </p:nvSpPr>
         <p:spPr>
           <a:xfrm>
-            <a:off x="2212848" y="5102352"/>
-            <a:ext cx="9137599" cy="512064"/>
-          </a:xfrm>
-          <a:prstGeom prst="rect">
-            <a:avLst/>
-          </a:prstGeom>
-          <a:noFill/>
-        </p:spPr>
-        <p:txBody>
-          <a:bodyPr wrap="square" lIns="45720" tIns="18288" rIns="45720" bIns="18288" anchor="t">
-            <a:spAutoFit/>
-          </a:bodyPr>
-          <a:lstStyle/>
-          <a:p>
-            <a:pPr algn="l">
-              <a:lnSpc>
-                <a:spcPct val="110000"/>
-              </a:lnSpc>
-            </a:pPr>
-            <a:r>
-              <a:rPr sz="1250" b="0" i="0">
+            <a:off x="2395728" y="5065776"/>
+            <a:ext cx="8954719" cy="731520"/>
+          </a:xfrm>
+          <a:prstGeom prst="rect">
+            <a:avLst/>
+          </a:prstGeom>
+          <a:noFill/>
+        </p:spPr>
+        <p:txBody>
+          <a:bodyPr wrap="square" lIns="45720" rIns="45720" tIns="18288" bIns="18288" anchor="t">
+            <a:spAutoFit/>
+          </a:bodyPr>
+          <a:lstStyle/>
+          <a:p>
+            <a:pPr algn="l">
+              <a:lnSpc>
+                <a:spcPct val="108000"/>
+              </a:lnSpc>
+            </a:pPr>
+            <a:r>
+              <a:rPr sz="1180" b="0" i="0">
                 <a:solidFill>
                   <a:srgbClr val="FFFFFF"/>
                 </a:solidFill>
                 <a:latin typeface="Calibri"/>
               </a:rPr>
-              <a:t>The --bowtie2-recheck flag lives on the bowtie2-recheck branch, not on main. Anyone installing RustyClean today does not get the configuration these results describe.</a:t>
+              <a:t>--bowtie2-recheck has been merged and now takes the Bowtie2 index it verifies against, so supplying the index is what enables the pass. These results were produced before the merge, by the branch, with the same verification logic.</a:t>
             </a:r>
           </a:p>
         </p:txBody>
@@ -25200,44 +25232,44 @@
         <a:sysClr val="window" lastClr="FFFFFF"/>
       </a:lt1>
       <a:dk2>
-        <a:srgbClr val="0E2841"/>
+        <a:srgbClr val="1F497D"/>
       </a:dk2>
       <a:lt2>
-        <a:srgbClr val="E8E8E8"/>
+        <a:srgbClr val="EEECE1"/>
       </a:lt2>
       <a:accent1>
-        <a:srgbClr val="156082"/>
+        <a:srgbClr val="4F81BD"/>
       </a:accent1>
       <a:accent2>
-        <a:srgbClr val="E97132"/>
+        <a:srgbClr val="C0504D"/>
       </a:accent2>
       <a:accent3>
-        <a:srgbClr val="196B24"/>
+        <a:srgbClr val="9BBB59"/>
       </a:accent3>
       <a:accent4>
-        <a:srgbClr val="0F9ED5"/>
+        <a:srgbClr val="8064A2"/>
       </a:accent4>
       <a:accent5>
-        <a:srgbClr val="A02B93"/>
+        <a:srgbClr val="4BACC6"/>
       </a:accent5>
       <a:accent6>
-        <a:srgbClr val="4EA72E"/>
+        <a:srgbClr val="F79646"/>
       </a:accent6>
       <a:hlink>
-        <a:srgbClr val="467886"/>
+        <a:srgbClr val="0000FF"/>
       </a:hlink>
       <a:folHlink>
-        <a:srgbClr val="96607D"/>
+        <a:srgbClr val="800080"/>
       </a:folHlink>
     </a:clrScheme>
     <a:fontScheme name="Office">
       <a:majorFont>
-        <a:latin typeface="Aptos Display" panose="02110004020202020204"/>
+        <a:latin typeface="Calibri"/>
         <a:ea typeface=""/>
         <a:cs typeface=""/>
-        <a:font script="Jpan" typeface="游ゴシック Light"/>
+        <a:font script="Jpan" typeface="ＭＳ Ｐゴシック"/>
         <a:font script="Hang" typeface="맑은 고딕"/>
-        <a:font script="Hans" typeface="等线 Light"/>
+        <a:font script="Hans" typeface="宋体"/>
         <a:font script="Hant" typeface="新細明體"/>
         <a:font script="Arab" typeface="Times New Roman"/>
         <a:font script="Hebr" typeface="Times New Roman"/>
@@ -25265,31 +25297,14 @@
         <a:font script="Viet" typeface="Times New Roman"/>
         <a:font script="Uigh" typeface="Microsoft Uighur"/>
         <a:font script="Geor" typeface="Sylfaen"/>
-        <a:font script="Armn" typeface="Arial"/>
-        <a:font script="Bugi" typeface="Leelawadee UI"/>
-        <a:font script="Bopo" typeface="Microsoft JhengHei"/>
-        <a:font script="Java" typeface="Javanese Text"/>
-        <a:font script="Lisu" typeface="Segoe UI"/>
-        <a:font script="Mymr" typeface="Myanmar Text"/>
-        <a:font script="Nkoo" typeface="Ebrima"/>
-        <a:font script="Olck" typeface="Nirmala UI"/>
-        <a:font script="Osma" typeface="Ebrima"/>
-        <a:font script="Phag" typeface="Phagspa"/>
-        <a:font script="Syrn" typeface="Estrangelo Edessa"/>
-        <a:font script="Syrj" typeface="Estrangelo Edessa"/>
-        <a:font script="Syre" typeface="Estrangelo Edessa"/>
-        <a:font script="Sora" typeface="Nirmala UI"/>
-        <a:font script="Tale" typeface="Microsoft Tai Le"/>
-        <a:font script="Talu" typeface="Microsoft New Tai Lue"/>
-        <a:font script="Tfng" typeface="Ebrima"/>
       </a:majorFont>
       <a:minorFont>
-        <a:latin typeface="Aptos" panose="02110004020202020204"/>
+        <a:latin typeface="Calibri"/>
         <a:ea typeface=""/>
         <a:cs typeface=""/>
-        <a:font script="Jpan" typeface="游ゴシック"/>
+        <a:font script="Jpan" typeface="ＭＳ Ｐゴシック"/>
         <a:font script="Hang" typeface="맑은 고딕"/>
-        <a:font script="Hans" typeface="等线"/>
+        <a:font script="Hans" typeface="宋体"/>
         <a:font script="Hant" typeface="新細明體"/>
         <a:font script="Arab" typeface="Arial"/>
         <a:font script="Hebr" typeface="Arial"/>
@@ -25317,23 +25332,6 @@
         <a:font script="Viet" typeface="Arial"/>
         <a:font script="Uigh" typeface="Microsoft Uighur"/>
         <a:font script="Geor" typeface="Sylfaen"/>
-        <a:font script="Armn" typeface="Arial"/>
-        <a:font script="Bugi" typeface="Leelawadee UI"/>
-        <a:font script="Bopo" typeface="Microsoft JhengHei"/>
-        <a:font script="Java" typeface="Javanese Text"/>
-        <a:font script="Lisu" typeface="Segoe UI"/>
-        <a:font script="Mymr" typeface="Myanmar Text"/>
-        <a:font script="Nkoo" typeface="Ebrima"/>
-        <a:font script="Olck" typeface="Nirmala UI"/>
-        <a:font script="Osma" typeface="Ebrima"/>
-        <a:font script="Phag" typeface="Phagspa"/>
-        <a:font script="Syrn" typeface="Estrangelo Edessa"/>
-        <a:font script="Syrj" typeface="Estrangelo Edessa"/>
-        <a:font script="Syre" typeface="Estrangelo Edessa"/>
-        <a:font script="Sora" typeface="Nirmala UI"/>
-        <a:font script="Tale" typeface="Microsoft Tai Le"/>
-        <a:font script="Talu" typeface="Microsoft New Tai Lue"/>
-        <a:font script="Tfng" typeface="Ebrima"/>
       </a:minorFont>
     </a:fontScheme>
     <a:fmtScheme name="Office">
@@ -25345,136 +25343,180 @@
           <a:gsLst>
             <a:gs pos="0">
               <a:schemeClr val="phClr">
-                <a:lumMod val="110000"/>
-                <a:satMod val="105000"/>
-                <a:tint val="67000"/>
+                <a:tint val="50000"/>
+                <a:satMod val="300000"/>
               </a:schemeClr>
             </a:gs>
-            <a:gs pos="50000">
+            <a:gs pos="35000">
               <a:schemeClr val="phClr">
-                <a:lumMod val="105000"/>
-                <a:satMod val="103000"/>
-                <a:tint val="73000"/>
+                <a:tint val="37000"/>
+                <a:satMod val="300000"/>
               </a:schemeClr>
             </a:gs>
             <a:gs pos="100000">
               <a:schemeClr val="phClr">
-                <a:lumMod val="105000"/>
-                <a:satMod val="109000"/>
-                <a:tint val="81000"/>
+                <a:tint val="15000"/>
+                <a:satMod val="350000"/>
               </a:schemeClr>
             </a:gs>
           </a:gsLst>
-          <a:lin ang="5400000" scaled="0"/>
+          <a:lin ang="16200000" scaled="1"/>
         </a:gradFill>
         <a:gradFill rotWithShape="1">
           <a:gsLst>
             <a:gs pos="0">
               <a:schemeClr val="phClr">
-                <a:satMod val="103000"/>
-                <a:lumMod val="102000"/>
-                <a:tint val="94000"/>
-              </a:schemeClr>
-            </a:gs>
-            <a:gs pos="50000">
-              <a:schemeClr val="phClr">
-                <a:satMod val="110000"/>
-                <a:lumMod val="100000"/>
+                <a:tint val="100000"/>
                 <a:shade val="100000"/>
+                <a:satMod val="130000"/>
               </a:schemeClr>
             </a:gs>
             <a:gs pos="100000">
               <a:schemeClr val="phClr">
-                <a:lumMod val="99000"/>
-                <a:satMod val="120000"/>
-                <a:shade val="78000"/>
+                <a:tint val="50000"/>
+                <a:shade val="100000"/>
+                <a:satMod val="350000"/>
               </a:schemeClr>
             </a:gs>
           </a:gsLst>
-          <a:lin ang="5400000" scaled="0"/>
+          <a:lin ang="16200000" scaled="0"/>
         </a:gradFill>
       </a:fillStyleLst>
       <a:lnStyleLst>
-        <a:ln w="12700" cap="flat" cmpd="sng" algn="ctr">
+        <a:ln w="9525" cap="flat" cmpd="sng" algn="ctr">
           <a:solidFill>
-            <a:schemeClr val="phClr"/>
+            <a:schemeClr val="phClr">
+              <a:shade val="95000"/>
+              <a:satMod val="105000"/>
+            </a:schemeClr>
           </a:solidFill>
           <a:prstDash val="solid"/>
-          <a:miter lim="800000"/>
-        </a:ln>
-        <a:ln w="19050" cap="flat" cmpd="sng" algn="ctr">
-          <a:solidFill>
-            <a:schemeClr val="phClr"/>
-          </a:solidFill>
-          <a:prstDash val="solid"/>
-          <a:miter lim="800000"/>
         </a:ln>
         <a:ln w="25400" cap="flat" cmpd="sng" algn="ctr">
           <a:solidFill>
             <a:schemeClr val="phClr"/>
           </a:solidFill>
           <a:prstDash val="solid"/>
-          <a:miter lim="800000"/>
+        </a:ln>
+        <a:ln w="38100" cap="flat" cmpd="sng" algn="ctr">
+          <a:solidFill>
+            <a:schemeClr val="phClr"/>
+          </a:solidFill>
+          <a:prstDash val="solid"/>
         </a:ln>
       </a:lnStyleLst>
       <a:effectStyleLst>
         <a:effectStyle>
-          <a:effectLst/>
-        </a:effectStyle>
-        <a:effectStyle>
-          <a:effectLst/>
+          <a:effectLst>
+            <a:outerShdw blurRad="40000" dist="20000" dir="5400000" rotWithShape="0">
+              <a:srgbClr val="000000">
+                <a:alpha val="38000"/>
+              </a:srgbClr>
+            </a:outerShdw>
+          </a:effectLst>
         </a:effectStyle>
         <a:effectStyle>
           <a:effectLst>
-            <a:outerShdw blurRad="57150" dist="19050" dir="5400000" algn="ctr" rotWithShape="0">
+            <a:outerShdw blurRad="40000" dist="23000" dir="5400000" rotWithShape="0">
               <a:srgbClr val="000000">
-                <a:alpha val="63000"/>
+                <a:alpha val="35000"/>
               </a:srgbClr>
             </a:outerShdw>
           </a:effectLst>
+        </a:effectStyle>
+        <a:effectStyle>
+          <a:effectLst>
+            <a:outerShdw blurRad="40000" dist="23000" dir="5400000" rotWithShape="0">
+              <a:srgbClr val="000000">
+                <a:alpha val="35000"/>
+              </a:srgbClr>
+            </a:outerShdw>
+          </a:effectLst>
+          <a:scene3d>
+            <a:camera prst="orthographicFront">
+              <a:rot lat="0" lon="0" rev="0"/>
+            </a:camera>
+            <a:lightRig rig="threePt" dir="t">
+              <a:rot lat="0" lon="0" rev="1200000"/>
+            </a:lightRig>
+          </a:scene3d>
+          <a:sp3d>
+            <a:bevelT w="63500" h="25400"/>
+          </a:sp3d>
         </a:effectStyle>
       </a:effectStyleLst>
       <a:bgFillStyleLst>
         <a:solidFill>
           <a:schemeClr val="phClr"/>
         </a:solidFill>
-        <a:solidFill>
-          <a:schemeClr val="phClr">
-            <a:tint val="95000"/>
-            <a:satMod val="170000"/>
-          </a:schemeClr>
-        </a:solidFill>
         <a:gradFill rotWithShape="1">
           <a:gsLst>
             <a:gs pos="0">
               <a:schemeClr val="phClr">
-                <a:tint val="93000"/>
-                <a:satMod val="150000"/>
-                <a:shade val="98000"/>
-                <a:lumMod val="102000"/>
+                <a:tint val="40000"/>
+                <a:satMod val="350000"/>
               </a:schemeClr>
             </a:gs>
-            <a:gs pos="50000">
+            <a:gs pos="40000">
               <a:schemeClr val="phClr">
-                <a:tint val="98000"/>
-                <a:satMod val="130000"/>
-                <a:shade val="90000"/>
-                <a:lumMod val="103000"/>
+                <a:tint val="45000"/>
+                <a:shade val="99000"/>
+                <a:satMod val="350000"/>
               </a:schemeClr>
             </a:gs>
             <a:gs pos="100000">
               <a:schemeClr val="phClr">
-                <a:shade val="63000"/>
-                <a:satMod val="120000"/>
+                <a:shade val="20000"/>
+                <a:satMod val="255000"/>
               </a:schemeClr>
             </a:gs>
           </a:gsLst>
-          <a:lin ang="5400000" scaled="0"/>
+          <a:path path="circle">
+            <a:fillToRect l="50000" t="-80000" r="50000" b="180000"/>
+          </a:path>
+        </a:gradFill>
+        <a:gradFill rotWithShape="1">
+          <a:gsLst>
+            <a:gs pos="0">
+              <a:schemeClr val="phClr">
+                <a:tint val="80000"/>
+                <a:satMod val="300000"/>
+              </a:schemeClr>
+            </a:gs>
+            <a:gs pos="100000">
+              <a:schemeClr val="phClr">
+                <a:shade val="30000"/>
+                <a:satMod val="200000"/>
+              </a:schemeClr>
+            </a:gs>
+          </a:gsLst>
+          <a:path path="circle">
+            <a:fillToRect l="50000" t="50000" r="50000" b="50000"/>
+          </a:path>
         </a:gradFill>
       </a:bgFillStyleLst>
     </a:fmtScheme>
   </a:themeElements>
   <a:objectDefaults>
+    <a:spDef>
+      <a:spPr/>
+      <a:bodyPr/>
+      <a:lstStyle/>
+      <a:style>
+        <a:lnRef idx="1">
+          <a:schemeClr val="accent1"/>
+        </a:lnRef>
+        <a:fillRef idx="3">
+          <a:schemeClr val="accent1"/>
+        </a:fillRef>
+        <a:effectRef idx="2">
+          <a:schemeClr val="accent1"/>
+        </a:effectRef>
+        <a:fontRef idx="minor">
+          <a:schemeClr val="lt1"/>
+        </a:fontRef>
+      </a:style>
+    </a:spDef>
     <a:lnDef>
       <a:spPr/>
       <a:bodyPr/>
@@ -25496,10 +25538,5 @@
     </a:lnDef>
   </a:objectDefaults>
   <a:extraClrSchemeLst/>
-  <a:extLst>
-    <a:ext uri="{05A4C25C-085E-4340-85A3-A5531E510DB2}">
-      <thm15:themeFamily xmlns:thm15="http://schemas.microsoft.com/office/thememl/2012/main" name="Office Theme" id="{2E142A2C-CD16-42D6-873A-C26D2A0506FA}" vid="{1BDDFF52-6CD6-40A5-AB3C-68EB2F1E4D0A}"/>
-    </a:ext>
-  </a:extLst>
 </a:theme>
 </file>